--- a/docs/management/executive_presentation.pptx
+++ b/docs/management/executive_presentation.pptx
@@ -4,6 +4,9 @@
   <p:sldMasterIdLst>
     <p:sldMasterId id="2147483648" r:id="rId1"/>
   </p:sldMasterIdLst>
+  <p:notesMasterIdLst>
+    <p:notesMasterId r:id="rId15"/>
+  </p:notesMasterIdLst>
   <p:sldIdLst>
     <p:sldId id="256" r:id="rId2"/>
     <p:sldId id="257" r:id="rId3"/>
@@ -19,10 +22,7 @@
     <p:sldId id="267" r:id="rId13"/>
     <p:sldId id="268" r:id="rId14"/>
   </p:sldIdLst>
-  <p:notesMasterIdLst>
-    <p:notesMasterId r:id="rId15"/>
-  </p:notesMasterIdLst>
-  <p:sldSz cx="9144000" cy="5143500"/>
+  <p:sldSz cx="9144000" cy="5143500" type="screen16x9"/>
   <p:notesSz cx="5143500" cy="9144000"/>
   <p:defaultTextStyle>
     <a:lvl1pPr marL="0" algn="l" defTabSz="914400" rtl="0" eaLnBrk="1" latinLnBrk="0" hangingPunct="1">
@@ -116,6 +116,11 @@
       </a:defRPr>
     </a:lvl9pPr>
   </p:defaultTextStyle>
+  <p:extLst>
+    <p:ext uri="{EFAFB233-063F-42B5-8137-9DF3F51BA10A}">
+      <p15:sldGuideLst xmlns:p15="http://schemas.microsoft.com/office/powerpoint/2012/main"/>
+    </p:ext>
+  </p:extLst>
 </p:presentation>
 </file>
 
@@ -141,234 +146,10 @@
           <a:chExt cx="0" cy="0"/>
         </a:xfrm>
       </p:grpSpPr>
-      <p:sp>
-        <p:nvSpPr>
-          <p:cNvPr id="2" name="Header Placeholder 1"/>
-          <p:cNvSpPr>
-            <a:spLocks noGrp="1"/>
-          </p:cNvSpPr>
-          <p:nvPr>
-            <p:ph type="hdr" sz="quarter"/>
-          </p:nvPr>
-        </p:nvSpPr>
-        <p:spPr>
-          <a:xfrm>
-            <a:off x="0" y="0"/>
-            <a:ext cx="2971800" cy="458788"/>
-          </a:xfrm>
-          <a:prstGeom prst="rect">
-            <a:avLst/>
-          </a:prstGeom>
-        </p:spPr>
-        <p:txBody>
-          <a:bodyPr vert="horz" lIns="91440" tIns="45720" rIns="91440" bIns="45720" rtlCol="0"/>
-          <a:lstStyle>
-            <a:lvl1pPr algn="l">
-              <a:defRPr sz="1200"/>
-            </a:lvl1pPr>
-          </a:lstStyle>
-          <a:p>
-            <a:endParaRPr lang="en-US"/>
-          </a:p>
-        </p:txBody>
-      </p:sp>
-      <p:sp>
-        <p:nvSpPr>
-          <p:cNvPr id="3" name="Date Placeholder 2"/>
-          <p:cNvSpPr>
-            <a:spLocks noGrp="1"/>
-          </p:cNvSpPr>
-          <p:nvPr>
-            <p:ph type="dt" idx="1"/>
-          </p:nvPr>
-        </p:nvSpPr>
-        <p:spPr>
-          <a:xfrm>
-            <a:off x="3884613" y="0"/>
-            <a:ext cx="2971800" cy="458788"/>
-          </a:xfrm>
-          <a:prstGeom prst="rect">
-            <a:avLst/>
-          </a:prstGeom>
-        </p:spPr>
-        <p:txBody>
-          <a:bodyPr vert="horz" lIns="91440" tIns="45720" rIns="91440" bIns="45720" rtlCol="0"/>
-          <a:lstStyle>
-            <a:lvl1pPr algn="r">
-              <a:defRPr sz="1200"/>
-            </a:lvl1pPr>
-          </a:lstStyle>
-          <a:p>
-            <a:fld id="{5282F153-3F37-0F45-9E97-73ACFA13230C}" type="datetimeFigureOut">
-              <a:rPr lang="en-US"/>
-              <a:t>7/23/19</a:t>
-            </a:fld>
-            <a:endParaRPr lang="en-US"/>
-          </a:p>
-        </p:txBody>
-      </p:sp>
-      <p:sp>
-        <p:nvSpPr>
-          <p:cNvPr id="4" name="Slide Image Placeholder 3"/>
-          <p:cNvSpPr>
-            <a:spLocks noGrp="1" noRot="1" noChangeAspect="1"/>
-          </p:cNvSpPr>
-          <p:nvPr>
-            <p:ph type="sldImg" idx="2"/>
-          </p:nvPr>
-        </p:nvSpPr>
-        <p:spPr>
-          <a:xfrm>
-            <a:off x="685800" y="1143000"/>
-            <a:ext cx="5486400" cy="3086100"/>
-          </a:xfrm>
-          <a:prstGeom prst="rect">
-            <a:avLst/>
-          </a:prstGeom>
-          <a:noFill/>
-          <a:ln w="12700">
-            <a:solidFill>
-              <a:prstClr val="black"/>
-            </a:solidFill>
-          </a:ln>
-        </p:spPr>
-        <p:txBody>
-          <a:bodyPr vert="horz" lIns="91440" tIns="45720" rIns="91440" bIns="45720" rtlCol="0" anchor="ctr"/>
-          <a:lstStyle/>
-          <a:p>
-            <a:endParaRPr lang="en-US"/>
-          </a:p>
-        </p:txBody>
-      </p:sp>
-      <p:sp>
-        <p:nvSpPr>
-          <p:cNvPr id="5" name="Notes Placeholder 4"/>
-          <p:cNvSpPr>
-            <a:spLocks noGrp="1"/>
-          </p:cNvSpPr>
-          <p:nvPr>
-            <p:ph type="body" sz="quarter" idx="3"/>
-          </p:nvPr>
-        </p:nvSpPr>
-        <p:spPr>
-          <a:xfrm>
-            <a:off x="685800" y="4400550"/>
-            <a:ext cx="5486400" cy="3600450"/>
-          </a:xfrm>
-          <a:prstGeom prst="rect">
-            <a:avLst/>
-          </a:prstGeom>
-        </p:spPr>
-        <p:txBody>
-          <a:bodyPr vert="horz" lIns="91440" tIns="45720" rIns="91440" bIns="45720" rtlCol="0"/>
-          <a:lstStyle/>
-          <a:p>
-            <a:pPr lvl="0"/>
-            <a:r>
-              <a:rPr lang="en-US"/>
-              <a:t>Click to edit Master text styles</a:t>
-            </a:r>
-          </a:p>
-          <a:p>
-            <a:pPr lvl="1"/>
-            <a:r>
-              <a:rPr lang="en-US"/>
-              <a:t>Second level</a:t>
-            </a:r>
-          </a:p>
-          <a:p>
-            <a:pPr lvl="2"/>
-            <a:r>
-              <a:rPr lang="en-US"/>
-              <a:t>Third level</a:t>
-            </a:r>
-          </a:p>
-          <a:p>
-            <a:pPr lvl="3"/>
-            <a:r>
-              <a:rPr lang="en-US"/>
-              <a:t>Fourth level</a:t>
-            </a:r>
-          </a:p>
-          <a:p>
-            <a:pPr lvl="4"/>
-            <a:r>
-              <a:rPr lang="en-US"/>
-              <a:t>Fifth level</a:t>
-            </a:r>
-          </a:p>
-        </p:txBody>
-      </p:sp>
-      <p:sp>
-        <p:nvSpPr>
-          <p:cNvPr id="6" name="Footer Placeholder 5"/>
-          <p:cNvSpPr>
-            <a:spLocks noGrp="1"/>
-          </p:cNvSpPr>
-          <p:nvPr>
-            <p:ph type="ftr" sz="quarter" idx="4"/>
-          </p:nvPr>
-        </p:nvSpPr>
-        <p:spPr>
-          <a:xfrm>
-            <a:off x="0" y="8685213"/>
-            <a:ext cx="2971800" cy="458787"/>
-          </a:xfrm>
-          <a:prstGeom prst="rect">
-            <a:avLst/>
-          </a:prstGeom>
-        </p:spPr>
-        <p:txBody>
-          <a:bodyPr vert="horz" lIns="91440" tIns="45720" rIns="91440" bIns="45720" rtlCol="0" anchor="b"/>
-          <a:lstStyle>
-            <a:lvl1pPr algn="l">
-              <a:defRPr sz="1200"/>
-            </a:lvl1pPr>
-          </a:lstStyle>
-          <a:p>
-            <a:endParaRPr lang="en-US"/>
-          </a:p>
-        </p:txBody>
-      </p:sp>
-      <p:sp>
-        <p:nvSpPr>
-          <p:cNvPr id="7" name="Slide Number Placeholder 6"/>
-          <p:cNvSpPr>
-            <a:spLocks noGrp="1"/>
-          </p:cNvSpPr>
-          <p:nvPr>
-            <p:ph type="sldNum" sz="quarter" idx="5"/>
-          </p:nvPr>
-        </p:nvSpPr>
-        <p:spPr>
-          <a:xfrm>
-            <a:off x="3884613" y="8685213"/>
-            <a:ext cx="2971800" cy="458787"/>
-          </a:xfrm>
-          <a:prstGeom prst="rect">
-            <a:avLst/>
-          </a:prstGeom>
-        </p:spPr>
-        <p:txBody>
-          <a:bodyPr vert="horz" lIns="91440" tIns="45720" rIns="91440" bIns="45720" rtlCol="0" anchor="b"/>
-          <a:lstStyle>
-            <a:lvl1pPr algn="r">
-              <a:defRPr sz="1200"/>
-            </a:lvl1pPr>
-          </a:lstStyle>
-          <a:p>
-            <a:fld id="{CE5E9CC1-C706-0F49-92D6-E571CC5EEA8F}" type="slidenum">
-              <a:rPr lang="en-US"/>
-              <a:t>‹#›</a:t>
-            </a:fld>
-            <a:endParaRPr lang="en-US"/>
-          </a:p>
-        </p:txBody>
-      </p:sp>
     </p:spTree>
     <p:extLst>
       <p:ext uri="{BB962C8B-B14F-4D97-AF65-F5344CB8AC3E}">
-        <p14:creationId xmlns:p14="http://schemas.microsoft.com/office/powerpoint/2010/main" val="1024086991"/>
+        <p14:creationId xmlns:p14="http://schemas.microsoft.com/office/powerpoint/2010/main" val="4225544426"/>
       </p:ext>
     </p:extLst>
   </p:cSld>
@@ -512,10 +293,6 @@
           <a:bodyPr/>
           <a:lstStyle/>
           <a:p>
-            <a:r>
-              <a:rPr lang="en-US" dirty="0"/>
-              <a:t/>
-            </a:r>
             <a:endParaRPr lang="en-US" dirty="0"/>
           </a:p>
         </p:txBody>
@@ -600,10 +377,6 @@
           <a:bodyPr/>
           <a:lstStyle/>
           <a:p>
-            <a:r>
-              <a:rPr lang="en-US" dirty="0"/>
-              <a:t/>
-            </a:r>
             <a:endParaRPr lang="en-US" dirty="0"/>
           </a:p>
         </p:txBody>
@@ -688,10 +461,6 @@
           <a:bodyPr/>
           <a:lstStyle/>
           <a:p>
-            <a:r>
-              <a:rPr lang="en-US" dirty="0"/>
-              <a:t/>
-            </a:r>
             <a:endParaRPr lang="en-US" dirty="0"/>
           </a:p>
         </p:txBody>
@@ -776,10 +545,6 @@
           <a:bodyPr/>
           <a:lstStyle/>
           <a:p>
-            <a:r>
-              <a:rPr lang="en-US" dirty="0"/>
-              <a:t/>
-            </a:r>
             <a:endParaRPr lang="en-US" dirty="0"/>
           </a:p>
         </p:txBody>
@@ -864,10 +629,6 @@
           <a:bodyPr/>
           <a:lstStyle/>
           <a:p>
-            <a:r>
-              <a:rPr lang="en-US" dirty="0"/>
-              <a:t/>
-            </a:r>
             <a:endParaRPr lang="en-US" dirty="0"/>
           </a:p>
         </p:txBody>
@@ -952,10 +713,6 @@
           <a:bodyPr/>
           <a:lstStyle/>
           <a:p>
-            <a:r>
-              <a:rPr lang="en-US" dirty="0"/>
-              <a:t/>
-            </a:r>
             <a:endParaRPr lang="en-US" dirty="0"/>
           </a:p>
         </p:txBody>
@@ -1040,10 +797,6 @@
           <a:bodyPr/>
           <a:lstStyle/>
           <a:p>
-            <a:r>
-              <a:rPr lang="en-US" dirty="0"/>
-              <a:t/>
-            </a:r>
             <a:endParaRPr lang="en-US" dirty="0"/>
           </a:p>
         </p:txBody>
@@ -1128,10 +881,6 @@
           <a:bodyPr/>
           <a:lstStyle/>
           <a:p>
-            <a:r>
-              <a:rPr lang="en-US" dirty="0"/>
-              <a:t/>
-            </a:r>
             <a:endParaRPr lang="en-US" dirty="0"/>
           </a:p>
         </p:txBody>
@@ -1216,10 +965,6 @@
           <a:bodyPr/>
           <a:lstStyle/>
           <a:p>
-            <a:r>
-              <a:rPr lang="en-US" dirty="0"/>
-              <a:t/>
-            </a:r>
             <a:endParaRPr lang="en-US" dirty="0"/>
           </a:p>
         </p:txBody>
@@ -1304,10 +1049,6 @@
           <a:bodyPr/>
           <a:lstStyle/>
           <a:p>
-            <a:r>
-              <a:rPr lang="en-US" dirty="0"/>
-              <a:t/>
-            </a:r>
             <a:endParaRPr lang="en-US" dirty="0"/>
           </a:p>
         </p:txBody>
@@ -1392,10 +1133,6 @@
           <a:bodyPr/>
           <a:lstStyle/>
           <a:p>
-            <a:r>
-              <a:rPr lang="en-US" dirty="0"/>
-              <a:t/>
-            </a:r>
             <a:endParaRPr lang="en-US" dirty="0"/>
           </a:p>
         </p:txBody>
@@ -1480,10 +1217,6 @@
           <a:bodyPr/>
           <a:lstStyle/>
           <a:p>
-            <a:r>
-              <a:rPr lang="en-US" dirty="0"/>
-              <a:t/>
-            </a:r>
             <a:endParaRPr lang="en-US" dirty="0"/>
           </a:p>
         </p:txBody>
@@ -1568,10 +1301,6 @@
           <a:bodyPr/>
           <a:lstStyle/>
           <a:p>
-            <a:r>
-              <a:rPr lang="en-US" dirty="0"/>
-              <a:t/>
-            </a:r>
             <a:endParaRPr lang="en-US" dirty="0"/>
           </a:p>
         </p:txBody>
@@ -1645,6 +1374,11 @@
 <file path=ppt/slideMasters/slideMaster1.xml><?xml version="1.0" encoding="utf-8"?>
 <p:sldMaster xmlns:a="http://schemas.openxmlformats.org/drawingml/2006/main" xmlns:r="http://schemas.openxmlformats.org/officeDocument/2006/relationships" xmlns:p="http://schemas.openxmlformats.org/presentationml/2006/main">
   <p:cSld>
+    <p:bg>
+      <p:bgRef idx="1001">
+        <a:schemeClr val="bg1"/>
+      </p:bgRef>
+    </p:bg>
     <p:spTree>
       <p:nvGrpSpPr>
         <p:cNvPr id="1" name=""/>
@@ -1927,6 +1661,7 @@
         <a:solidFill>
           <a:srgbClr val="0D1B3E"/>
         </a:solidFill>
+        <a:effectLst/>
       </p:bgPr>
     </p:bg>
     <p:spTree>
@@ -1967,6 +1702,13 @@
             <a:prstDash val="solid"/>
           </a:ln>
         </p:spPr>
+        <p:txBody>
+          <a:bodyPr/>
+          <a:lstStyle/>
+          <a:p>
+            <a:endParaRPr lang="en-US"/>
+          </a:p>
+        </p:txBody>
       </p:sp>
       <p:sp>
         <p:nvSpPr>
@@ -1994,6 +1736,13 @@
             <a:prstDash val="solid"/>
           </a:ln>
         </p:spPr>
+        <p:txBody>
+          <a:bodyPr/>
+          <a:lstStyle/>
+          <a:p>
+            <a:endParaRPr lang="en-US"/>
+          </a:p>
+        </p:txBody>
       </p:sp>
       <p:sp>
         <p:nvSpPr>
@@ -2019,6 +1768,13 @@
             <a:prstDash val="solid"/>
           </a:ln>
         </p:spPr>
+        <p:txBody>
+          <a:bodyPr/>
+          <a:lstStyle/>
+          <a:p>
+            <a:endParaRPr lang="en-US"/>
+          </a:p>
+        </p:txBody>
       </p:sp>
       <p:sp>
         <p:nvSpPr>
@@ -2041,7 +1797,7 @@
           <a:bodyPr wrap="square" lIns="0" tIns="0" rIns="0" bIns="0" rtlCol="0" anchor="ctr"/>
           <a:lstStyle/>
           <a:p>
-            <a:pPr algn="l" indent="0" marL="0">
+            <a:pPr marL="0" indent="0" algn="l">
               <a:buNone/>
             </a:pPr>
             <a:r>
@@ -2080,7 +1836,7 @@
           <a:bodyPr wrap="square" lIns="0" tIns="0" rIns="0" bIns="0" rtlCol="0" anchor="ctr"/>
           <a:lstStyle/>
           <a:p>
-            <a:pPr algn="l" indent="0" marL="0">
+            <a:pPr marL="0" indent="0" algn="l">
               <a:buNone/>
             </a:pPr>
             <a:r>
@@ -2119,7 +1875,7 @@
           <a:bodyPr wrap="square" lIns="0" tIns="0" rIns="0" bIns="0" rtlCol="0" anchor="ctr"/>
           <a:lstStyle/>
           <a:p>
-            <a:pPr algn="l" indent="0" marL="0">
+            <a:pPr marL="0" indent="0" algn="l">
               <a:buNone/>
             </a:pPr>
             <a:r>
@@ -2163,6 +1919,13 @@
             <a:prstDash val="solid"/>
           </a:ln>
         </p:spPr>
+        <p:txBody>
+          <a:bodyPr/>
+          <a:lstStyle/>
+          <a:p>
+            <a:endParaRPr lang="en-US"/>
+          </a:p>
+        </p:txBody>
       </p:sp>
       <p:sp>
         <p:nvSpPr>
@@ -2185,7 +1948,7 @@
           <a:bodyPr wrap="square" lIns="0" tIns="0" rIns="0" bIns="0" rtlCol="0" anchor="ctr"/>
           <a:lstStyle/>
           <a:p>
-            <a:pPr algn="l" indent="0" marL="0">
+            <a:pPr marL="0" indent="0" algn="l">
               <a:buNone/>
             </a:pPr>
             <a:r>
@@ -2200,6 +1963,123 @@
               <a:t>Self-hosted business workspace  |  Executive &amp; Investor Overview  |  2026</a:t>
             </a:r>
             <a:endParaRPr lang="en-US" sz="1100" dirty="0"/>
+          </a:p>
+        </p:txBody>
+      </p:sp>
+      <p:sp>
+        <p:nvSpPr>
+          <p:cNvPr id="10" name="Text 8"/>
+          <p:cNvSpPr/>
+          <p:nvPr/>
+        </p:nvSpPr>
+        <p:spPr>
+          <a:xfrm>
+            <a:off x="841248" y="4206240"/>
+            <a:ext cx="2286000" cy="502920"/>
+          </a:xfrm>
+          <a:prstGeom prst="rect">
+            <a:avLst/>
+          </a:prstGeom>
+          <a:noFill/>
+          <a:ln/>
+        </p:spPr>
+        <p:txBody>
+          <a:bodyPr wrap="square" lIns="0" tIns="0" rIns="0" bIns="0" rtlCol="0" anchor="ctr"/>
+          <a:lstStyle/>
+          <a:p>
+            <a:pPr marL="0" indent="0" algn="l">
+              <a:buNone/>
+            </a:pPr>
+            <a:r>
+              <a:rPr lang="en-US" sz="2200" b="1" dirty="0">
+                <a:solidFill>
+                  <a:srgbClr val="FFFFFF"/>
+                </a:solidFill>
+                <a:latin typeface="Georgia" pitchFamily="34" charset="0"/>
+                <a:ea typeface="Georgia" pitchFamily="34" charset="-122"/>
+                <a:cs typeface="Georgia" pitchFamily="34" charset="-120"/>
+              </a:rPr>
+              <a:t>jueewo</a:t>
+            </a:r>
+            <a:endParaRPr lang="en-US" sz="2200" dirty="0"/>
+          </a:p>
+        </p:txBody>
+      </p:sp>
+      <p:sp>
+        <p:nvSpPr>
+          <p:cNvPr id="11" name="Text 9"/>
+          <p:cNvSpPr/>
+          <p:nvPr/>
+        </p:nvSpPr>
+        <p:spPr>
+          <a:xfrm>
+            <a:off x="1883664" y="4224528"/>
+            <a:ext cx="1828800" cy="438912"/>
+          </a:xfrm>
+          <a:prstGeom prst="rect">
+            <a:avLst/>
+          </a:prstGeom>
+          <a:noFill/>
+          <a:ln/>
+        </p:spPr>
+        <p:txBody>
+          <a:bodyPr wrap="square" lIns="0" tIns="0" rIns="0" bIns="0" rtlCol="0" anchor="ctr"/>
+          <a:lstStyle/>
+          <a:p>
+            <a:pPr marL="0" indent="0" algn="l">
+              <a:buNone/>
+            </a:pPr>
+            <a:r>
+              <a:rPr lang="en-US" sz="1800" i="1" dirty="0">
+                <a:solidFill>
+                  <a:srgbClr val="A8C8FA"/>
+                </a:solidFill>
+                <a:latin typeface="Georgia" pitchFamily="34" charset="0"/>
+                <a:ea typeface="Georgia" pitchFamily="34" charset="-122"/>
+                <a:cs typeface="Georgia" pitchFamily="34" charset="-120"/>
+              </a:rPr>
+              <a:t>ventures</a:t>
+            </a:r>
+            <a:endParaRPr lang="en-US" sz="1800" dirty="0"/>
+          </a:p>
+        </p:txBody>
+      </p:sp>
+      <p:sp>
+        <p:nvSpPr>
+          <p:cNvPr id="12" name="Text 10"/>
+          <p:cNvSpPr/>
+          <p:nvPr/>
+        </p:nvSpPr>
+        <p:spPr>
+          <a:xfrm>
+            <a:off x="841248" y="4681728"/>
+            <a:ext cx="5029200" cy="274320"/>
+          </a:xfrm>
+          <a:prstGeom prst="rect">
+            <a:avLst/>
+          </a:prstGeom>
+          <a:noFill/>
+          <a:ln/>
+        </p:spPr>
+        <p:txBody>
+          <a:bodyPr wrap="square" lIns="0" tIns="0" rIns="0" bIns="0" rtlCol="0" anchor="ctr"/>
+          <a:lstStyle/>
+          <a:p>
+            <a:pPr marL="0" indent="0" algn="l">
+              <a:buNone/>
+            </a:pPr>
+            <a:r>
+              <a:rPr lang="en-US" sz="900" i="1" dirty="0">
+                <a:solidFill>
+                  <a:srgbClr val="4A6A8A"/>
+                </a:solidFill>
+                <a:latin typeface="Calibri" pitchFamily="34" charset="0"/>
+                <a:ea typeface="Calibri" pitchFamily="34" charset="-122"/>
+                <a:cs typeface="Calibri" pitchFamily="34" charset="-120"/>
+              </a:rPr>
+              <a:t>turning ideas into products &amp; businesses</a:t>
+            </a:r>
+            <a:endParaRPr lang="en-US" sz="900" dirty="0"/>
           </a:p>
         </p:txBody>
       </p:sp>
@@ -2219,6 +2099,7 @@
         <a:solidFill>
           <a:srgbClr val="0D1B3E"/>
         </a:solidFill>
+        <a:effectLst/>
       </p:bgPr>
     </p:bg>
     <p:spTree>
@@ -2256,7 +2137,7 @@
           <a:bodyPr wrap="square" lIns="0" tIns="0" rIns="0" bIns="0" rtlCol="0" anchor="ctr"/>
           <a:lstStyle/>
           <a:p>
-            <a:pPr algn="r" indent="0" marL="0">
+            <a:pPr marL="0" indent="0" algn="r">
               <a:buNone/>
             </a:pPr>
             <a:r>
@@ -2273,7 +2154,46 @@
       </p:sp>
       <p:sp>
         <p:nvSpPr>
-          <p:cNvPr id="3" name="Shape 1"/>
+          <p:cNvPr id="3" name="Text 1"/>
+          <p:cNvSpPr/>
+          <p:nvPr/>
+        </p:nvSpPr>
+        <p:spPr>
+          <a:xfrm>
+            <a:off x="256032" y="4800600"/>
+            <a:ext cx="2011680" cy="228600"/>
+          </a:xfrm>
+          <a:prstGeom prst="rect">
+            <a:avLst/>
+          </a:prstGeom>
+          <a:noFill/>
+          <a:ln/>
+        </p:spPr>
+        <p:txBody>
+          <a:bodyPr wrap="square" lIns="0" tIns="0" rIns="0" bIns="0" rtlCol="0" anchor="ctr"/>
+          <a:lstStyle/>
+          <a:p>
+            <a:pPr marL="0" indent="0" algn="l">
+              <a:buNone/>
+            </a:pPr>
+            <a:r>
+              <a:rPr lang="en-US" sz="750" dirty="0">
+                <a:solidFill>
+                  <a:srgbClr val="2A4070"/>
+                </a:solidFill>
+                <a:latin typeface="Calibri" pitchFamily="34" charset="0"/>
+                <a:ea typeface="Calibri" pitchFamily="34" charset="-122"/>
+                <a:cs typeface="Calibri" pitchFamily="34" charset="-120"/>
+              </a:rPr>
+              <a:t>jueewo ventures</a:t>
+            </a:r>
+            <a:endParaRPr lang="en-US" sz="750" dirty="0"/>
+          </a:p>
+        </p:txBody>
+      </p:sp>
+      <p:sp>
+        <p:nvSpPr>
+          <p:cNvPr id="4" name="Shape 2"/>
           <p:cNvSpPr/>
           <p:nvPr/>
         </p:nvSpPr>
@@ -2295,10 +2215,17 @@
             <a:prstDash val="solid"/>
           </a:ln>
         </p:spPr>
-      </p:sp>
-      <p:sp>
-        <p:nvSpPr>
-          <p:cNvPr id="4" name="Text 2"/>
+        <p:txBody>
+          <a:bodyPr/>
+          <a:lstStyle/>
+          <a:p>
+            <a:endParaRPr lang="en-US"/>
+          </a:p>
+        </p:txBody>
+      </p:sp>
+      <p:sp>
+        <p:nvSpPr>
+          <p:cNvPr id="5" name="Text 3"/>
           <p:cNvSpPr/>
           <p:nvPr/>
         </p:nvSpPr>
@@ -2317,11 +2244,11 @@
           <a:bodyPr wrap="square" lIns="0" tIns="0" rIns="0" bIns="0" rtlCol="0" anchor="ctr"/>
           <a:lstStyle/>
           <a:p>
-            <a:pPr algn="l" indent="0" marL="0">
-              <a:buNone/>
-            </a:pPr>
-            <a:r>
-              <a:rPr lang="en-US" sz="900" b="1" spc="300" kern="0" dirty="0">
+            <a:pPr marL="0" indent="0" algn="l">
+              <a:buNone/>
+            </a:pPr>
+            <a:r>
+              <a:rPr lang="en-US" sz="900" b="1" kern="0" spc="300" dirty="0">
                 <a:solidFill>
                   <a:srgbClr val="A8C8FA"/>
                 </a:solidFill>
@@ -2337,7 +2264,7 @@
       </p:sp>
       <p:sp>
         <p:nvSpPr>
-          <p:cNvPr id="5" name="Text 3"/>
+          <p:cNvPr id="6" name="Text 4"/>
           <p:cNvSpPr/>
           <p:nvPr/>
         </p:nvSpPr>
@@ -2356,7 +2283,7 @@
           <a:bodyPr wrap="square" lIns="0" tIns="0" rIns="0" bIns="0" rtlCol="0" anchor="ctr"/>
           <a:lstStyle/>
           <a:p>
-            <a:pPr algn="l" indent="0" marL="0">
+            <a:pPr marL="0" indent="0" algn="l">
               <a:buNone/>
             </a:pPr>
             <a:r>
@@ -2376,7 +2303,7 @@
       </p:sp>
       <p:sp>
         <p:nvSpPr>
-          <p:cNvPr id="6" name="Text 4"/>
+          <p:cNvPr id="7" name="Text 5"/>
           <p:cNvSpPr/>
           <p:nvPr/>
         </p:nvSpPr>
@@ -2395,7 +2322,7 @@
           <a:bodyPr wrap="square" lIns="0" tIns="0" rIns="0" bIns="0" rtlCol="0" anchor="ctr"/>
           <a:lstStyle/>
           <a:p>
-            <a:pPr algn="l" indent="0" marL="0">
+            <a:pPr marL="0" indent="0" algn="l">
               <a:buNone/>
             </a:pPr>
             <a:r>
@@ -2415,7 +2342,7 @@
       </p:sp>
       <p:sp>
         <p:nvSpPr>
-          <p:cNvPr id="7" name="Shape 5"/>
+          <p:cNvPr id="8" name="Shape 6"/>
           <p:cNvSpPr/>
           <p:nvPr/>
         </p:nvSpPr>
@@ -2437,17 +2364,24 @@
             <a:prstDash val="solid"/>
           </a:ln>
           <a:effectLst>
-            <a:outerShdw sx="100000" sy="100000" kx="0" ky="0" algn="bl" rotWithShape="0" blurRad="101600" dist="38100" dir="8100000">
+            <a:outerShdw blurRad="101600" dist="38100" dir="8100000" algn="bl" rotWithShape="0">
               <a:srgbClr val="000000">
                 <a:alpha val="10000"/>
               </a:srgbClr>
             </a:outerShdw>
           </a:effectLst>
         </p:spPr>
-      </p:sp>
-      <p:sp>
-        <p:nvSpPr>
-          <p:cNvPr id="8" name="Shape 6"/>
+        <p:txBody>
+          <a:bodyPr/>
+          <a:lstStyle/>
+          <a:p>
+            <a:endParaRPr lang="en-US"/>
+          </a:p>
+        </p:txBody>
+      </p:sp>
+      <p:sp>
+        <p:nvSpPr>
+          <p:cNvPr id="9" name="Shape 7"/>
           <p:cNvSpPr/>
           <p:nvPr/>
         </p:nvSpPr>
@@ -2469,10 +2403,17 @@
             <a:prstDash val="solid"/>
           </a:ln>
         </p:spPr>
-      </p:sp>
-      <p:sp>
-        <p:nvSpPr>
-          <p:cNvPr id="9" name="Text 7"/>
+        <p:txBody>
+          <a:bodyPr/>
+          <a:lstStyle/>
+          <a:p>
+            <a:endParaRPr lang="en-US"/>
+          </a:p>
+        </p:txBody>
+      </p:sp>
+      <p:sp>
+        <p:nvSpPr>
+          <p:cNvPr id="10" name="Text 8"/>
           <p:cNvSpPr/>
           <p:nvPr/>
         </p:nvSpPr>
@@ -2491,7 +2432,7 @@
           <a:bodyPr wrap="square" lIns="0" tIns="0" rIns="0" bIns="0" rtlCol="0" anchor="ctr"/>
           <a:lstStyle/>
           <a:p>
-            <a:pPr algn="l" indent="0" marL="0">
+            <a:pPr marL="0" indent="0" algn="l">
               <a:buNone/>
             </a:pPr>
             <a:r>
@@ -2511,7 +2452,7 @@
       </p:sp>
       <p:sp>
         <p:nvSpPr>
-          <p:cNvPr id="10" name="Text 8"/>
+          <p:cNvPr id="11" name="Text 9"/>
           <p:cNvSpPr/>
           <p:nvPr/>
         </p:nvSpPr>
@@ -2530,7 +2471,7 @@
           <a:bodyPr wrap="square" lIns="0" tIns="0" rIns="0" bIns="0" rtlCol="0" anchor="ctr"/>
           <a:lstStyle/>
           <a:p>
-            <a:pPr algn="l" indent="0" marL="0">
+            <a:pPr marL="0" indent="0" algn="l">
               <a:buNone/>
             </a:pPr>
             <a:r>
@@ -2550,7 +2491,7 @@
       </p:sp>
       <p:sp>
         <p:nvSpPr>
-          <p:cNvPr id="11" name="Shape 9"/>
+          <p:cNvPr id="12" name="Shape 10"/>
           <p:cNvSpPr/>
           <p:nvPr/>
         </p:nvSpPr>
@@ -2574,10 +2515,17 @@
             <a:prstDash val="solid"/>
           </a:ln>
         </p:spPr>
-      </p:sp>
-      <p:sp>
-        <p:nvSpPr>
-          <p:cNvPr id="12" name="Text 10"/>
+        <p:txBody>
+          <a:bodyPr/>
+          <a:lstStyle/>
+          <a:p>
+            <a:endParaRPr lang="en-US"/>
+          </a:p>
+        </p:txBody>
+      </p:sp>
+      <p:sp>
+        <p:nvSpPr>
+          <p:cNvPr id="13" name="Text 11"/>
           <p:cNvSpPr/>
           <p:nvPr/>
         </p:nvSpPr>
@@ -2596,7 +2544,7 @@
           <a:bodyPr wrap="square" lIns="0" tIns="0" rIns="0" bIns="0" rtlCol="0" anchor="ctr"/>
           <a:lstStyle/>
           <a:p>
-            <a:pPr algn="l" indent="0" marL="0">
+            <a:pPr marL="0" indent="0" algn="l">
               <a:buNone/>
             </a:pPr>
             <a:r>
@@ -2616,7 +2564,7 @@
       </p:sp>
       <p:sp>
         <p:nvSpPr>
-          <p:cNvPr id="13" name="Shape 11"/>
+          <p:cNvPr id="14" name="Shape 12"/>
           <p:cNvSpPr/>
           <p:nvPr/>
         </p:nvSpPr>
@@ -2638,17 +2586,24 @@
             <a:prstDash val="solid"/>
           </a:ln>
           <a:effectLst>
-            <a:outerShdw sx="100000" sy="100000" kx="0" ky="0" algn="bl" rotWithShape="0" blurRad="101600" dist="38100" dir="8100000">
+            <a:outerShdw blurRad="101600" dist="38100" dir="8100000" algn="bl" rotWithShape="0">
               <a:srgbClr val="000000">
                 <a:alpha val="10000"/>
               </a:srgbClr>
             </a:outerShdw>
           </a:effectLst>
         </p:spPr>
-      </p:sp>
-      <p:sp>
-        <p:nvSpPr>
-          <p:cNvPr id="14" name="Shape 12"/>
+        <p:txBody>
+          <a:bodyPr/>
+          <a:lstStyle/>
+          <a:p>
+            <a:endParaRPr lang="en-US"/>
+          </a:p>
+        </p:txBody>
+      </p:sp>
+      <p:sp>
+        <p:nvSpPr>
+          <p:cNvPr id="15" name="Shape 13"/>
           <p:cNvSpPr/>
           <p:nvPr/>
         </p:nvSpPr>
@@ -2670,10 +2625,17 @@
             <a:prstDash val="solid"/>
           </a:ln>
         </p:spPr>
-      </p:sp>
-      <p:sp>
-        <p:nvSpPr>
-          <p:cNvPr id="15" name="Text 13"/>
+        <p:txBody>
+          <a:bodyPr/>
+          <a:lstStyle/>
+          <a:p>
+            <a:endParaRPr lang="en-US"/>
+          </a:p>
+        </p:txBody>
+      </p:sp>
+      <p:sp>
+        <p:nvSpPr>
+          <p:cNvPr id="16" name="Text 14"/>
           <p:cNvSpPr/>
           <p:nvPr/>
         </p:nvSpPr>
@@ -2692,7 +2654,7 @@
           <a:bodyPr wrap="square" lIns="0" tIns="0" rIns="0" bIns="0" rtlCol="0" anchor="ctr"/>
           <a:lstStyle/>
           <a:p>
-            <a:pPr algn="l" indent="0" marL="0">
+            <a:pPr marL="0" indent="0" algn="l">
               <a:buNone/>
             </a:pPr>
             <a:r>
@@ -2712,7 +2674,7 @@
       </p:sp>
       <p:sp>
         <p:nvSpPr>
-          <p:cNvPr id="16" name="Text 14"/>
+          <p:cNvPr id="17" name="Text 15"/>
           <p:cNvSpPr/>
           <p:nvPr/>
         </p:nvSpPr>
@@ -2731,7 +2693,7 @@
           <a:bodyPr wrap="square" lIns="0" tIns="0" rIns="0" bIns="0" rtlCol="0" anchor="ctr"/>
           <a:lstStyle/>
           <a:p>
-            <a:pPr algn="l" indent="0" marL="0">
+            <a:pPr marL="0" indent="0" algn="l">
               <a:buNone/>
             </a:pPr>
             <a:r>
@@ -2751,7 +2713,7 @@
       </p:sp>
       <p:sp>
         <p:nvSpPr>
-          <p:cNvPr id="17" name="Shape 15"/>
+          <p:cNvPr id="18" name="Shape 16"/>
           <p:cNvSpPr/>
           <p:nvPr/>
         </p:nvSpPr>
@@ -2775,10 +2737,17 @@
             <a:prstDash val="solid"/>
           </a:ln>
         </p:spPr>
-      </p:sp>
-      <p:sp>
-        <p:nvSpPr>
-          <p:cNvPr id="18" name="Text 16"/>
+        <p:txBody>
+          <a:bodyPr/>
+          <a:lstStyle/>
+          <a:p>
+            <a:endParaRPr lang="en-US"/>
+          </a:p>
+        </p:txBody>
+      </p:sp>
+      <p:sp>
+        <p:nvSpPr>
+          <p:cNvPr id="19" name="Text 17"/>
           <p:cNvSpPr/>
           <p:nvPr/>
         </p:nvSpPr>
@@ -2797,7 +2766,7 @@
           <a:bodyPr wrap="square" lIns="0" tIns="0" rIns="0" bIns="0" rtlCol="0" anchor="ctr"/>
           <a:lstStyle/>
           <a:p>
-            <a:pPr algn="l" indent="0" marL="0">
+            <a:pPr marL="0" indent="0" algn="l">
               <a:buNone/>
             </a:pPr>
             <a:r>
@@ -2817,7 +2786,7 @@
       </p:sp>
       <p:sp>
         <p:nvSpPr>
-          <p:cNvPr id="19" name="Shape 17"/>
+          <p:cNvPr id="20" name="Shape 18"/>
           <p:cNvSpPr/>
           <p:nvPr/>
         </p:nvSpPr>
@@ -2839,17 +2808,24 @@
             <a:prstDash val="solid"/>
           </a:ln>
           <a:effectLst>
-            <a:outerShdw sx="100000" sy="100000" kx="0" ky="0" algn="bl" rotWithShape="0" blurRad="101600" dist="38100" dir="8100000">
+            <a:outerShdw blurRad="101600" dist="38100" dir="8100000" algn="bl" rotWithShape="0">
               <a:srgbClr val="000000">
                 <a:alpha val="10000"/>
               </a:srgbClr>
             </a:outerShdw>
           </a:effectLst>
         </p:spPr>
-      </p:sp>
-      <p:sp>
-        <p:nvSpPr>
-          <p:cNvPr id="20" name="Shape 18"/>
+        <p:txBody>
+          <a:bodyPr/>
+          <a:lstStyle/>
+          <a:p>
+            <a:endParaRPr lang="en-US"/>
+          </a:p>
+        </p:txBody>
+      </p:sp>
+      <p:sp>
+        <p:nvSpPr>
+          <p:cNvPr id="21" name="Shape 19"/>
           <p:cNvSpPr/>
           <p:nvPr/>
         </p:nvSpPr>
@@ -2871,10 +2847,17 @@
             <a:prstDash val="solid"/>
           </a:ln>
         </p:spPr>
-      </p:sp>
-      <p:sp>
-        <p:nvSpPr>
-          <p:cNvPr id="21" name="Text 19"/>
+        <p:txBody>
+          <a:bodyPr/>
+          <a:lstStyle/>
+          <a:p>
+            <a:endParaRPr lang="en-US"/>
+          </a:p>
+        </p:txBody>
+      </p:sp>
+      <p:sp>
+        <p:nvSpPr>
+          <p:cNvPr id="22" name="Text 20"/>
           <p:cNvSpPr/>
           <p:nvPr/>
         </p:nvSpPr>
@@ -2893,7 +2876,7 @@
           <a:bodyPr wrap="square" lIns="0" tIns="0" rIns="0" bIns="0" rtlCol="0" anchor="ctr"/>
           <a:lstStyle/>
           <a:p>
-            <a:pPr algn="l" indent="0" marL="0">
+            <a:pPr marL="0" indent="0" algn="l">
               <a:buNone/>
             </a:pPr>
             <a:r>
@@ -2913,7 +2896,7 @@
       </p:sp>
       <p:sp>
         <p:nvSpPr>
-          <p:cNvPr id="22" name="Text 20"/>
+          <p:cNvPr id="23" name="Text 21"/>
           <p:cNvSpPr/>
           <p:nvPr/>
         </p:nvSpPr>
@@ -2932,7 +2915,7 @@
           <a:bodyPr wrap="square" lIns="0" tIns="0" rIns="0" bIns="0" rtlCol="0" anchor="ctr"/>
           <a:lstStyle/>
           <a:p>
-            <a:pPr algn="l" indent="0" marL="0">
+            <a:pPr marL="0" indent="0" algn="l">
               <a:buNone/>
             </a:pPr>
             <a:r>
@@ -2952,7 +2935,7 @@
       </p:sp>
       <p:sp>
         <p:nvSpPr>
-          <p:cNvPr id="23" name="Shape 21"/>
+          <p:cNvPr id="24" name="Shape 22"/>
           <p:cNvSpPr/>
           <p:nvPr/>
         </p:nvSpPr>
@@ -2976,10 +2959,17 @@
             <a:prstDash val="solid"/>
           </a:ln>
         </p:spPr>
-      </p:sp>
-      <p:sp>
-        <p:nvSpPr>
-          <p:cNvPr id="24" name="Text 22"/>
+        <p:txBody>
+          <a:bodyPr/>
+          <a:lstStyle/>
+          <a:p>
+            <a:endParaRPr lang="en-US"/>
+          </a:p>
+        </p:txBody>
+      </p:sp>
+      <p:sp>
+        <p:nvSpPr>
+          <p:cNvPr id="25" name="Text 23"/>
           <p:cNvSpPr/>
           <p:nvPr/>
         </p:nvSpPr>
@@ -2998,7 +2988,7 @@
           <a:bodyPr wrap="square" lIns="0" tIns="0" rIns="0" bIns="0" rtlCol="0" anchor="ctr"/>
           <a:lstStyle/>
           <a:p>
-            <a:pPr algn="l" indent="0" marL="0">
+            <a:pPr marL="0" indent="0" algn="l">
               <a:buNone/>
             </a:pPr>
             <a:r>
@@ -3018,7 +3008,7 @@
       </p:sp>
       <p:sp>
         <p:nvSpPr>
-          <p:cNvPr id="25" name="Shape 23"/>
+          <p:cNvPr id="26" name="Shape 24"/>
           <p:cNvSpPr/>
           <p:nvPr/>
         </p:nvSpPr>
@@ -3040,17 +3030,24 @@
             <a:prstDash val="solid"/>
           </a:ln>
           <a:effectLst>
-            <a:outerShdw sx="100000" sy="100000" kx="0" ky="0" algn="bl" rotWithShape="0" blurRad="101600" dist="38100" dir="8100000">
+            <a:outerShdw blurRad="101600" dist="38100" dir="8100000" algn="bl" rotWithShape="0">
               <a:srgbClr val="000000">
                 <a:alpha val="10000"/>
               </a:srgbClr>
             </a:outerShdw>
           </a:effectLst>
         </p:spPr>
-      </p:sp>
-      <p:sp>
-        <p:nvSpPr>
-          <p:cNvPr id="26" name="Shape 24"/>
+        <p:txBody>
+          <a:bodyPr/>
+          <a:lstStyle/>
+          <a:p>
+            <a:endParaRPr lang="en-US"/>
+          </a:p>
+        </p:txBody>
+      </p:sp>
+      <p:sp>
+        <p:nvSpPr>
+          <p:cNvPr id="27" name="Shape 25"/>
           <p:cNvSpPr/>
           <p:nvPr/>
         </p:nvSpPr>
@@ -3072,10 +3069,17 @@
             <a:prstDash val="solid"/>
           </a:ln>
         </p:spPr>
-      </p:sp>
-      <p:sp>
-        <p:nvSpPr>
-          <p:cNvPr id="27" name="Text 25"/>
+        <p:txBody>
+          <a:bodyPr/>
+          <a:lstStyle/>
+          <a:p>
+            <a:endParaRPr lang="en-US"/>
+          </a:p>
+        </p:txBody>
+      </p:sp>
+      <p:sp>
+        <p:nvSpPr>
+          <p:cNvPr id="28" name="Text 26"/>
           <p:cNvSpPr/>
           <p:nvPr/>
         </p:nvSpPr>
@@ -3094,7 +3098,7 @@
           <a:bodyPr wrap="square" lIns="0" tIns="0" rIns="0" bIns="0" rtlCol="0" anchor="ctr"/>
           <a:lstStyle/>
           <a:p>
-            <a:pPr algn="l" indent="0" marL="0">
+            <a:pPr marL="0" indent="0" algn="l">
               <a:buNone/>
             </a:pPr>
             <a:r>
@@ -3114,7 +3118,7 @@
       </p:sp>
       <p:sp>
         <p:nvSpPr>
-          <p:cNvPr id="28" name="Text 26"/>
+          <p:cNvPr id="29" name="Text 27"/>
           <p:cNvSpPr/>
           <p:nvPr/>
         </p:nvSpPr>
@@ -3133,7 +3137,7 @@
           <a:bodyPr wrap="square" lIns="0" tIns="0" rIns="0" bIns="0" rtlCol="0" anchor="ctr"/>
           <a:lstStyle/>
           <a:p>
-            <a:pPr algn="l" indent="0" marL="0">
+            <a:pPr marL="0" indent="0" algn="l">
               <a:buNone/>
             </a:pPr>
             <a:r>
@@ -3153,7 +3157,7 @@
       </p:sp>
       <p:sp>
         <p:nvSpPr>
-          <p:cNvPr id="29" name="Shape 27"/>
+          <p:cNvPr id="30" name="Shape 28"/>
           <p:cNvSpPr/>
           <p:nvPr/>
         </p:nvSpPr>
@@ -3177,10 +3181,17 @@
             <a:prstDash val="solid"/>
           </a:ln>
         </p:spPr>
-      </p:sp>
-      <p:sp>
-        <p:nvSpPr>
-          <p:cNvPr id="30" name="Text 28"/>
+        <p:txBody>
+          <a:bodyPr/>
+          <a:lstStyle/>
+          <a:p>
+            <a:endParaRPr lang="en-US"/>
+          </a:p>
+        </p:txBody>
+      </p:sp>
+      <p:sp>
+        <p:nvSpPr>
+          <p:cNvPr id="31" name="Text 29"/>
           <p:cNvSpPr/>
           <p:nvPr/>
         </p:nvSpPr>
@@ -3199,7 +3210,7 @@
           <a:bodyPr wrap="square" lIns="0" tIns="0" rIns="0" bIns="0" rtlCol="0" anchor="ctr"/>
           <a:lstStyle/>
           <a:p>
-            <a:pPr algn="l" indent="0" marL="0">
+            <a:pPr marL="0" indent="0" algn="l">
               <a:buNone/>
             </a:pPr>
             <a:r>
@@ -3219,7 +3230,7 @@
       </p:sp>
       <p:sp>
         <p:nvSpPr>
-          <p:cNvPr id="31" name="Shape 29"/>
+          <p:cNvPr id="32" name="Shape 30"/>
           <p:cNvSpPr/>
           <p:nvPr/>
         </p:nvSpPr>
@@ -3241,17 +3252,24 @@
             <a:prstDash val="solid"/>
           </a:ln>
           <a:effectLst>
-            <a:outerShdw sx="100000" sy="100000" kx="0" ky="0" algn="bl" rotWithShape="0" blurRad="101600" dist="38100" dir="8100000">
+            <a:outerShdw blurRad="101600" dist="38100" dir="8100000" algn="bl" rotWithShape="0">
               <a:srgbClr val="000000">
                 <a:alpha val="10000"/>
               </a:srgbClr>
             </a:outerShdw>
           </a:effectLst>
         </p:spPr>
-      </p:sp>
-      <p:sp>
-        <p:nvSpPr>
-          <p:cNvPr id="32" name="Shape 30"/>
+        <p:txBody>
+          <a:bodyPr/>
+          <a:lstStyle/>
+          <a:p>
+            <a:endParaRPr lang="en-US"/>
+          </a:p>
+        </p:txBody>
+      </p:sp>
+      <p:sp>
+        <p:nvSpPr>
+          <p:cNvPr id="33" name="Shape 31"/>
           <p:cNvSpPr/>
           <p:nvPr/>
         </p:nvSpPr>
@@ -3273,10 +3291,17 @@
             <a:prstDash val="solid"/>
           </a:ln>
         </p:spPr>
-      </p:sp>
-      <p:sp>
-        <p:nvSpPr>
-          <p:cNvPr id="33" name="Text 31"/>
+        <p:txBody>
+          <a:bodyPr/>
+          <a:lstStyle/>
+          <a:p>
+            <a:endParaRPr lang="en-US"/>
+          </a:p>
+        </p:txBody>
+      </p:sp>
+      <p:sp>
+        <p:nvSpPr>
+          <p:cNvPr id="34" name="Text 32"/>
           <p:cNvSpPr/>
           <p:nvPr/>
         </p:nvSpPr>
@@ -3295,7 +3320,7 @@
           <a:bodyPr wrap="square" lIns="0" tIns="0" rIns="0" bIns="0" rtlCol="0" anchor="ctr"/>
           <a:lstStyle/>
           <a:p>
-            <a:pPr algn="l" indent="0" marL="0">
+            <a:pPr marL="0" indent="0" algn="l">
               <a:buNone/>
             </a:pPr>
             <a:r>
@@ -3315,7 +3340,7 @@
       </p:sp>
       <p:sp>
         <p:nvSpPr>
-          <p:cNvPr id="34" name="Text 32"/>
+          <p:cNvPr id="35" name="Text 33"/>
           <p:cNvSpPr/>
           <p:nvPr/>
         </p:nvSpPr>
@@ -3334,7 +3359,7 @@
           <a:bodyPr wrap="square" lIns="0" tIns="0" rIns="0" bIns="0" rtlCol="0" anchor="ctr"/>
           <a:lstStyle/>
           <a:p>
-            <a:pPr algn="l" indent="0" marL="0">
+            <a:pPr marL="0" indent="0" algn="l">
               <a:buNone/>
             </a:pPr>
             <a:r>
@@ -3354,7 +3379,7 @@
       </p:sp>
       <p:sp>
         <p:nvSpPr>
-          <p:cNvPr id="35" name="Shape 33"/>
+          <p:cNvPr id="36" name="Shape 34"/>
           <p:cNvSpPr/>
           <p:nvPr/>
         </p:nvSpPr>
@@ -3378,10 +3403,17 @@
             <a:prstDash val="solid"/>
           </a:ln>
         </p:spPr>
-      </p:sp>
-      <p:sp>
-        <p:nvSpPr>
-          <p:cNvPr id="36" name="Text 34"/>
+        <p:txBody>
+          <a:bodyPr/>
+          <a:lstStyle/>
+          <a:p>
+            <a:endParaRPr lang="en-US"/>
+          </a:p>
+        </p:txBody>
+      </p:sp>
+      <p:sp>
+        <p:nvSpPr>
+          <p:cNvPr id="37" name="Text 35"/>
           <p:cNvSpPr/>
           <p:nvPr/>
         </p:nvSpPr>
@@ -3400,7 +3432,7 @@
           <a:bodyPr wrap="square" lIns="0" tIns="0" rIns="0" bIns="0" rtlCol="0" anchor="ctr"/>
           <a:lstStyle/>
           <a:p>
-            <a:pPr algn="l" indent="0" marL="0">
+            <a:pPr marL="0" indent="0" algn="l">
               <a:buNone/>
             </a:pPr>
             <a:r>
@@ -3420,7 +3452,7 @@
       </p:sp>
       <p:sp>
         <p:nvSpPr>
-          <p:cNvPr id="37" name="Shape 35"/>
+          <p:cNvPr id="38" name="Shape 36"/>
           <p:cNvSpPr/>
           <p:nvPr/>
         </p:nvSpPr>
@@ -3442,10 +3474,17 @@
             <a:prstDash val="solid"/>
           </a:ln>
         </p:spPr>
-      </p:sp>
-      <p:sp>
-        <p:nvSpPr>
-          <p:cNvPr id="38" name="Text 36"/>
+        <p:txBody>
+          <a:bodyPr/>
+          <a:lstStyle/>
+          <a:p>
+            <a:endParaRPr lang="en-US"/>
+          </a:p>
+        </p:txBody>
+      </p:sp>
+      <p:sp>
+        <p:nvSpPr>
+          <p:cNvPr id="39" name="Text 37"/>
           <p:cNvSpPr/>
           <p:nvPr/>
         </p:nvSpPr>
@@ -3464,7 +3503,7 @@
           <a:bodyPr wrap="square" lIns="0" tIns="0" rIns="0" bIns="0" rtlCol="0" anchor="ctr"/>
           <a:lstStyle/>
           <a:p>
-            <a:pPr algn="ctr" indent="0" marL="0">
+            <a:pPr marL="0" indent="0" algn="ctr">
               <a:buNone/>
             </a:pPr>
             <a:r>
@@ -3484,7 +3523,7 @@
       </p:sp>
       <p:sp>
         <p:nvSpPr>
-          <p:cNvPr id="39" name="Text 37"/>
+          <p:cNvPr id="40" name="Text 38"/>
           <p:cNvSpPr/>
           <p:nvPr/>
         </p:nvSpPr>
@@ -3503,7 +3542,7 @@
           <a:bodyPr wrap="square" lIns="0" tIns="0" rIns="0" bIns="0" rtlCol="0" anchor="ctr"/>
           <a:lstStyle/>
           <a:p>
-            <a:pPr algn="ctr" indent="0" marL="0">
+            <a:pPr marL="0" indent="0" algn="ctr">
               <a:buNone/>
             </a:pPr>
             <a:r>
@@ -3523,7 +3562,7 @@
       </p:sp>
       <p:sp>
         <p:nvSpPr>
-          <p:cNvPr id="40" name="Text 38"/>
+          <p:cNvPr id="41" name="Text 39"/>
           <p:cNvSpPr/>
           <p:nvPr/>
         </p:nvSpPr>
@@ -3542,7 +3581,7 @@
           <a:bodyPr wrap="square" lIns="0" tIns="0" rIns="0" bIns="0" rtlCol="0" anchor="ctr"/>
           <a:lstStyle/>
           <a:p>
-            <a:pPr algn="ctr" indent="0" marL="0">
+            <a:pPr marL="0" indent="0" algn="ctr">
               <a:buNone/>
             </a:pPr>
             <a:r>
@@ -3562,7 +3601,7 @@
       </p:sp>
       <p:sp>
         <p:nvSpPr>
-          <p:cNvPr id="41" name="Text 39"/>
+          <p:cNvPr id="42" name="Text 40"/>
           <p:cNvSpPr/>
           <p:nvPr/>
         </p:nvSpPr>
@@ -3581,7 +3620,7 @@
           <a:bodyPr wrap="square" lIns="0" tIns="0" rIns="0" bIns="0" rtlCol="0" anchor="ctr"/>
           <a:lstStyle/>
           <a:p>
-            <a:pPr algn="ctr" indent="0" marL="0">
+            <a:pPr marL="0" indent="0" algn="ctr">
               <a:buNone/>
             </a:pPr>
             <a:r>
@@ -3601,7 +3640,7 @@
       </p:sp>
       <p:sp>
         <p:nvSpPr>
-          <p:cNvPr id="42" name="Text 40"/>
+          <p:cNvPr id="43" name="Text 41"/>
           <p:cNvSpPr/>
           <p:nvPr/>
         </p:nvSpPr>
@@ -3620,7 +3659,7 @@
           <a:bodyPr wrap="square" lIns="0" tIns="0" rIns="0" bIns="0" rtlCol="0" anchor="ctr"/>
           <a:lstStyle/>
           <a:p>
-            <a:pPr algn="ctr" indent="0" marL="0">
+            <a:pPr marL="0" indent="0" algn="ctr">
               <a:buNone/>
             </a:pPr>
             <a:r>
@@ -3654,6 +3693,7 @@
         <a:solidFill>
           <a:srgbClr val="F4F7FF"/>
         </a:solidFill>
+        <a:effectLst/>
       </p:bgPr>
     </p:bg>
     <p:spTree>
@@ -3694,6 +3734,13 @@
             <a:prstDash val="solid"/>
           </a:ln>
         </p:spPr>
+        <p:txBody>
+          <a:bodyPr/>
+          <a:lstStyle/>
+          <a:p>
+            <a:endParaRPr lang="en-US"/>
+          </a:p>
+        </p:txBody>
       </p:sp>
       <p:sp>
         <p:nvSpPr>
@@ -3716,7 +3763,7 @@
           <a:bodyPr wrap="square" lIns="0" tIns="0" rIns="0" bIns="0" rtlCol="0" anchor="ctr"/>
           <a:lstStyle/>
           <a:p>
-            <a:pPr algn="r" indent="0" marL="0">
+            <a:pPr marL="0" indent="0" algn="r">
               <a:buNone/>
             </a:pPr>
             <a:r>
@@ -3734,6 +3781,45 @@
       <p:sp>
         <p:nvSpPr>
           <p:cNvPr id="4" name="Text 2"/>
+          <p:cNvSpPr/>
+          <p:nvPr/>
+        </p:nvSpPr>
+        <p:spPr>
+          <a:xfrm>
+            <a:off x="256032" y="4800600"/>
+            <a:ext cx="2011680" cy="228600"/>
+          </a:xfrm>
+          <a:prstGeom prst="rect">
+            <a:avLst/>
+          </a:prstGeom>
+          <a:noFill/>
+          <a:ln/>
+        </p:spPr>
+        <p:txBody>
+          <a:bodyPr wrap="square" lIns="0" tIns="0" rIns="0" bIns="0" rtlCol="0" anchor="ctr"/>
+          <a:lstStyle/>
+          <a:p>
+            <a:pPr marL="0" indent="0" algn="l">
+              <a:buNone/>
+            </a:pPr>
+            <a:r>
+              <a:rPr lang="en-US" sz="750" dirty="0">
+                <a:solidFill>
+                  <a:srgbClr val="C8D8EE"/>
+                </a:solidFill>
+                <a:latin typeface="Calibri" pitchFamily="34" charset="0"/>
+                <a:ea typeface="Calibri" pitchFamily="34" charset="-122"/>
+                <a:cs typeface="Calibri" pitchFamily="34" charset="-120"/>
+              </a:rPr>
+              <a:t>jueewo ventures</a:t>
+            </a:r>
+            <a:endParaRPr lang="en-US" sz="750" dirty="0"/>
+          </a:p>
+        </p:txBody>
+      </p:sp>
+      <p:sp>
+        <p:nvSpPr>
+          <p:cNvPr id="5" name="Text 3"/>
           <p:cNvSpPr/>
           <p:nvPr/>
         </p:nvSpPr>
@@ -3752,11 +3838,11 @@
           <a:bodyPr wrap="square" lIns="0" tIns="0" rIns="0" bIns="0" rtlCol="0" anchor="ctr"/>
           <a:lstStyle/>
           <a:p>
-            <a:pPr algn="l" indent="0" marL="0">
-              <a:buNone/>
-            </a:pPr>
-            <a:r>
-              <a:rPr lang="en-US" sz="900" b="1" spc="300" kern="0" dirty="0">
+            <a:pPr marL="0" indent="0" algn="l">
+              <a:buNone/>
+            </a:pPr>
+            <a:r>
+              <a:rPr lang="en-US" sz="900" b="1" kern="0" spc="300" dirty="0">
                 <a:solidFill>
                   <a:srgbClr val="3B8BF5"/>
                 </a:solidFill>
@@ -3772,7 +3858,7 @@
       </p:sp>
       <p:sp>
         <p:nvSpPr>
-          <p:cNvPr id="5" name="Text 3"/>
+          <p:cNvPr id="6" name="Text 4"/>
           <p:cNvSpPr/>
           <p:nvPr/>
         </p:nvSpPr>
@@ -3791,7 +3877,7 @@
           <a:bodyPr wrap="square" lIns="0" tIns="0" rIns="0" bIns="0" rtlCol="0" anchor="ctr"/>
           <a:lstStyle/>
           <a:p>
-            <a:pPr algn="l" indent="0" marL="0">
+            <a:pPr marL="0" indent="0" algn="l">
               <a:buNone/>
             </a:pPr>
             <a:r>
@@ -3808,7 +3894,7 @@
             <a:endParaRPr lang="en-US" sz="2800" dirty="0"/>
           </a:p>
           <a:p>
-            <a:pPr algn="l" indent="0" marL="0">
+            <a:pPr marL="0" indent="0" algn="l">
               <a:buNone/>
             </a:pPr>
             <a:r>
@@ -3828,7 +3914,7 @@
       </p:sp>
       <p:sp>
         <p:nvSpPr>
-          <p:cNvPr id="6" name="Shape 4"/>
+          <p:cNvPr id="7" name="Shape 5"/>
           <p:cNvSpPr/>
           <p:nvPr/>
         </p:nvSpPr>
@@ -3850,17 +3936,24 @@
             <a:prstDash val="solid"/>
           </a:ln>
           <a:effectLst>
-            <a:outerShdw sx="100000" sy="100000" kx="0" ky="0" algn="bl" rotWithShape="0" blurRad="101600" dist="38100" dir="8100000">
+            <a:outerShdw blurRad="101600" dist="38100" dir="8100000" algn="bl" rotWithShape="0">
               <a:srgbClr val="000000">
                 <a:alpha val="10000"/>
               </a:srgbClr>
             </a:outerShdw>
           </a:effectLst>
         </p:spPr>
-      </p:sp>
-      <p:sp>
-        <p:nvSpPr>
-          <p:cNvPr id="7" name="Shape 5"/>
+        <p:txBody>
+          <a:bodyPr/>
+          <a:lstStyle/>
+          <a:p>
+            <a:endParaRPr lang="en-US"/>
+          </a:p>
+        </p:txBody>
+      </p:sp>
+      <p:sp>
+        <p:nvSpPr>
+          <p:cNvPr id="8" name="Shape 6"/>
           <p:cNvSpPr/>
           <p:nvPr/>
         </p:nvSpPr>
@@ -3882,10 +3975,17 @@
             <a:prstDash val="solid"/>
           </a:ln>
         </p:spPr>
-      </p:sp>
-      <p:sp>
-        <p:nvSpPr>
-          <p:cNvPr id="8" name="Text 6"/>
+        <p:txBody>
+          <a:bodyPr/>
+          <a:lstStyle/>
+          <a:p>
+            <a:endParaRPr lang="en-US"/>
+          </a:p>
+        </p:txBody>
+      </p:sp>
+      <p:sp>
+        <p:nvSpPr>
+          <p:cNvPr id="9" name="Text 7"/>
           <p:cNvSpPr/>
           <p:nvPr/>
         </p:nvSpPr>
@@ -3904,7 +4004,7 @@
           <a:bodyPr wrap="square" lIns="0" tIns="0" rIns="0" bIns="0" rtlCol="0" anchor="ctr"/>
           <a:lstStyle/>
           <a:p>
-            <a:pPr algn="l" indent="0" marL="0">
+            <a:pPr marL="0" indent="0" algn="l">
               <a:buNone/>
             </a:pPr>
             <a:r>
@@ -3924,7 +4024,7 @@
       </p:sp>
       <p:sp>
         <p:nvSpPr>
-          <p:cNvPr id="9" name="Text 7"/>
+          <p:cNvPr id="10" name="Text 8"/>
           <p:cNvSpPr/>
           <p:nvPr/>
         </p:nvSpPr>
@@ -3943,7 +4043,7 @@
           <a:bodyPr wrap="square" lIns="0" tIns="0" rIns="0" bIns="0" rtlCol="0" anchor="ctr"/>
           <a:lstStyle/>
           <a:p>
-            <a:pPr algn="l" indent="0" marL="0">
+            <a:pPr marL="0" indent="0" algn="l">
               <a:buNone/>
             </a:pPr>
             <a:r>
@@ -3963,7 +4063,7 @@
       </p:sp>
       <p:sp>
         <p:nvSpPr>
-          <p:cNvPr id="10" name="Shape 8"/>
+          <p:cNvPr id="11" name="Shape 9"/>
           <p:cNvSpPr/>
           <p:nvPr/>
         </p:nvSpPr>
@@ -3985,17 +4085,24 @@
             <a:prstDash val="solid"/>
           </a:ln>
           <a:effectLst>
-            <a:outerShdw sx="100000" sy="100000" kx="0" ky="0" algn="bl" rotWithShape="0" blurRad="101600" dist="38100" dir="8100000">
+            <a:outerShdw blurRad="101600" dist="38100" dir="8100000" algn="bl" rotWithShape="0">
               <a:srgbClr val="000000">
                 <a:alpha val="10000"/>
               </a:srgbClr>
             </a:outerShdw>
           </a:effectLst>
         </p:spPr>
-      </p:sp>
-      <p:sp>
-        <p:nvSpPr>
-          <p:cNvPr id="11" name="Shape 9"/>
+        <p:txBody>
+          <a:bodyPr/>
+          <a:lstStyle/>
+          <a:p>
+            <a:endParaRPr lang="en-US"/>
+          </a:p>
+        </p:txBody>
+      </p:sp>
+      <p:sp>
+        <p:nvSpPr>
+          <p:cNvPr id="12" name="Shape 10"/>
           <p:cNvSpPr/>
           <p:nvPr/>
         </p:nvSpPr>
@@ -4017,10 +4124,17 @@
             <a:prstDash val="solid"/>
           </a:ln>
         </p:spPr>
-      </p:sp>
-      <p:sp>
-        <p:nvSpPr>
-          <p:cNvPr id="12" name="Text 10"/>
+        <p:txBody>
+          <a:bodyPr/>
+          <a:lstStyle/>
+          <a:p>
+            <a:endParaRPr lang="en-US"/>
+          </a:p>
+        </p:txBody>
+      </p:sp>
+      <p:sp>
+        <p:nvSpPr>
+          <p:cNvPr id="13" name="Text 11"/>
           <p:cNvSpPr/>
           <p:nvPr/>
         </p:nvSpPr>
@@ -4039,7 +4153,7 @@
           <a:bodyPr wrap="square" lIns="0" tIns="0" rIns="0" bIns="0" rtlCol="0" anchor="ctr"/>
           <a:lstStyle/>
           <a:p>
-            <a:pPr algn="l" indent="0" marL="0">
+            <a:pPr marL="0" indent="0" algn="l">
               <a:buNone/>
             </a:pPr>
             <a:r>
@@ -4059,7 +4173,7 @@
       </p:sp>
       <p:sp>
         <p:nvSpPr>
-          <p:cNvPr id="13" name="Text 11"/>
+          <p:cNvPr id="14" name="Text 12"/>
           <p:cNvSpPr/>
           <p:nvPr/>
         </p:nvSpPr>
@@ -4078,7 +4192,7 @@
           <a:bodyPr wrap="square" lIns="0" tIns="0" rIns="0" bIns="0" rtlCol="0" anchor="ctr"/>
           <a:lstStyle/>
           <a:p>
-            <a:pPr algn="l" indent="0" marL="0">
+            <a:pPr marL="0" indent="0" algn="l">
               <a:buNone/>
             </a:pPr>
             <a:r>
@@ -4098,7 +4212,7 @@
       </p:sp>
       <p:sp>
         <p:nvSpPr>
-          <p:cNvPr id="14" name="Shape 12"/>
+          <p:cNvPr id="15" name="Shape 13"/>
           <p:cNvSpPr/>
           <p:nvPr/>
         </p:nvSpPr>
@@ -4120,17 +4234,24 @@
             <a:prstDash val="solid"/>
           </a:ln>
           <a:effectLst>
-            <a:outerShdw sx="100000" sy="100000" kx="0" ky="0" algn="bl" rotWithShape="0" blurRad="101600" dist="38100" dir="8100000">
+            <a:outerShdw blurRad="101600" dist="38100" dir="8100000" algn="bl" rotWithShape="0">
               <a:srgbClr val="000000">
                 <a:alpha val="10000"/>
               </a:srgbClr>
             </a:outerShdw>
           </a:effectLst>
         </p:spPr>
-      </p:sp>
-      <p:sp>
-        <p:nvSpPr>
-          <p:cNvPr id="15" name="Shape 13"/>
+        <p:txBody>
+          <a:bodyPr/>
+          <a:lstStyle/>
+          <a:p>
+            <a:endParaRPr lang="en-US"/>
+          </a:p>
+        </p:txBody>
+      </p:sp>
+      <p:sp>
+        <p:nvSpPr>
+          <p:cNvPr id="16" name="Shape 14"/>
           <p:cNvSpPr/>
           <p:nvPr/>
         </p:nvSpPr>
@@ -4152,10 +4273,17 @@
             <a:prstDash val="solid"/>
           </a:ln>
         </p:spPr>
-      </p:sp>
-      <p:sp>
-        <p:nvSpPr>
-          <p:cNvPr id="16" name="Text 14"/>
+        <p:txBody>
+          <a:bodyPr/>
+          <a:lstStyle/>
+          <a:p>
+            <a:endParaRPr lang="en-US"/>
+          </a:p>
+        </p:txBody>
+      </p:sp>
+      <p:sp>
+        <p:nvSpPr>
+          <p:cNvPr id="17" name="Text 15"/>
           <p:cNvSpPr/>
           <p:nvPr/>
         </p:nvSpPr>
@@ -4174,7 +4302,7 @@
           <a:bodyPr wrap="square" lIns="0" tIns="0" rIns="0" bIns="0" rtlCol="0" anchor="ctr"/>
           <a:lstStyle/>
           <a:p>
-            <a:pPr algn="l" indent="0" marL="0">
+            <a:pPr marL="0" indent="0" algn="l">
               <a:buNone/>
             </a:pPr>
             <a:r>
@@ -4194,7 +4322,7 @@
       </p:sp>
       <p:sp>
         <p:nvSpPr>
-          <p:cNvPr id="17" name="Text 15"/>
+          <p:cNvPr id="18" name="Text 16"/>
           <p:cNvSpPr/>
           <p:nvPr/>
         </p:nvSpPr>
@@ -4213,7 +4341,7 @@
           <a:bodyPr wrap="square" lIns="0" tIns="0" rIns="0" bIns="0" rtlCol="0" anchor="ctr"/>
           <a:lstStyle/>
           <a:p>
-            <a:pPr algn="l" indent="0" marL="0">
+            <a:pPr marL="0" indent="0" algn="l">
               <a:buNone/>
             </a:pPr>
             <a:r>
@@ -4233,7 +4361,7 @@
       </p:sp>
       <p:sp>
         <p:nvSpPr>
-          <p:cNvPr id="18" name="Shape 16"/>
+          <p:cNvPr id="19" name="Shape 17"/>
           <p:cNvSpPr/>
           <p:nvPr/>
         </p:nvSpPr>
@@ -4255,17 +4383,24 @@
             <a:prstDash val="solid"/>
           </a:ln>
           <a:effectLst>
-            <a:outerShdw sx="100000" sy="100000" kx="0" ky="0" algn="bl" rotWithShape="0" blurRad="101600" dist="38100" dir="8100000">
+            <a:outerShdw blurRad="101600" dist="38100" dir="8100000" algn="bl" rotWithShape="0">
               <a:srgbClr val="000000">
                 <a:alpha val="10000"/>
               </a:srgbClr>
             </a:outerShdw>
           </a:effectLst>
         </p:spPr>
-      </p:sp>
-      <p:sp>
-        <p:nvSpPr>
-          <p:cNvPr id="19" name="Shape 17"/>
+        <p:txBody>
+          <a:bodyPr/>
+          <a:lstStyle/>
+          <a:p>
+            <a:endParaRPr lang="en-US"/>
+          </a:p>
+        </p:txBody>
+      </p:sp>
+      <p:sp>
+        <p:nvSpPr>
+          <p:cNvPr id="20" name="Shape 18"/>
           <p:cNvSpPr/>
           <p:nvPr/>
         </p:nvSpPr>
@@ -4287,10 +4422,17 @@
             <a:prstDash val="solid"/>
           </a:ln>
         </p:spPr>
-      </p:sp>
-      <p:sp>
-        <p:nvSpPr>
-          <p:cNvPr id="20" name="Text 18"/>
+        <p:txBody>
+          <a:bodyPr/>
+          <a:lstStyle/>
+          <a:p>
+            <a:endParaRPr lang="en-US"/>
+          </a:p>
+        </p:txBody>
+      </p:sp>
+      <p:sp>
+        <p:nvSpPr>
+          <p:cNvPr id="21" name="Text 19"/>
           <p:cNvSpPr/>
           <p:nvPr/>
         </p:nvSpPr>
@@ -4309,7 +4451,7 @@
           <a:bodyPr wrap="square" lIns="0" tIns="0" rIns="0" bIns="0" rtlCol="0" anchor="ctr"/>
           <a:lstStyle/>
           <a:p>
-            <a:pPr algn="l" indent="0" marL="0">
+            <a:pPr marL="0" indent="0" algn="l">
               <a:buNone/>
             </a:pPr>
             <a:r>
@@ -4329,7 +4471,7 @@
       </p:sp>
       <p:sp>
         <p:nvSpPr>
-          <p:cNvPr id="21" name="Text 19"/>
+          <p:cNvPr id="22" name="Text 20"/>
           <p:cNvSpPr/>
           <p:nvPr/>
         </p:nvSpPr>
@@ -4348,7 +4490,7 @@
           <a:bodyPr wrap="square" lIns="0" tIns="0" rIns="0" bIns="0" rtlCol="0" anchor="ctr"/>
           <a:lstStyle/>
           <a:p>
-            <a:pPr algn="l" indent="0" marL="0">
+            <a:pPr marL="0" indent="0" algn="l">
               <a:buNone/>
             </a:pPr>
             <a:r>
@@ -4368,7 +4510,7 @@
       </p:sp>
       <p:sp>
         <p:nvSpPr>
-          <p:cNvPr id="22" name="Shape 20"/>
+          <p:cNvPr id="23" name="Shape 21"/>
           <p:cNvSpPr/>
           <p:nvPr/>
         </p:nvSpPr>
@@ -4390,17 +4532,24 @@
             <a:prstDash val="solid"/>
           </a:ln>
           <a:effectLst>
-            <a:outerShdw sx="100000" sy="100000" kx="0" ky="0" algn="bl" rotWithShape="0" blurRad="101600" dist="38100" dir="8100000">
+            <a:outerShdw blurRad="101600" dist="38100" dir="8100000" algn="bl" rotWithShape="0">
               <a:srgbClr val="000000">
                 <a:alpha val="10000"/>
               </a:srgbClr>
             </a:outerShdw>
           </a:effectLst>
         </p:spPr>
-      </p:sp>
-      <p:sp>
-        <p:nvSpPr>
-          <p:cNvPr id="23" name="Shape 21"/>
+        <p:txBody>
+          <a:bodyPr/>
+          <a:lstStyle/>
+          <a:p>
+            <a:endParaRPr lang="en-US"/>
+          </a:p>
+        </p:txBody>
+      </p:sp>
+      <p:sp>
+        <p:nvSpPr>
+          <p:cNvPr id="24" name="Shape 22"/>
           <p:cNvSpPr/>
           <p:nvPr/>
         </p:nvSpPr>
@@ -4422,10 +4571,17 @@
             <a:prstDash val="solid"/>
           </a:ln>
         </p:spPr>
-      </p:sp>
-      <p:sp>
-        <p:nvSpPr>
-          <p:cNvPr id="24" name="Text 22"/>
+        <p:txBody>
+          <a:bodyPr/>
+          <a:lstStyle/>
+          <a:p>
+            <a:endParaRPr lang="en-US"/>
+          </a:p>
+        </p:txBody>
+      </p:sp>
+      <p:sp>
+        <p:nvSpPr>
+          <p:cNvPr id="25" name="Text 23"/>
           <p:cNvSpPr/>
           <p:nvPr/>
         </p:nvSpPr>
@@ -4444,7 +4600,7 @@
           <a:bodyPr wrap="square" lIns="0" tIns="0" rIns="0" bIns="0" rtlCol="0" anchor="ctr"/>
           <a:lstStyle/>
           <a:p>
-            <a:pPr algn="l" indent="0" marL="0">
+            <a:pPr marL="0" indent="0" algn="l">
               <a:buNone/>
             </a:pPr>
             <a:r>
@@ -4464,7 +4620,7 @@
       </p:sp>
       <p:sp>
         <p:nvSpPr>
-          <p:cNvPr id="25" name="Text 23"/>
+          <p:cNvPr id="26" name="Text 24"/>
           <p:cNvSpPr/>
           <p:nvPr/>
         </p:nvSpPr>
@@ -4483,7 +4639,7 @@
           <a:bodyPr wrap="square" lIns="0" tIns="0" rIns="0" bIns="0" rtlCol="0" anchor="ctr"/>
           <a:lstStyle/>
           <a:p>
-            <a:pPr algn="l" indent="0" marL="0">
+            <a:pPr marL="0" indent="0" algn="l">
               <a:buNone/>
             </a:pPr>
             <a:r>
@@ -4503,7 +4659,7 @@
       </p:sp>
       <p:sp>
         <p:nvSpPr>
-          <p:cNvPr id="26" name="Shape 24"/>
+          <p:cNvPr id="27" name="Shape 25"/>
           <p:cNvSpPr/>
           <p:nvPr/>
         </p:nvSpPr>
@@ -4525,17 +4681,24 @@
             <a:prstDash val="solid"/>
           </a:ln>
           <a:effectLst>
-            <a:outerShdw sx="100000" sy="100000" kx="0" ky="0" algn="bl" rotWithShape="0" blurRad="101600" dist="38100" dir="8100000">
+            <a:outerShdw blurRad="101600" dist="38100" dir="8100000" algn="bl" rotWithShape="0">
               <a:srgbClr val="000000">
                 <a:alpha val="10000"/>
               </a:srgbClr>
             </a:outerShdw>
           </a:effectLst>
         </p:spPr>
-      </p:sp>
-      <p:sp>
-        <p:nvSpPr>
-          <p:cNvPr id="27" name="Shape 25"/>
+        <p:txBody>
+          <a:bodyPr/>
+          <a:lstStyle/>
+          <a:p>
+            <a:endParaRPr lang="en-US"/>
+          </a:p>
+        </p:txBody>
+      </p:sp>
+      <p:sp>
+        <p:nvSpPr>
+          <p:cNvPr id="28" name="Shape 26"/>
           <p:cNvSpPr/>
           <p:nvPr/>
         </p:nvSpPr>
@@ -4557,10 +4720,17 @@
             <a:prstDash val="solid"/>
           </a:ln>
         </p:spPr>
-      </p:sp>
-      <p:sp>
-        <p:nvSpPr>
-          <p:cNvPr id="28" name="Text 26"/>
+        <p:txBody>
+          <a:bodyPr/>
+          <a:lstStyle/>
+          <a:p>
+            <a:endParaRPr lang="en-US"/>
+          </a:p>
+        </p:txBody>
+      </p:sp>
+      <p:sp>
+        <p:nvSpPr>
+          <p:cNvPr id="29" name="Text 27"/>
           <p:cNvSpPr/>
           <p:nvPr/>
         </p:nvSpPr>
@@ -4579,7 +4749,7 @@
           <a:bodyPr wrap="square" lIns="0" tIns="0" rIns="0" bIns="0" rtlCol="0" anchor="ctr"/>
           <a:lstStyle/>
           <a:p>
-            <a:pPr algn="l" indent="0" marL="0">
+            <a:pPr marL="0" indent="0" algn="l">
               <a:buNone/>
             </a:pPr>
             <a:r>
@@ -4599,7 +4769,7 @@
       </p:sp>
       <p:sp>
         <p:nvSpPr>
-          <p:cNvPr id="29" name="Text 27"/>
+          <p:cNvPr id="30" name="Text 28"/>
           <p:cNvSpPr/>
           <p:nvPr/>
         </p:nvSpPr>
@@ -4618,7 +4788,7 @@
           <a:bodyPr wrap="square" lIns="0" tIns="0" rIns="0" bIns="0" rtlCol="0" anchor="ctr"/>
           <a:lstStyle/>
           <a:p>
-            <a:pPr algn="l" indent="0" marL="0">
+            <a:pPr marL="0" indent="0" algn="l">
               <a:buNone/>
             </a:pPr>
             <a:r>
@@ -4652,6 +4822,7 @@
         <a:solidFill>
           <a:srgbClr val="0D1B3E"/>
         </a:solidFill>
+        <a:effectLst/>
       </p:bgPr>
     </p:bg>
     <p:spTree>
@@ -4689,7 +4860,7 @@
           <a:bodyPr wrap="square" lIns="0" tIns="0" rIns="0" bIns="0" rtlCol="0" anchor="ctr"/>
           <a:lstStyle/>
           <a:p>
-            <a:pPr algn="r" indent="0" marL="0">
+            <a:pPr marL="0" indent="0" algn="r">
               <a:buNone/>
             </a:pPr>
             <a:r>
@@ -4706,7 +4877,46 @@
       </p:sp>
       <p:sp>
         <p:nvSpPr>
-          <p:cNvPr id="3" name="Shape 1"/>
+          <p:cNvPr id="3" name="Text 1"/>
+          <p:cNvSpPr/>
+          <p:nvPr/>
+        </p:nvSpPr>
+        <p:spPr>
+          <a:xfrm>
+            <a:off x="256032" y="4800600"/>
+            <a:ext cx="2011680" cy="228600"/>
+          </a:xfrm>
+          <a:prstGeom prst="rect">
+            <a:avLst/>
+          </a:prstGeom>
+          <a:noFill/>
+          <a:ln/>
+        </p:spPr>
+        <p:txBody>
+          <a:bodyPr wrap="square" lIns="0" tIns="0" rIns="0" bIns="0" rtlCol="0" anchor="ctr"/>
+          <a:lstStyle/>
+          <a:p>
+            <a:pPr marL="0" indent="0" algn="l">
+              <a:buNone/>
+            </a:pPr>
+            <a:r>
+              <a:rPr lang="en-US" sz="750" dirty="0">
+                <a:solidFill>
+                  <a:srgbClr val="2A4070"/>
+                </a:solidFill>
+                <a:latin typeface="Calibri" pitchFamily="34" charset="0"/>
+                <a:ea typeface="Calibri" pitchFamily="34" charset="-122"/>
+                <a:cs typeface="Calibri" pitchFamily="34" charset="-120"/>
+              </a:rPr>
+              <a:t>jueewo ventures</a:t>
+            </a:r>
+            <a:endParaRPr lang="en-US" sz="750" dirty="0"/>
+          </a:p>
+        </p:txBody>
+      </p:sp>
+      <p:sp>
+        <p:nvSpPr>
+          <p:cNvPr id="4" name="Shape 2"/>
           <p:cNvSpPr/>
           <p:nvPr/>
         </p:nvSpPr>
@@ -4728,10 +4938,17 @@
             <a:prstDash val="solid"/>
           </a:ln>
         </p:spPr>
-      </p:sp>
-      <p:sp>
-        <p:nvSpPr>
-          <p:cNvPr id="4" name="Text 2"/>
+        <p:txBody>
+          <a:bodyPr/>
+          <a:lstStyle/>
+          <a:p>
+            <a:endParaRPr lang="en-US"/>
+          </a:p>
+        </p:txBody>
+      </p:sp>
+      <p:sp>
+        <p:nvSpPr>
+          <p:cNvPr id="5" name="Text 3"/>
           <p:cNvSpPr/>
           <p:nvPr/>
         </p:nvSpPr>
@@ -4750,11 +4967,11 @@
           <a:bodyPr wrap="square" lIns="0" tIns="0" rIns="0" bIns="0" rtlCol="0" anchor="ctr"/>
           <a:lstStyle/>
           <a:p>
-            <a:pPr algn="l" indent="0" marL="0">
-              <a:buNone/>
-            </a:pPr>
-            <a:r>
-              <a:rPr lang="en-US" sz="900" b="1" spc="300" kern="0" dirty="0">
+            <a:pPr marL="0" indent="0" algn="l">
+              <a:buNone/>
+            </a:pPr>
+            <a:r>
+              <a:rPr lang="en-US" sz="900" b="1" kern="0" spc="300" dirty="0">
                 <a:solidFill>
                   <a:srgbClr val="A8C8FA"/>
                 </a:solidFill>
@@ -4770,7 +4987,7 @@
       </p:sp>
       <p:sp>
         <p:nvSpPr>
-          <p:cNvPr id="5" name="Text 3"/>
+          <p:cNvPr id="6" name="Text 4"/>
           <p:cNvSpPr/>
           <p:nvPr/>
         </p:nvSpPr>
@@ -4789,7 +5006,7 @@
           <a:bodyPr wrap="square" lIns="0" tIns="0" rIns="0" bIns="0" rtlCol="0" anchor="ctr"/>
           <a:lstStyle/>
           <a:p>
-            <a:pPr algn="l" indent="0" marL="0">
+            <a:pPr marL="0" indent="0" algn="l">
               <a:buNone/>
             </a:pPr>
             <a:r>
@@ -4806,7 +5023,7 @@
             <a:endParaRPr lang="en-US" sz="3000" dirty="0"/>
           </a:p>
           <a:p>
-            <a:pPr algn="l" indent="0" marL="0">
+            <a:pPr marL="0" indent="0" algn="l">
               <a:buNone/>
             </a:pPr>
             <a:r>
@@ -4826,7 +5043,7 @@
       </p:sp>
       <p:sp>
         <p:nvSpPr>
-          <p:cNvPr id="6" name="Shape 4"/>
+          <p:cNvPr id="7" name="Shape 5"/>
           <p:cNvSpPr/>
           <p:nvPr/>
         </p:nvSpPr>
@@ -4848,17 +5065,24 @@
             <a:prstDash val="solid"/>
           </a:ln>
           <a:effectLst>
-            <a:outerShdw sx="100000" sy="100000" kx="0" ky="0" algn="bl" rotWithShape="0" blurRad="101600" dist="38100" dir="8100000">
+            <a:outerShdw blurRad="101600" dist="38100" dir="8100000" algn="bl" rotWithShape="0">
               <a:srgbClr val="000000">
                 <a:alpha val="10000"/>
               </a:srgbClr>
             </a:outerShdw>
           </a:effectLst>
         </p:spPr>
-      </p:sp>
-      <p:sp>
-        <p:nvSpPr>
-          <p:cNvPr id="7" name="Shape 5"/>
+        <p:txBody>
+          <a:bodyPr/>
+          <a:lstStyle/>
+          <a:p>
+            <a:endParaRPr lang="en-US"/>
+          </a:p>
+        </p:txBody>
+      </p:sp>
+      <p:sp>
+        <p:nvSpPr>
+          <p:cNvPr id="8" name="Shape 6"/>
           <p:cNvSpPr/>
           <p:nvPr/>
         </p:nvSpPr>
@@ -4880,10 +5104,17 @@
             <a:prstDash val="solid"/>
           </a:ln>
         </p:spPr>
-      </p:sp>
-      <p:sp>
-        <p:nvSpPr>
-          <p:cNvPr id="8" name="Text 6"/>
+        <p:txBody>
+          <a:bodyPr/>
+          <a:lstStyle/>
+          <a:p>
+            <a:endParaRPr lang="en-US"/>
+          </a:p>
+        </p:txBody>
+      </p:sp>
+      <p:sp>
+        <p:nvSpPr>
+          <p:cNvPr id="9" name="Text 7"/>
           <p:cNvSpPr/>
           <p:nvPr/>
         </p:nvSpPr>
@@ -4902,11 +5133,11 @@
           <a:bodyPr wrap="square" lIns="0" tIns="0" rIns="0" bIns="0" rtlCol="0" anchor="ctr"/>
           <a:lstStyle/>
           <a:p>
-            <a:pPr algn="l" indent="0" marL="0">
-              <a:buNone/>
-            </a:pPr>
-            <a:r>
-              <a:rPr lang="en-US" sz="800" b="1" spc="200" kern="0" dirty="0">
+            <a:pPr marL="0" indent="0" algn="l">
+              <a:buNone/>
+            </a:pPr>
+            <a:r>
+              <a:rPr lang="en-US" sz="800" b="1" kern="0" spc="200" dirty="0">
                 <a:solidFill>
                   <a:srgbClr val="3B8BF5"/>
                 </a:solidFill>
@@ -4922,7 +5153,7 @@
       </p:sp>
       <p:sp>
         <p:nvSpPr>
-          <p:cNvPr id="9" name="Text 7"/>
+          <p:cNvPr id="10" name="Text 8"/>
           <p:cNvSpPr/>
           <p:nvPr/>
         </p:nvSpPr>
@@ -4941,7 +5172,7 @@
           <a:bodyPr wrap="square" lIns="0" tIns="0" rIns="0" bIns="0" rtlCol="0" anchor="ctr"/>
           <a:lstStyle/>
           <a:p>
-            <a:pPr algn="l" indent="0" marL="0">
+            <a:pPr marL="0" indent="0" algn="l">
               <a:buNone/>
             </a:pPr>
             <a:r>
@@ -4961,7 +5192,7 @@
       </p:sp>
       <p:sp>
         <p:nvSpPr>
-          <p:cNvPr id="10" name="Text 8"/>
+          <p:cNvPr id="11" name="Text 9"/>
           <p:cNvSpPr/>
           <p:nvPr/>
         </p:nvSpPr>
@@ -4980,7 +5211,7 @@
           <a:bodyPr wrap="square" lIns="0" tIns="0" rIns="0" bIns="0" rtlCol="0" anchor="ctr"/>
           <a:lstStyle/>
           <a:p>
-            <a:pPr algn="l" indent="0" marL="0">
+            <a:pPr marL="0" indent="0" algn="l">
               <a:buNone/>
             </a:pPr>
             <a:r>
@@ -5000,7 +5231,7 @@
       </p:sp>
       <p:sp>
         <p:nvSpPr>
-          <p:cNvPr id="11" name="Shape 9"/>
+          <p:cNvPr id="12" name="Shape 10"/>
           <p:cNvSpPr/>
           <p:nvPr/>
         </p:nvSpPr>
@@ -5022,17 +5253,24 @@
             <a:prstDash val="solid"/>
           </a:ln>
           <a:effectLst>
-            <a:outerShdw sx="100000" sy="100000" kx="0" ky="0" algn="bl" rotWithShape="0" blurRad="101600" dist="38100" dir="8100000">
+            <a:outerShdw blurRad="101600" dist="38100" dir="8100000" algn="bl" rotWithShape="0">
               <a:srgbClr val="000000">
                 <a:alpha val="10000"/>
               </a:srgbClr>
             </a:outerShdw>
           </a:effectLst>
         </p:spPr>
-      </p:sp>
-      <p:sp>
-        <p:nvSpPr>
-          <p:cNvPr id="12" name="Shape 10"/>
+        <p:txBody>
+          <a:bodyPr/>
+          <a:lstStyle/>
+          <a:p>
+            <a:endParaRPr lang="en-US"/>
+          </a:p>
+        </p:txBody>
+      </p:sp>
+      <p:sp>
+        <p:nvSpPr>
+          <p:cNvPr id="13" name="Shape 11"/>
           <p:cNvSpPr/>
           <p:nvPr/>
         </p:nvSpPr>
@@ -5054,10 +5292,17 @@
             <a:prstDash val="solid"/>
           </a:ln>
         </p:spPr>
-      </p:sp>
-      <p:sp>
-        <p:nvSpPr>
-          <p:cNvPr id="13" name="Text 11"/>
+        <p:txBody>
+          <a:bodyPr/>
+          <a:lstStyle/>
+          <a:p>
+            <a:endParaRPr lang="en-US"/>
+          </a:p>
+        </p:txBody>
+      </p:sp>
+      <p:sp>
+        <p:nvSpPr>
+          <p:cNvPr id="14" name="Text 12"/>
           <p:cNvSpPr/>
           <p:nvPr/>
         </p:nvSpPr>
@@ -5076,11 +5321,11 @@
           <a:bodyPr wrap="square" lIns="0" tIns="0" rIns="0" bIns="0" rtlCol="0" anchor="ctr"/>
           <a:lstStyle/>
           <a:p>
-            <a:pPr algn="l" indent="0" marL="0">
-              <a:buNone/>
-            </a:pPr>
-            <a:r>
-              <a:rPr lang="en-US" sz="800" b="1" spc="200" kern="0" dirty="0">
+            <a:pPr marL="0" indent="0" algn="l">
+              <a:buNone/>
+            </a:pPr>
+            <a:r>
+              <a:rPr lang="en-US" sz="800" b="1" kern="0" spc="200" dirty="0">
                 <a:solidFill>
                   <a:srgbClr val="3B8BF5"/>
                 </a:solidFill>
@@ -5096,7 +5341,7 @@
       </p:sp>
       <p:sp>
         <p:nvSpPr>
-          <p:cNvPr id="14" name="Text 12"/>
+          <p:cNvPr id="15" name="Text 13"/>
           <p:cNvSpPr/>
           <p:nvPr/>
         </p:nvSpPr>
@@ -5115,7 +5360,7 @@
           <a:bodyPr wrap="square" lIns="0" tIns="0" rIns="0" bIns="0" rtlCol="0" anchor="ctr"/>
           <a:lstStyle/>
           <a:p>
-            <a:pPr algn="l" indent="0" marL="0">
+            <a:pPr marL="0" indent="0" algn="l">
               <a:buNone/>
             </a:pPr>
             <a:r>
@@ -5135,7 +5380,7 @@
       </p:sp>
       <p:sp>
         <p:nvSpPr>
-          <p:cNvPr id="15" name="Text 13"/>
+          <p:cNvPr id="16" name="Text 14"/>
           <p:cNvSpPr/>
           <p:nvPr/>
         </p:nvSpPr>
@@ -5154,7 +5399,7 @@
           <a:bodyPr wrap="square" lIns="0" tIns="0" rIns="0" bIns="0" rtlCol="0" anchor="ctr"/>
           <a:lstStyle/>
           <a:p>
-            <a:pPr algn="l" indent="0" marL="0">
+            <a:pPr marL="0" indent="0" algn="l">
               <a:buNone/>
             </a:pPr>
             <a:r>
@@ -5174,7 +5419,7 @@
       </p:sp>
       <p:sp>
         <p:nvSpPr>
-          <p:cNvPr id="16" name="Shape 14"/>
+          <p:cNvPr id="17" name="Shape 15"/>
           <p:cNvSpPr/>
           <p:nvPr/>
         </p:nvSpPr>
@@ -5196,17 +5441,24 @@
             <a:prstDash val="solid"/>
           </a:ln>
           <a:effectLst>
-            <a:outerShdw sx="100000" sy="100000" kx="0" ky="0" algn="bl" rotWithShape="0" blurRad="101600" dist="38100" dir="8100000">
+            <a:outerShdw blurRad="101600" dist="38100" dir="8100000" algn="bl" rotWithShape="0">
               <a:srgbClr val="000000">
                 <a:alpha val="10000"/>
               </a:srgbClr>
             </a:outerShdw>
           </a:effectLst>
         </p:spPr>
-      </p:sp>
-      <p:sp>
-        <p:nvSpPr>
-          <p:cNvPr id="17" name="Shape 15"/>
+        <p:txBody>
+          <a:bodyPr/>
+          <a:lstStyle/>
+          <a:p>
+            <a:endParaRPr lang="en-US"/>
+          </a:p>
+        </p:txBody>
+      </p:sp>
+      <p:sp>
+        <p:nvSpPr>
+          <p:cNvPr id="18" name="Shape 16"/>
           <p:cNvSpPr/>
           <p:nvPr/>
         </p:nvSpPr>
@@ -5228,10 +5480,17 @@
             <a:prstDash val="solid"/>
           </a:ln>
         </p:spPr>
-      </p:sp>
-      <p:sp>
-        <p:nvSpPr>
-          <p:cNvPr id="18" name="Text 16"/>
+        <p:txBody>
+          <a:bodyPr/>
+          <a:lstStyle/>
+          <a:p>
+            <a:endParaRPr lang="en-US"/>
+          </a:p>
+        </p:txBody>
+      </p:sp>
+      <p:sp>
+        <p:nvSpPr>
+          <p:cNvPr id="19" name="Text 17"/>
           <p:cNvSpPr/>
           <p:nvPr/>
         </p:nvSpPr>
@@ -5250,11 +5509,11 @@
           <a:bodyPr wrap="square" lIns="0" tIns="0" rIns="0" bIns="0" rtlCol="0" anchor="ctr"/>
           <a:lstStyle/>
           <a:p>
-            <a:pPr algn="l" indent="0" marL="0">
-              <a:buNone/>
-            </a:pPr>
-            <a:r>
-              <a:rPr lang="en-US" sz="800" b="1" spc="200" kern="0" dirty="0">
+            <a:pPr marL="0" indent="0" algn="l">
+              <a:buNone/>
+            </a:pPr>
+            <a:r>
+              <a:rPr lang="en-US" sz="800" b="1" kern="0" spc="200" dirty="0">
                 <a:solidFill>
                   <a:srgbClr val="3B8BF5"/>
                 </a:solidFill>
@@ -5270,7 +5529,7 @@
       </p:sp>
       <p:sp>
         <p:nvSpPr>
-          <p:cNvPr id="19" name="Text 17"/>
+          <p:cNvPr id="20" name="Text 18"/>
           <p:cNvSpPr/>
           <p:nvPr/>
         </p:nvSpPr>
@@ -5289,7 +5548,7 @@
           <a:bodyPr wrap="square" lIns="0" tIns="0" rIns="0" bIns="0" rtlCol="0" anchor="ctr"/>
           <a:lstStyle/>
           <a:p>
-            <a:pPr algn="l" indent="0" marL="0">
+            <a:pPr marL="0" indent="0" algn="l">
               <a:buNone/>
             </a:pPr>
             <a:r>
@@ -5309,7 +5568,7 @@
       </p:sp>
       <p:sp>
         <p:nvSpPr>
-          <p:cNvPr id="20" name="Text 18"/>
+          <p:cNvPr id="21" name="Text 19"/>
           <p:cNvSpPr/>
           <p:nvPr/>
         </p:nvSpPr>
@@ -5328,7 +5587,7 @@
           <a:bodyPr wrap="square" lIns="0" tIns="0" rIns="0" bIns="0" rtlCol="0" anchor="ctr"/>
           <a:lstStyle/>
           <a:p>
-            <a:pPr algn="l" indent="0" marL="0">
+            <a:pPr marL="0" indent="0" algn="l">
               <a:buNone/>
             </a:pPr>
             <a:r>
@@ -5348,7 +5607,7 @@
       </p:sp>
       <p:sp>
         <p:nvSpPr>
-          <p:cNvPr id="21" name="Shape 19"/>
+          <p:cNvPr id="22" name="Shape 20"/>
           <p:cNvSpPr/>
           <p:nvPr/>
         </p:nvSpPr>
@@ -5370,17 +5629,24 @@
             <a:prstDash val="solid"/>
           </a:ln>
           <a:effectLst>
-            <a:outerShdw sx="100000" sy="100000" kx="0" ky="0" algn="bl" rotWithShape="0" blurRad="101600" dist="38100" dir="8100000">
+            <a:outerShdw blurRad="101600" dist="38100" dir="8100000" algn="bl" rotWithShape="0">
               <a:srgbClr val="000000">
                 <a:alpha val="10000"/>
               </a:srgbClr>
             </a:outerShdw>
           </a:effectLst>
         </p:spPr>
-      </p:sp>
-      <p:sp>
-        <p:nvSpPr>
-          <p:cNvPr id="22" name="Shape 20"/>
+        <p:txBody>
+          <a:bodyPr/>
+          <a:lstStyle/>
+          <a:p>
+            <a:endParaRPr lang="en-US"/>
+          </a:p>
+        </p:txBody>
+      </p:sp>
+      <p:sp>
+        <p:nvSpPr>
+          <p:cNvPr id="23" name="Shape 21"/>
           <p:cNvSpPr/>
           <p:nvPr/>
         </p:nvSpPr>
@@ -5402,10 +5668,17 @@
             <a:prstDash val="solid"/>
           </a:ln>
         </p:spPr>
-      </p:sp>
-      <p:sp>
-        <p:nvSpPr>
-          <p:cNvPr id="23" name="Text 21"/>
+        <p:txBody>
+          <a:bodyPr/>
+          <a:lstStyle/>
+          <a:p>
+            <a:endParaRPr lang="en-US"/>
+          </a:p>
+        </p:txBody>
+      </p:sp>
+      <p:sp>
+        <p:nvSpPr>
+          <p:cNvPr id="24" name="Text 22"/>
           <p:cNvSpPr/>
           <p:nvPr/>
         </p:nvSpPr>
@@ -5424,11 +5697,11 @@
           <a:bodyPr wrap="square" lIns="0" tIns="0" rIns="0" bIns="0" rtlCol="0" anchor="ctr"/>
           <a:lstStyle/>
           <a:p>
-            <a:pPr algn="l" indent="0" marL="0">
-              <a:buNone/>
-            </a:pPr>
-            <a:r>
-              <a:rPr lang="en-US" sz="800" b="1" spc="200" kern="0" dirty="0">
+            <a:pPr marL="0" indent="0" algn="l">
+              <a:buNone/>
+            </a:pPr>
+            <a:r>
+              <a:rPr lang="en-US" sz="800" b="1" kern="0" spc="200" dirty="0">
                 <a:solidFill>
                   <a:srgbClr val="3B8BF5"/>
                 </a:solidFill>
@@ -5444,7 +5717,7 @@
       </p:sp>
       <p:sp>
         <p:nvSpPr>
-          <p:cNvPr id="24" name="Text 22"/>
+          <p:cNvPr id="25" name="Text 23"/>
           <p:cNvSpPr/>
           <p:nvPr/>
         </p:nvSpPr>
@@ -5463,7 +5736,7 @@
           <a:bodyPr wrap="square" lIns="0" tIns="0" rIns="0" bIns="0" rtlCol="0" anchor="ctr"/>
           <a:lstStyle/>
           <a:p>
-            <a:pPr algn="l" indent="0" marL="0">
+            <a:pPr marL="0" indent="0" algn="l">
               <a:buNone/>
             </a:pPr>
             <a:r>
@@ -5483,7 +5756,7 @@
       </p:sp>
       <p:sp>
         <p:nvSpPr>
-          <p:cNvPr id="25" name="Text 23"/>
+          <p:cNvPr id="26" name="Text 24"/>
           <p:cNvSpPr/>
           <p:nvPr/>
         </p:nvSpPr>
@@ -5502,7 +5775,7 @@
           <a:bodyPr wrap="square" lIns="0" tIns="0" rIns="0" bIns="0" rtlCol="0" anchor="ctr"/>
           <a:lstStyle/>
           <a:p>
-            <a:pPr algn="l" indent="0" marL="0">
+            <a:pPr marL="0" indent="0" algn="l">
               <a:buNone/>
             </a:pPr>
             <a:r>
@@ -5536,6 +5809,7 @@
         <a:solidFill>
           <a:srgbClr val="0D1B3E"/>
         </a:solidFill>
+        <a:effectLst/>
       </p:bgPr>
     </p:bg>
     <p:spTree>
@@ -5554,7 +5828,46 @@
       </p:grpSpPr>
       <p:sp>
         <p:nvSpPr>
-          <p:cNvPr id="2" name="Shape 0"/>
+          <p:cNvPr id="2" name="Text 0"/>
+          <p:cNvSpPr/>
+          <p:nvPr/>
+        </p:nvSpPr>
+        <p:spPr>
+          <a:xfrm>
+            <a:off x="256032" y="4800600"/>
+            <a:ext cx="2011680" cy="228600"/>
+          </a:xfrm>
+          <a:prstGeom prst="rect">
+            <a:avLst/>
+          </a:prstGeom>
+          <a:noFill/>
+          <a:ln/>
+        </p:spPr>
+        <p:txBody>
+          <a:bodyPr wrap="square" lIns="0" tIns="0" rIns="0" bIns="0" rtlCol="0" anchor="ctr"/>
+          <a:lstStyle/>
+          <a:p>
+            <a:pPr marL="0" indent="0" algn="l">
+              <a:buNone/>
+            </a:pPr>
+            <a:r>
+              <a:rPr lang="en-US" sz="750" dirty="0">
+                <a:solidFill>
+                  <a:srgbClr val="2A4070"/>
+                </a:solidFill>
+                <a:latin typeface="Calibri" pitchFamily="34" charset="0"/>
+                <a:ea typeface="Calibri" pitchFamily="34" charset="-122"/>
+                <a:cs typeface="Calibri" pitchFamily="34" charset="-120"/>
+              </a:rPr>
+              <a:t>jueewo ventures</a:t>
+            </a:r>
+            <a:endParaRPr lang="en-US" sz="750" dirty="0"/>
+          </a:p>
+        </p:txBody>
+      </p:sp>
+      <p:sp>
+        <p:nvSpPr>
+          <p:cNvPr id="3" name="Shape 1"/>
           <p:cNvSpPr/>
           <p:nvPr/>
         </p:nvSpPr>
@@ -5576,10 +5889,17 @@
             <a:prstDash val="solid"/>
           </a:ln>
         </p:spPr>
-      </p:sp>
-      <p:sp>
-        <p:nvSpPr>
-          <p:cNvPr id="3" name="Shape 1"/>
+        <p:txBody>
+          <a:bodyPr/>
+          <a:lstStyle/>
+          <a:p>
+            <a:endParaRPr lang="en-US"/>
+          </a:p>
+        </p:txBody>
+      </p:sp>
+      <p:sp>
+        <p:nvSpPr>
+          <p:cNvPr id="4" name="Shape 2"/>
           <p:cNvSpPr/>
           <p:nvPr/>
         </p:nvSpPr>
@@ -5601,10 +5921,17 @@
             <a:prstDash val="solid"/>
           </a:ln>
         </p:spPr>
-      </p:sp>
-      <p:sp>
-        <p:nvSpPr>
-          <p:cNvPr id="4" name="Text 2"/>
+        <p:txBody>
+          <a:bodyPr/>
+          <a:lstStyle/>
+          <a:p>
+            <a:endParaRPr lang="en-US"/>
+          </a:p>
+        </p:txBody>
+      </p:sp>
+      <p:sp>
+        <p:nvSpPr>
+          <p:cNvPr id="5" name="Text 3"/>
           <p:cNvSpPr/>
           <p:nvPr/>
         </p:nvSpPr>
@@ -5623,7 +5950,7 @@
           <a:bodyPr wrap="square" lIns="0" tIns="0" rIns="0" bIns="0" rtlCol="0" anchor="ctr"/>
           <a:lstStyle/>
           <a:p>
-            <a:pPr algn="ctr" indent="0" marL="0">
+            <a:pPr marL="0" indent="0" algn="ctr">
               <a:buNone/>
             </a:pPr>
             <a:r>
@@ -5640,7 +5967,7 @@
             <a:endParaRPr lang="en-US" sz="3400" dirty="0"/>
           </a:p>
           <a:p>
-            <a:pPr algn="ctr" indent="0" marL="0">
+            <a:pPr marL="0" indent="0" algn="ctr">
               <a:buNone/>
             </a:pPr>
             <a:r>
@@ -5660,7 +5987,7 @@
       </p:sp>
       <p:sp>
         <p:nvSpPr>
-          <p:cNvPr id="5" name="Text 3"/>
+          <p:cNvPr id="6" name="Text 4"/>
           <p:cNvSpPr/>
           <p:nvPr/>
         </p:nvSpPr>
@@ -5679,7 +6006,7 @@
           <a:bodyPr wrap="square" lIns="0" tIns="0" rIns="0" bIns="0" rtlCol="0" anchor="ctr"/>
           <a:lstStyle/>
           <a:p>
-            <a:pPr algn="ctr" indent="0" marL="0">
+            <a:pPr marL="0" indent="0" algn="ctr">
               <a:buNone/>
             </a:pPr>
             <a:r>
@@ -5696,7 +6023,7 @@
             <a:endParaRPr lang="en-US" sz="1300" dirty="0"/>
           </a:p>
           <a:p>
-            <a:pPr algn="ctr" indent="0" marL="0">
+            <a:pPr marL="0" indent="0" algn="ctr">
               <a:buNone/>
             </a:pPr>
             <a:r>
@@ -5716,7 +6043,7 @@
       </p:sp>
       <p:sp>
         <p:nvSpPr>
-          <p:cNvPr id="6" name="Shape 4"/>
+          <p:cNvPr id="7" name="Shape 5"/>
           <p:cNvSpPr/>
           <p:nvPr/>
         </p:nvSpPr>
@@ -5740,10 +6067,17 @@
             <a:prstDash val="solid"/>
           </a:ln>
         </p:spPr>
-      </p:sp>
-      <p:sp>
-        <p:nvSpPr>
-          <p:cNvPr id="7" name="Text 5"/>
+        <p:txBody>
+          <a:bodyPr/>
+          <a:lstStyle/>
+          <a:p>
+            <a:endParaRPr lang="en-US"/>
+          </a:p>
+        </p:txBody>
+      </p:sp>
+      <p:sp>
+        <p:nvSpPr>
+          <p:cNvPr id="8" name="Text 6"/>
           <p:cNvSpPr/>
           <p:nvPr/>
         </p:nvSpPr>
@@ -5762,7 +6096,7 @@
           <a:bodyPr wrap="square" lIns="0" tIns="0" rIns="0" bIns="0" rtlCol="0" anchor="ctr"/>
           <a:lstStyle/>
           <a:p>
-            <a:pPr algn="ctr" indent="0" marL="0">
+            <a:pPr marL="0" indent="0" algn="ctr">
               <a:buNone/>
             </a:pPr>
             <a:r>
@@ -5779,7 +6113,7 @@
             <a:endParaRPr lang="en-US" sz="1300" dirty="0"/>
           </a:p>
           <a:p>
-            <a:pPr algn="ctr" indent="0" marL="0">
+            <a:pPr marL="0" indent="0" algn="ctr">
               <a:buNone/>
             </a:pPr>
             <a:r>
@@ -5813,6 +6147,7 @@
         <a:solidFill>
           <a:srgbClr val="F4F7FF"/>
         </a:solidFill>
+        <a:effectLst/>
       </p:bgPr>
     </p:bg>
     <p:spTree>
@@ -5853,6 +6188,13 @@
             <a:prstDash val="solid"/>
           </a:ln>
         </p:spPr>
+        <p:txBody>
+          <a:bodyPr/>
+          <a:lstStyle/>
+          <a:p>
+            <a:endParaRPr lang="en-US"/>
+          </a:p>
+        </p:txBody>
       </p:sp>
       <p:sp>
         <p:nvSpPr>
@@ -5875,7 +6217,7 @@
           <a:bodyPr wrap="square" lIns="0" tIns="0" rIns="0" bIns="0" rtlCol="0" anchor="ctr"/>
           <a:lstStyle/>
           <a:p>
-            <a:pPr algn="r" indent="0" marL="0">
+            <a:pPr marL="0" indent="0" algn="r">
               <a:buNone/>
             </a:pPr>
             <a:r>
@@ -5893,6 +6235,45 @@
       <p:sp>
         <p:nvSpPr>
           <p:cNvPr id="4" name="Text 2"/>
+          <p:cNvSpPr/>
+          <p:nvPr/>
+        </p:nvSpPr>
+        <p:spPr>
+          <a:xfrm>
+            <a:off x="256032" y="4800600"/>
+            <a:ext cx="2011680" cy="228600"/>
+          </a:xfrm>
+          <a:prstGeom prst="rect">
+            <a:avLst/>
+          </a:prstGeom>
+          <a:noFill/>
+          <a:ln/>
+        </p:spPr>
+        <p:txBody>
+          <a:bodyPr wrap="square" lIns="0" tIns="0" rIns="0" bIns="0" rtlCol="0" anchor="ctr"/>
+          <a:lstStyle/>
+          <a:p>
+            <a:pPr marL="0" indent="0" algn="l">
+              <a:buNone/>
+            </a:pPr>
+            <a:r>
+              <a:rPr lang="en-US" sz="750" dirty="0">
+                <a:solidFill>
+                  <a:srgbClr val="C8D8EE"/>
+                </a:solidFill>
+                <a:latin typeface="Calibri" pitchFamily="34" charset="0"/>
+                <a:ea typeface="Calibri" pitchFamily="34" charset="-122"/>
+                <a:cs typeface="Calibri" pitchFamily="34" charset="-120"/>
+              </a:rPr>
+              <a:t>jueewo ventures</a:t>
+            </a:r>
+            <a:endParaRPr lang="en-US" sz="750" dirty="0"/>
+          </a:p>
+        </p:txBody>
+      </p:sp>
+      <p:sp>
+        <p:nvSpPr>
+          <p:cNvPr id="5" name="Text 3"/>
           <p:cNvSpPr/>
           <p:nvPr/>
         </p:nvSpPr>
@@ -5911,11 +6292,11 @@
           <a:bodyPr wrap="square" lIns="0" tIns="0" rIns="0" bIns="0" rtlCol="0" anchor="ctr"/>
           <a:lstStyle/>
           <a:p>
-            <a:pPr algn="l" indent="0" marL="0">
-              <a:buNone/>
-            </a:pPr>
-            <a:r>
-              <a:rPr lang="en-US" sz="900" b="1" spc="300" kern="0" dirty="0">
+            <a:pPr marL="0" indent="0" algn="l">
+              <a:buNone/>
+            </a:pPr>
+            <a:r>
+              <a:rPr lang="en-US" sz="900" b="1" kern="0" spc="300" dirty="0">
                 <a:solidFill>
                   <a:srgbClr val="3B8BF5"/>
                 </a:solidFill>
@@ -5931,7 +6312,7 @@
       </p:sp>
       <p:sp>
         <p:nvSpPr>
-          <p:cNvPr id="5" name="Text 3"/>
+          <p:cNvPr id="6" name="Text 4"/>
           <p:cNvSpPr/>
           <p:nvPr/>
         </p:nvSpPr>
@@ -5950,7 +6331,7 @@
           <a:bodyPr wrap="square" lIns="0" tIns="0" rIns="0" bIns="0" rtlCol="0" anchor="ctr"/>
           <a:lstStyle/>
           <a:p>
-            <a:pPr algn="l" indent="0" marL="0">
+            <a:pPr marL="0" indent="0" algn="l">
               <a:buNone/>
             </a:pPr>
             <a:r>
@@ -5967,7 +6348,7 @@
             <a:endParaRPr lang="en-US" sz="2800" dirty="0"/>
           </a:p>
           <a:p>
-            <a:pPr algn="l" indent="0" marL="0">
+            <a:pPr marL="0" indent="0" algn="l">
               <a:buNone/>
             </a:pPr>
             <a:r>
@@ -5987,7 +6368,7 @@
       </p:sp>
       <p:sp>
         <p:nvSpPr>
-          <p:cNvPr id="6" name="Shape 4"/>
+          <p:cNvPr id="7" name="Shape 5"/>
           <p:cNvSpPr/>
           <p:nvPr/>
         </p:nvSpPr>
@@ -6009,17 +6390,24 @@
             <a:prstDash val="solid"/>
           </a:ln>
           <a:effectLst>
-            <a:outerShdw sx="100000" sy="100000" kx="0" ky="0" algn="bl" rotWithShape="0" blurRad="101600" dist="38100" dir="8100000">
+            <a:outerShdw blurRad="101600" dist="38100" dir="8100000" algn="bl" rotWithShape="0">
               <a:srgbClr val="000000">
                 <a:alpha val="10000"/>
               </a:srgbClr>
             </a:outerShdw>
           </a:effectLst>
         </p:spPr>
-      </p:sp>
-      <p:sp>
-        <p:nvSpPr>
-          <p:cNvPr id="7" name="Shape 5"/>
+        <p:txBody>
+          <a:bodyPr/>
+          <a:lstStyle/>
+          <a:p>
+            <a:endParaRPr lang="en-US"/>
+          </a:p>
+        </p:txBody>
+      </p:sp>
+      <p:sp>
+        <p:nvSpPr>
+          <p:cNvPr id="8" name="Shape 6"/>
           <p:cNvSpPr/>
           <p:nvPr/>
         </p:nvSpPr>
@@ -6041,10 +6429,17 @@
             <a:prstDash val="solid"/>
           </a:ln>
         </p:spPr>
-      </p:sp>
-      <p:sp>
-        <p:nvSpPr>
-          <p:cNvPr id="8" name="Shape 6"/>
+        <p:txBody>
+          <a:bodyPr/>
+          <a:lstStyle/>
+          <a:p>
+            <a:endParaRPr lang="en-US"/>
+          </a:p>
+        </p:txBody>
+      </p:sp>
+      <p:sp>
+        <p:nvSpPr>
+          <p:cNvPr id="9" name="Shape 7"/>
           <p:cNvSpPr/>
           <p:nvPr/>
         </p:nvSpPr>
@@ -6066,10 +6461,17 @@
             <a:prstDash val="solid"/>
           </a:ln>
         </p:spPr>
-      </p:sp>
-      <p:sp>
-        <p:nvSpPr>
-          <p:cNvPr id="9" name="Text 7"/>
+        <p:txBody>
+          <a:bodyPr/>
+          <a:lstStyle/>
+          <a:p>
+            <a:endParaRPr lang="en-US"/>
+          </a:p>
+        </p:txBody>
+      </p:sp>
+      <p:sp>
+        <p:nvSpPr>
+          <p:cNvPr id="10" name="Text 8"/>
           <p:cNvSpPr/>
           <p:nvPr/>
         </p:nvSpPr>
@@ -6088,7 +6490,7 @@
           <a:bodyPr wrap="square" lIns="0" tIns="0" rIns="0" bIns="0" rtlCol="0" anchor="ctr"/>
           <a:lstStyle/>
           <a:p>
-            <a:pPr algn="ctr" indent="0" marL="0">
+            <a:pPr marL="0" indent="0" algn="ctr">
               <a:buNone/>
             </a:pPr>
             <a:r>
@@ -6108,7 +6510,7 @@
       </p:sp>
       <p:sp>
         <p:nvSpPr>
-          <p:cNvPr id="10" name="Text 8"/>
+          <p:cNvPr id="11" name="Text 9"/>
           <p:cNvSpPr/>
           <p:nvPr/>
         </p:nvSpPr>
@@ -6127,7 +6529,7 @@
           <a:bodyPr wrap="square" lIns="0" tIns="0" rIns="0" bIns="0" rtlCol="0" anchor="ctr"/>
           <a:lstStyle/>
           <a:p>
-            <a:pPr algn="l" indent="0" marL="0">
+            <a:pPr marL="0" indent="0" algn="l">
               <a:buNone/>
             </a:pPr>
             <a:r>
@@ -6147,7 +6549,7 @@
       </p:sp>
       <p:sp>
         <p:nvSpPr>
-          <p:cNvPr id="11" name="Text 9"/>
+          <p:cNvPr id="12" name="Text 10"/>
           <p:cNvSpPr/>
           <p:nvPr/>
         </p:nvSpPr>
@@ -6166,7 +6568,7 @@
           <a:bodyPr wrap="square" lIns="0" tIns="0" rIns="0" bIns="0" rtlCol="0" anchor="ctr"/>
           <a:lstStyle/>
           <a:p>
-            <a:pPr algn="l" indent="0" marL="0">
+            <a:pPr marL="0" indent="0" algn="l">
               <a:buNone/>
             </a:pPr>
             <a:r>
@@ -6186,7 +6588,7 @@
       </p:sp>
       <p:sp>
         <p:nvSpPr>
-          <p:cNvPr id="12" name="Shape 10"/>
+          <p:cNvPr id="13" name="Shape 11"/>
           <p:cNvSpPr/>
           <p:nvPr/>
         </p:nvSpPr>
@@ -6208,17 +6610,24 @@
             <a:prstDash val="solid"/>
           </a:ln>
           <a:effectLst>
-            <a:outerShdw sx="100000" sy="100000" kx="0" ky="0" algn="bl" rotWithShape="0" blurRad="101600" dist="38100" dir="8100000">
+            <a:outerShdw blurRad="101600" dist="38100" dir="8100000" algn="bl" rotWithShape="0">
               <a:srgbClr val="000000">
                 <a:alpha val="10000"/>
               </a:srgbClr>
             </a:outerShdw>
           </a:effectLst>
         </p:spPr>
-      </p:sp>
-      <p:sp>
-        <p:nvSpPr>
-          <p:cNvPr id="13" name="Shape 11"/>
+        <p:txBody>
+          <a:bodyPr/>
+          <a:lstStyle/>
+          <a:p>
+            <a:endParaRPr lang="en-US"/>
+          </a:p>
+        </p:txBody>
+      </p:sp>
+      <p:sp>
+        <p:nvSpPr>
+          <p:cNvPr id="14" name="Shape 12"/>
           <p:cNvSpPr/>
           <p:nvPr/>
         </p:nvSpPr>
@@ -6240,10 +6649,17 @@
             <a:prstDash val="solid"/>
           </a:ln>
         </p:spPr>
-      </p:sp>
-      <p:sp>
-        <p:nvSpPr>
-          <p:cNvPr id="14" name="Shape 12"/>
+        <p:txBody>
+          <a:bodyPr/>
+          <a:lstStyle/>
+          <a:p>
+            <a:endParaRPr lang="en-US"/>
+          </a:p>
+        </p:txBody>
+      </p:sp>
+      <p:sp>
+        <p:nvSpPr>
+          <p:cNvPr id="15" name="Shape 13"/>
           <p:cNvSpPr/>
           <p:nvPr/>
         </p:nvSpPr>
@@ -6265,10 +6681,17 @@
             <a:prstDash val="solid"/>
           </a:ln>
         </p:spPr>
-      </p:sp>
-      <p:sp>
-        <p:nvSpPr>
-          <p:cNvPr id="15" name="Text 13"/>
+        <p:txBody>
+          <a:bodyPr/>
+          <a:lstStyle/>
+          <a:p>
+            <a:endParaRPr lang="en-US"/>
+          </a:p>
+        </p:txBody>
+      </p:sp>
+      <p:sp>
+        <p:nvSpPr>
+          <p:cNvPr id="16" name="Text 14"/>
           <p:cNvSpPr/>
           <p:nvPr/>
         </p:nvSpPr>
@@ -6287,7 +6710,7 @@
           <a:bodyPr wrap="square" lIns="0" tIns="0" rIns="0" bIns="0" rtlCol="0" anchor="ctr"/>
           <a:lstStyle/>
           <a:p>
-            <a:pPr algn="ctr" indent="0" marL="0">
+            <a:pPr marL="0" indent="0" algn="ctr">
               <a:buNone/>
             </a:pPr>
             <a:r>
@@ -6307,7 +6730,7 @@
       </p:sp>
       <p:sp>
         <p:nvSpPr>
-          <p:cNvPr id="16" name="Text 14"/>
+          <p:cNvPr id="17" name="Text 15"/>
           <p:cNvSpPr/>
           <p:nvPr/>
         </p:nvSpPr>
@@ -6326,7 +6749,7 @@
           <a:bodyPr wrap="square" lIns="0" tIns="0" rIns="0" bIns="0" rtlCol="0" anchor="ctr"/>
           <a:lstStyle/>
           <a:p>
-            <a:pPr algn="l" indent="0" marL="0">
+            <a:pPr marL="0" indent="0" algn="l">
               <a:buNone/>
             </a:pPr>
             <a:r>
@@ -6346,7 +6769,7 @@
       </p:sp>
       <p:sp>
         <p:nvSpPr>
-          <p:cNvPr id="17" name="Text 15"/>
+          <p:cNvPr id="18" name="Text 16"/>
           <p:cNvSpPr/>
           <p:nvPr/>
         </p:nvSpPr>
@@ -6365,7 +6788,7 @@
           <a:bodyPr wrap="square" lIns="0" tIns="0" rIns="0" bIns="0" rtlCol="0" anchor="ctr"/>
           <a:lstStyle/>
           <a:p>
-            <a:pPr algn="l" indent="0" marL="0">
+            <a:pPr marL="0" indent="0" algn="l">
               <a:buNone/>
             </a:pPr>
             <a:r>
@@ -6385,7 +6808,7 @@
       </p:sp>
       <p:sp>
         <p:nvSpPr>
-          <p:cNvPr id="18" name="Shape 16"/>
+          <p:cNvPr id="19" name="Shape 17"/>
           <p:cNvSpPr/>
           <p:nvPr/>
         </p:nvSpPr>
@@ -6407,17 +6830,24 @@
             <a:prstDash val="solid"/>
           </a:ln>
           <a:effectLst>
-            <a:outerShdw sx="100000" sy="100000" kx="0" ky="0" algn="bl" rotWithShape="0" blurRad="101600" dist="38100" dir="8100000">
+            <a:outerShdw blurRad="101600" dist="38100" dir="8100000" algn="bl" rotWithShape="0">
               <a:srgbClr val="000000">
                 <a:alpha val="10000"/>
               </a:srgbClr>
             </a:outerShdw>
           </a:effectLst>
         </p:spPr>
-      </p:sp>
-      <p:sp>
-        <p:nvSpPr>
-          <p:cNvPr id="19" name="Shape 17"/>
+        <p:txBody>
+          <a:bodyPr/>
+          <a:lstStyle/>
+          <a:p>
+            <a:endParaRPr lang="en-US"/>
+          </a:p>
+        </p:txBody>
+      </p:sp>
+      <p:sp>
+        <p:nvSpPr>
+          <p:cNvPr id="20" name="Shape 18"/>
           <p:cNvSpPr/>
           <p:nvPr/>
         </p:nvSpPr>
@@ -6439,10 +6869,17 @@
             <a:prstDash val="solid"/>
           </a:ln>
         </p:spPr>
-      </p:sp>
-      <p:sp>
-        <p:nvSpPr>
-          <p:cNvPr id="20" name="Shape 18"/>
+        <p:txBody>
+          <a:bodyPr/>
+          <a:lstStyle/>
+          <a:p>
+            <a:endParaRPr lang="en-US"/>
+          </a:p>
+        </p:txBody>
+      </p:sp>
+      <p:sp>
+        <p:nvSpPr>
+          <p:cNvPr id="21" name="Shape 19"/>
           <p:cNvSpPr/>
           <p:nvPr/>
         </p:nvSpPr>
@@ -6464,10 +6901,17 @@
             <a:prstDash val="solid"/>
           </a:ln>
         </p:spPr>
-      </p:sp>
-      <p:sp>
-        <p:nvSpPr>
-          <p:cNvPr id="21" name="Text 19"/>
+        <p:txBody>
+          <a:bodyPr/>
+          <a:lstStyle/>
+          <a:p>
+            <a:endParaRPr lang="en-US"/>
+          </a:p>
+        </p:txBody>
+      </p:sp>
+      <p:sp>
+        <p:nvSpPr>
+          <p:cNvPr id="22" name="Text 20"/>
           <p:cNvSpPr/>
           <p:nvPr/>
         </p:nvSpPr>
@@ -6486,7 +6930,7 @@
           <a:bodyPr wrap="square" lIns="0" tIns="0" rIns="0" bIns="0" rtlCol="0" anchor="ctr"/>
           <a:lstStyle/>
           <a:p>
-            <a:pPr algn="ctr" indent="0" marL="0">
+            <a:pPr marL="0" indent="0" algn="ctr">
               <a:buNone/>
             </a:pPr>
             <a:r>
@@ -6506,7 +6950,7 @@
       </p:sp>
       <p:sp>
         <p:nvSpPr>
-          <p:cNvPr id="22" name="Text 20"/>
+          <p:cNvPr id="23" name="Text 21"/>
           <p:cNvSpPr/>
           <p:nvPr/>
         </p:nvSpPr>
@@ -6525,7 +6969,7 @@
           <a:bodyPr wrap="square" lIns="0" tIns="0" rIns="0" bIns="0" rtlCol="0" anchor="ctr"/>
           <a:lstStyle/>
           <a:p>
-            <a:pPr algn="l" indent="0" marL="0">
+            <a:pPr marL="0" indent="0" algn="l">
               <a:buNone/>
             </a:pPr>
             <a:r>
@@ -6545,7 +6989,7 @@
       </p:sp>
       <p:sp>
         <p:nvSpPr>
-          <p:cNvPr id="23" name="Text 21"/>
+          <p:cNvPr id="24" name="Text 22"/>
           <p:cNvSpPr/>
           <p:nvPr/>
         </p:nvSpPr>
@@ -6564,7 +7008,7 @@
           <a:bodyPr wrap="square" lIns="0" tIns="0" rIns="0" bIns="0" rtlCol="0" anchor="ctr"/>
           <a:lstStyle/>
           <a:p>
-            <a:pPr algn="l" indent="0" marL="0">
+            <a:pPr marL="0" indent="0" algn="l">
               <a:buNone/>
             </a:pPr>
             <a:r>
@@ -6584,7 +7028,7 @@
       </p:sp>
       <p:sp>
         <p:nvSpPr>
-          <p:cNvPr id="24" name="Shape 22"/>
+          <p:cNvPr id="25" name="Shape 23"/>
           <p:cNvSpPr/>
           <p:nvPr/>
         </p:nvSpPr>
@@ -6606,17 +7050,24 @@
             <a:prstDash val="solid"/>
           </a:ln>
           <a:effectLst>
-            <a:outerShdw sx="100000" sy="100000" kx="0" ky="0" algn="bl" rotWithShape="0" blurRad="101600" dist="38100" dir="8100000">
+            <a:outerShdw blurRad="101600" dist="38100" dir="8100000" algn="bl" rotWithShape="0">
               <a:srgbClr val="000000">
                 <a:alpha val="10000"/>
               </a:srgbClr>
             </a:outerShdw>
           </a:effectLst>
         </p:spPr>
-      </p:sp>
-      <p:sp>
-        <p:nvSpPr>
-          <p:cNvPr id="25" name="Shape 23"/>
+        <p:txBody>
+          <a:bodyPr/>
+          <a:lstStyle/>
+          <a:p>
+            <a:endParaRPr lang="en-US"/>
+          </a:p>
+        </p:txBody>
+      </p:sp>
+      <p:sp>
+        <p:nvSpPr>
+          <p:cNvPr id="26" name="Shape 24"/>
           <p:cNvSpPr/>
           <p:nvPr/>
         </p:nvSpPr>
@@ -6638,10 +7089,17 @@
             <a:prstDash val="solid"/>
           </a:ln>
         </p:spPr>
-      </p:sp>
-      <p:sp>
-        <p:nvSpPr>
-          <p:cNvPr id="26" name="Shape 24"/>
+        <p:txBody>
+          <a:bodyPr/>
+          <a:lstStyle/>
+          <a:p>
+            <a:endParaRPr lang="en-US"/>
+          </a:p>
+        </p:txBody>
+      </p:sp>
+      <p:sp>
+        <p:nvSpPr>
+          <p:cNvPr id="27" name="Shape 25"/>
           <p:cNvSpPr/>
           <p:nvPr/>
         </p:nvSpPr>
@@ -6663,10 +7121,17 @@
             <a:prstDash val="solid"/>
           </a:ln>
         </p:spPr>
-      </p:sp>
-      <p:sp>
-        <p:nvSpPr>
-          <p:cNvPr id="27" name="Text 25"/>
+        <p:txBody>
+          <a:bodyPr/>
+          <a:lstStyle/>
+          <a:p>
+            <a:endParaRPr lang="en-US"/>
+          </a:p>
+        </p:txBody>
+      </p:sp>
+      <p:sp>
+        <p:nvSpPr>
+          <p:cNvPr id="28" name="Text 26"/>
           <p:cNvSpPr/>
           <p:nvPr/>
         </p:nvSpPr>
@@ -6685,7 +7150,7 @@
           <a:bodyPr wrap="square" lIns="0" tIns="0" rIns="0" bIns="0" rtlCol="0" anchor="ctr"/>
           <a:lstStyle/>
           <a:p>
-            <a:pPr algn="ctr" indent="0" marL="0">
+            <a:pPr marL="0" indent="0" algn="ctr">
               <a:buNone/>
             </a:pPr>
             <a:r>
@@ -6705,7 +7170,7 @@
       </p:sp>
       <p:sp>
         <p:nvSpPr>
-          <p:cNvPr id="28" name="Text 26"/>
+          <p:cNvPr id="29" name="Text 27"/>
           <p:cNvSpPr/>
           <p:nvPr/>
         </p:nvSpPr>
@@ -6724,7 +7189,7 @@
           <a:bodyPr wrap="square" lIns="0" tIns="0" rIns="0" bIns="0" rtlCol="0" anchor="ctr"/>
           <a:lstStyle/>
           <a:p>
-            <a:pPr algn="l" indent="0" marL="0">
+            <a:pPr marL="0" indent="0" algn="l">
               <a:buNone/>
             </a:pPr>
             <a:r>
@@ -6744,7 +7209,7 @@
       </p:sp>
       <p:sp>
         <p:nvSpPr>
-          <p:cNvPr id="29" name="Text 27"/>
+          <p:cNvPr id="30" name="Text 28"/>
           <p:cNvSpPr/>
           <p:nvPr/>
         </p:nvSpPr>
@@ -6763,7 +7228,7 @@
           <a:bodyPr wrap="square" lIns="0" tIns="0" rIns="0" bIns="0" rtlCol="0" anchor="ctr"/>
           <a:lstStyle/>
           <a:p>
-            <a:pPr algn="l" indent="0" marL="0">
+            <a:pPr marL="0" indent="0" algn="l">
               <a:buNone/>
             </a:pPr>
             <a:r>
@@ -6797,6 +7262,7 @@
         <a:solidFill>
           <a:srgbClr val="0D1B3E"/>
         </a:solidFill>
+        <a:effectLst/>
       </p:bgPr>
     </p:bg>
     <p:spTree>
@@ -6834,7 +7300,7 @@
           <a:bodyPr wrap="square" lIns="0" tIns="0" rIns="0" bIns="0" rtlCol="0" anchor="ctr"/>
           <a:lstStyle/>
           <a:p>
-            <a:pPr algn="r" indent="0" marL="0">
+            <a:pPr marL="0" indent="0" algn="r">
               <a:buNone/>
             </a:pPr>
             <a:r>
@@ -6851,7 +7317,46 @@
       </p:sp>
       <p:sp>
         <p:nvSpPr>
-          <p:cNvPr id="3" name="Shape 1"/>
+          <p:cNvPr id="3" name="Text 1"/>
+          <p:cNvSpPr/>
+          <p:nvPr/>
+        </p:nvSpPr>
+        <p:spPr>
+          <a:xfrm>
+            <a:off x="256032" y="4800600"/>
+            <a:ext cx="2011680" cy="228600"/>
+          </a:xfrm>
+          <a:prstGeom prst="rect">
+            <a:avLst/>
+          </a:prstGeom>
+          <a:noFill/>
+          <a:ln/>
+        </p:spPr>
+        <p:txBody>
+          <a:bodyPr wrap="square" lIns="0" tIns="0" rIns="0" bIns="0" rtlCol="0" anchor="ctr"/>
+          <a:lstStyle/>
+          <a:p>
+            <a:pPr marL="0" indent="0" algn="l">
+              <a:buNone/>
+            </a:pPr>
+            <a:r>
+              <a:rPr lang="en-US" sz="750" dirty="0">
+                <a:solidFill>
+                  <a:srgbClr val="2A4070"/>
+                </a:solidFill>
+                <a:latin typeface="Calibri" pitchFamily="34" charset="0"/>
+                <a:ea typeface="Calibri" pitchFamily="34" charset="-122"/>
+                <a:cs typeface="Calibri" pitchFamily="34" charset="-120"/>
+              </a:rPr>
+              <a:t>jueewo ventures</a:t>
+            </a:r>
+            <a:endParaRPr lang="en-US" sz="750" dirty="0"/>
+          </a:p>
+        </p:txBody>
+      </p:sp>
+      <p:sp>
+        <p:nvSpPr>
+          <p:cNvPr id="4" name="Shape 2"/>
           <p:cNvSpPr/>
           <p:nvPr/>
         </p:nvSpPr>
@@ -6873,10 +7378,17 @@
             <a:prstDash val="solid"/>
           </a:ln>
         </p:spPr>
-      </p:sp>
-      <p:sp>
-        <p:nvSpPr>
-          <p:cNvPr id="4" name="Shape 2"/>
+        <p:txBody>
+          <a:bodyPr/>
+          <a:lstStyle/>
+          <a:p>
+            <a:endParaRPr lang="en-US"/>
+          </a:p>
+        </p:txBody>
+      </p:sp>
+      <p:sp>
+        <p:nvSpPr>
+          <p:cNvPr id="5" name="Shape 3"/>
           <p:cNvSpPr/>
           <p:nvPr/>
         </p:nvSpPr>
@@ -6898,10 +7410,17 @@
             <a:prstDash val="solid"/>
           </a:ln>
         </p:spPr>
-      </p:sp>
-      <p:sp>
-        <p:nvSpPr>
-          <p:cNvPr id="5" name="Text 3"/>
+        <p:txBody>
+          <a:bodyPr/>
+          <a:lstStyle/>
+          <a:p>
+            <a:endParaRPr lang="en-US"/>
+          </a:p>
+        </p:txBody>
+      </p:sp>
+      <p:sp>
+        <p:nvSpPr>
+          <p:cNvPr id="6" name="Text 4"/>
           <p:cNvSpPr/>
           <p:nvPr/>
         </p:nvSpPr>
@@ -6920,11 +7439,11 @@
           <a:bodyPr wrap="square" lIns="0" tIns="0" rIns="0" bIns="0" rtlCol="0" anchor="ctr"/>
           <a:lstStyle/>
           <a:p>
-            <a:pPr algn="l" indent="0" marL="0">
-              <a:buNone/>
-            </a:pPr>
-            <a:r>
-              <a:rPr lang="en-US" sz="900" b="1" spc="300" kern="0" dirty="0">
+            <a:pPr marL="0" indent="0" algn="l">
+              <a:buNone/>
+            </a:pPr>
+            <a:r>
+              <a:rPr lang="en-US" sz="900" b="1" kern="0" spc="300" dirty="0">
                 <a:solidFill>
                   <a:srgbClr val="A8C8FA"/>
                 </a:solidFill>
@@ -6940,7 +7459,7 @@
       </p:sp>
       <p:sp>
         <p:nvSpPr>
-          <p:cNvPr id="6" name="Text 4"/>
+          <p:cNvPr id="7" name="Text 5"/>
           <p:cNvSpPr/>
           <p:nvPr/>
         </p:nvSpPr>
@@ -6959,7 +7478,7 @@
           <a:bodyPr wrap="square" lIns="0" tIns="0" rIns="0" bIns="0" rtlCol="0" anchor="ctr"/>
           <a:lstStyle/>
           <a:p>
-            <a:pPr algn="l" indent="0" marL="0">
+            <a:pPr marL="0" indent="0" algn="l">
               <a:buNone/>
             </a:pPr>
             <a:r>
@@ -6976,7 +7495,7 @@
             <a:endParaRPr lang="en-US" sz="3400" dirty="0"/>
           </a:p>
           <a:p>
-            <a:pPr algn="l" indent="0" marL="0">
+            <a:pPr marL="0" indent="0" algn="l">
               <a:buNone/>
             </a:pPr>
             <a:r>
@@ -6993,7 +7512,7 @@
             <a:endParaRPr lang="en-US" sz="3400" dirty="0"/>
           </a:p>
           <a:p>
-            <a:pPr algn="l" indent="0" marL="0">
+            <a:pPr marL="0" indent="0" algn="l">
               <a:buNone/>
             </a:pPr>
             <a:r>
@@ -7013,7 +7532,7 @@
       </p:sp>
       <p:sp>
         <p:nvSpPr>
-          <p:cNvPr id="7" name="Text 5"/>
+          <p:cNvPr id="8" name="Text 6"/>
           <p:cNvSpPr/>
           <p:nvPr/>
         </p:nvSpPr>
@@ -7032,7 +7551,7 @@
           <a:bodyPr wrap="square" lIns="0" tIns="0" rIns="0" bIns="0" rtlCol="0" anchor="ctr"/>
           <a:lstStyle/>
           <a:p>
-            <a:pPr algn="l" indent="0" marL="0">
+            <a:pPr marL="0" indent="0" algn="l">
               <a:buNone/>
             </a:pPr>
             <a:r>
@@ -7052,7 +7571,7 @@
       </p:sp>
       <p:sp>
         <p:nvSpPr>
-          <p:cNvPr id="8" name="Shape 6"/>
+          <p:cNvPr id="9" name="Shape 7"/>
           <p:cNvSpPr/>
           <p:nvPr/>
         </p:nvSpPr>
@@ -7074,10 +7593,17 @@
             <a:prstDash val="solid"/>
           </a:ln>
         </p:spPr>
-      </p:sp>
-      <p:sp>
-        <p:nvSpPr>
-          <p:cNvPr id="9" name="Text 7"/>
+        <p:txBody>
+          <a:bodyPr/>
+          <a:lstStyle/>
+          <a:p>
+            <a:endParaRPr lang="en-US"/>
+          </a:p>
+        </p:txBody>
+      </p:sp>
+      <p:sp>
+        <p:nvSpPr>
+          <p:cNvPr id="10" name="Text 8"/>
           <p:cNvSpPr/>
           <p:nvPr/>
         </p:nvSpPr>
@@ -7096,7 +7622,7 @@
           <a:bodyPr wrap="square" lIns="0" tIns="0" rIns="0" bIns="0" rtlCol="0" anchor="ctr"/>
           <a:lstStyle/>
           <a:p>
-            <a:pPr algn="l" indent="0" marL="0">
+            <a:pPr marL="0" indent="0" algn="l">
               <a:buNone/>
             </a:pPr>
             <a:r>
@@ -7116,7 +7642,7 @@
       </p:sp>
       <p:sp>
         <p:nvSpPr>
-          <p:cNvPr id="10" name="Shape 8"/>
+          <p:cNvPr id="11" name="Shape 9"/>
           <p:cNvSpPr/>
           <p:nvPr/>
         </p:nvSpPr>
@@ -7138,10 +7664,17 @@
             <a:prstDash val="solid"/>
           </a:ln>
         </p:spPr>
-      </p:sp>
-      <p:sp>
-        <p:nvSpPr>
-          <p:cNvPr id="11" name="Text 9"/>
+        <p:txBody>
+          <a:bodyPr/>
+          <a:lstStyle/>
+          <a:p>
+            <a:endParaRPr lang="en-US"/>
+          </a:p>
+        </p:txBody>
+      </p:sp>
+      <p:sp>
+        <p:nvSpPr>
+          <p:cNvPr id="12" name="Text 10"/>
           <p:cNvSpPr/>
           <p:nvPr/>
         </p:nvSpPr>
@@ -7160,7 +7693,7 @@
           <a:bodyPr wrap="square" lIns="0" tIns="0" rIns="0" bIns="0" rtlCol="0" anchor="ctr"/>
           <a:lstStyle/>
           <a:p>
-            <a:pPr algn="l" indent="0" marL="0">
+            <a:pPr marL="0" indent="0" algn="l">
               <a:buNone/>
             </a:pPr>
             <a:r>
@@ -7180,7 +7713,7 @@
       </p:sp>
       <p:sp>
         <p:nvSpPr>
-          <p:cNvPr id="12" name="Shape 10"/>
+          <p:cNvPr id="13" name="Shape 11"/>
           <p:cNvSpPr/>
           <p:nvPr/>
         </p:nvSpPr>
@@ -7202,10 +7735,17 @@
             <a:prstDash val="solid"/>
           </a:ln>
         </p:spPr>
-      </p:sp>
-      <p:sp>
-        <p:nvSpPr>
-          <p:cNvPr id="13" name="Text 11"/>
+        <p:txBody>
+          <a:bodyPr/>
+          <a:lstStyle/>
+          <a:p>
+            <a:endParaRPr lang="en-US"/>
+          </a:p>
+        </p:txBody>
+      </p:sp>
+      <p:sp>
+        <p:nvSpPr>
+          <p:cNvPr id="14" name="Text 12"/>
           <p:cNvSpPr/>
           <p:nvPr/>
         </p:nvSpPr>
@@ -7224,7 +7764,7 @@
           <a:bodyPr wrap="square" lIns="0" tIns="0" rIns="0" bIns="0" rtlCol="0" anchor="ctr"/>
           <a:lstStyle/>
           <a:p>
-            <a:pPr algn="l" indent="0" marL="0">
+            <a:pPr marL="0" indent="0" algn="l">
               <a:buNone/>
             </a:pPr>
             <a:r>
@@ -7244,7 +7784,7 @@
       </p:sp>
       <p:sp>
         <p:nvSpPr>
-          <p:cNvPr id="14" name="Shape 12"/>
+          <p:cNvPr id="15" name="Shape 13"/>
           <p:cNvSpPr/>
           <p:nvPr/>
         </p:nvSpPr>
@@ -7266,10 +7806,17 @@
             <a:prstDash val="solid"/>
           </a:ln>
         </p:spPr>
-      </p:sp>
-      <p:sp>
-        <p:nvSpPr>
-          <p:cNvPr id="15" name="Text 13"/>
+        <p:txBody>
+          <a:bodyPr/>
+          <a:lstStyle/>
+          <a:p>
+            <a:endParaRPr lang="en-US"/>
+          </a:p>
+        </p:txBody>
+      </p:sp>
+      <p:sp>
+        <p:nvSpPr>
+          <p:cNvPr id="16" name="Text 14"/>
           <p:cNvSpPr/>
           <p:nvPr/>
         </p:nvSpPr>
@@ -7288,7 +7835,7 @@
           <a:bodyPr wrap="square" lIns="0" tIns="0" rIns="0" bIns="0" rtlCol="0" anchor="ctr"/>
           <a:lstStyle/>
           <a:p>
-            <a:pPr algn="l" indent="0" marL="0">
+            <a:pPr marL="0" indent="0" algn="l">
               <a:buNone/>
             </a:pPr>
             <a:r>
@@ -7308,7 +7855,7 @@
       </p:sp>
       <p:sp>
         <p:nvSpPr>
-          <p:cNvPr id="16" name="Shape 14"/>
+          <p:cNvPr id="17" name="Shape 15"/>
           <p:cNvSpPr/>
           <p:nvPr/>
         </p:nvSpPr>
@@ -7330,10 +7877,17 @@
             <a:prstDash val="solid"/>
           </a:ln>
         </p:spPr>
-      </p:sp>
-      <p:sp>
-        <p:nvSpPr>
-          <p:cNvPr id="17" name="Text 15"/>
+        <p:txBody>
+          <a:bodyPr/>
+          <a:lstStyle/>
+          <a:p>
+            <a:endParaRPr lang="en-US"/>
+          </a:p>
+        </p:txBody>
+      </p:sp>
+      <p:sp>
+        <p:nvSpPr>
+          <p:cNvPr id="18" name="Text 16"/>
           <p:cNvSpPr/>
           <p:nvPr/>
         </p:nvSpPr>
@@ -7352,7 +7906,7 @@
           <a:bodyPr wrap="square" lIns="0" tIns="0" rIns="0" bIns="0" rtlCol="0" anchor="ctr"/>
           <a:lstStyle/>
           <a:p>
-            <a:pPr algn="l" indent="0" marL="0">
+            <a:pPr marL="0" indent="0" algn="l">
               <a:buNone/>
             </a:pPr>
             <a:r>
@@ -7372,7 +7926,7 @@
       </p:sp>
       <p:sp>
         <p:nvSpPr>
-          <p:cNvPr id="18" name="Text 16"/>
+          <p:cNvPr id="19" name="Text 17"/>
           <p:cNvSpPr/>
           <p:nvPr/>
         </p:nvSpPr>
@@ -7391,7 +7945,7 @@
           <a:bodyPr wrap="square" lIns="0" tIns="0" rIns="0" bIns="0" rtlCol="0" anchor="ctr"/>
           <a:lstStyle/>
           <a:p>
-            <a:pPr algn="ctr" indent="0" marL="0">
+            <a:pPr marL="0" indent="0" algn="ctr">
               <a:buNone/>
             </a:pPr>
             <a:r>
@@ -7411,7 +7965,7 @@
       </p:sp>
       <p:sp>
         <p:nvSpPr>
-          <p:cNvPr id="19" name="Text 17"/>
+          <p:cNvPr id="20" name="Text 18"/>
           <p:cNvSpPr/>
           <p:nvPr/>
         </p:nvSpPr>
@@ -7430,7 +7984,7 @@
           <a:bodyPr wrap="square" lIns="0" tIns="0" rIns="0" bIns="0" rtlCol="0" anchor="ctr"/>
           <a:lstStyle/>
           <a:p>
-            <a:pPr algn="ctr" indent="0" marL="0">
+            <a:pPr marL="0" indent="0" algn="ctr">
               <a:buNone/>
             </a:pPr>
             <a:r>
@@ -7450,7 +8004,7 @@
       </p:sp>
       <p:sp>
         <p:nvSpPr>
-          <p:cNvPr id="20" name="Text 18"/>
+          <p:cNvPr id="21" name="Text 19"/>
           <p:cNvSpPr/>
           <p:nvPr/>
         </p:nvSpPr>
@@ -7469,7 +8023,7 @@
           <a:bodyPr wrap="square" lIns="0" tIns="0" rIns="0" bIns="0" rtlCol="0" anchor="ctr"/>
           <a:lstStyle/>
           <a:p>
-            <a:pPr algn="ctr" indent="0" marL="0">
+            <a:pPr marL="0" indent="0" algn="ctr">
               <a:buNone/>
             </a:pPr>
             <a:r>
@@ -7486,7 +8040,7 @@
             <a:endParaRPr lang="en-US" sz="1250" dirty="0"/>
           </a:p>
           <a:p>
-            <a:pPr algn="ctr" indent="0" marL="0">
+            <a:pPr marL="0" indent="0" algn="ctr">
               <a:buNone/>
             </a:pPr>
             <a:r>
@@ -7503,7 +8057,7 @@
             <a:endParaRPr lang="en-US" sz="1250" dirty="0"/>
           </a:p>
           <a:p>
-            <a:pPr algn="ctr" indent="0" marL="0">
+            <a:pPr marL="0" indent="0" algn="ctr">
               <a:buNone/>
             </a:pPr>
             <a:r>
@@ -7523,7 +8077,7 @@
       </p:sp>
       <p:sp>
         <p:nvSpPr>
-          <p:cNvPr id="21" name="Shape 19"/>
+          <p:cNvPr id="22" name="Shape 20"/>
           <p:cNvSpPr/>
           <p:nvPr/>
         </p:nvSpPr>
@@ -7547,10 +8101,17 @@
             <a:prstDash val="solid"/>
           </a:ln>
         </p:spPr>
-      </p:sp>
-      <p:sp>
-        <p:nvSpPr>
-          <p:cNvPr id="22" name="Text 20"/>
+        <p:txBody>
+          <a:bodyPr/>
+          <a:lstStyle/>
+          <a:p>
+            <a:endParaRPr lang="en-US"/>
+          </a:p>
+        </p:txBody>
+      </p:sp>
+      <p:sp>
+        <p:nvSpPr>
+          <p:cNvPr id="23" name="Text 21"/>
           <p:cNvSpPr/>
           <p:nvPr/>
         </p:nvSpPr>
@@ -7569,7 +8130,7 @@
           <a:bodyPr wrap="square" lIns="0" tIns="0" rIns="0" bIns="0" rtlCol="0" anchor="ctr"/>
           <a:lstStyle/>
           <a:p>
-            <a:pPr algn="ctr" indent="0" marL="0">
+            <a:pPr marL="0" indent="0" algn="ctr">
               <a:buNone/>
             </a:pPr>
             <a:r>
@@ -7589,7 +8150,7 @@
       </p:sp>
       <p:sp>
         <p:nvSpPr>
-          <p:cNvPr id="23" name="Text 21"/>
+          <p:cNvPr id="24" name="Text 22"/>
           <p:cNvSpPr/>
           <p:nvPr/>
         </p:nvSpPr>
@@ -7608,7 +8169,7 @@
           <a:bodyPr wrap="square" lIns="0" tIns="0" rIns="0" bIns="0" rtlCol="0" anchor="ctr"/>
           <a:lstStyle/>
           <a:p>
-            <a:pPr algn="ctr" indent="0" marL="0">
+            <a:pPr marL="0" indent="0" algn="ctr">
               <a:buNone/>
             </a:pPr>
             <a:r>
@@ -7628,7 +8189,7 @@
       </p:sp>
       <p:sp>
         <p:nvSpPr>
-          <p:cNvPr id="24" name="Text 22"/>
+          <p:cNvPr id="25" name="Text 23"/>
           <p:cNvSpPr/>
           <p:nvPr/>
         </p:nvSpPr>
@@ -7647,7 +8208,7 @@
           <a:bodyPr wrap="square" lIns="0" tIns="0" rIns="0" bIns="0" rtlCol="0" anchor="ctr"/>
           <a:lstStyle/>
           <a:p>
-            <a:pPr algn="ctr" indent="0" marL="0">
+            <a:pPr marL="0" indent="0" algn="ctr">
               <a:buNone/>
             </a:pPr>
             <a:r>
@@ -7667,7 +8228,7 @@
       </p:sp>
       <p:sp>
         <p:nvSpPr>
-          <p:cNvPr id="25" name="Text 23"/>
+          <p:cNvPr id="26" name="Text 24"/>
           <p:cNvSpPr/>
           <p:nvPr/>
         </p:nvSpPr>
@@ -7686,7 +8247,7 @@
           <a:bodyPr wrap="square" lIns="0" tIns="0" rIns="0" bIns="0" rtlCol="0" anchor="ctr"/>
           <a:lstStyle/>
           <a:p>
-            <a:pPr algn="ctr" indent="0" marL="0">
+            <a:pPr marL="0" indent="0" algn="ctr">
               <a:buNone/>
             </a:pPr>
             <a:r>
@@ -7706,7 +8267,7 @@
       </p:sp>
       <p:sp>
         <p:nvSpPr>
-          <p:cNvPr id="26" name="Text 24"/>
+          <p:cNvPr id="27" name="Text 25"/>
           <p:cNvSpPr/>
           <p:nvPr/>
         </p:nvSpPr>
@@ -7725,7 +8286,7 @@
           <a:bodyPr wrap="square" lIns="0" tIns="0" rIns="0" bIns="0" rtlCol="0" anchor="ctr"/>
           <a:lstStyle/>
           <a:p>
-            <a:pPr algn="ctr" indent="0" marL="0">
+            <a:pPr marL="0" indent="0" algn="ctr">
               <a:buNone/>
             </a:pPr>
             <a:r>
@@ -7745,7 +8306,7 @@
       </p:sp>
       <p:sp>
         <p:nvSpPr>
-          <p:cNvPr id="27" name="Text 25"/>
+          <p:cNvPr id="28" name="Text 26"/>
           <p:cNvSpPr/>
           <p:nvPr/>
         </p:nvSpPr>
@@ -7764,7 +8325,7 @@
           <a:bodyPr wrap="square" lIns="0" tIns="0" rIns="0" bIns="0" rtlCol="0" anchor="ctr"/>
           <a:lstStyle/>
           <a:p>
-            <a:pPr algn="ctr" indent="0" marL="0">
+            <a:pPr marL="0" indent="0" algn="ctr">
               <a:buNone/>
             </a:pPr>
             <a:r>
@@ -7784,7 +8345,7 @@
       </p:sp>
       <p:sp>
         <p:nvSpPr>
-          <p:cNvPr id="28" name="Text 26"/>
+          <p:cNvPr id="29" name="Text 27"/>
           <p:cNvSpPr/>
           <p:nvPr/>
         </p:nvSpPr>
@@ -7803,7 +8364,7 @@
           <a:bodyPr wrap="square" lIns="0" tIns="0" rIns="0" bIns="0" rtlCol="0" anchor="ctr"/>
           <a:lstStyle/>
           <a:p>
-            <a:pPr algn="ctr" indent="0" marL="0">
+            <a:pPr marL="0" indent="0" algn="ctr">
               <a:buNone/>
             </a:pPr>
             <a:r>
@@ -7837,6 +8398,7 @@
         <a:solidFill>
           <a:srgbClr val="F4F7FF"/>
         </a:solidFill>
+        <a:effectLst/>
       </p:bgPr>
     </p:bg>
     <p:spTree>
@@ -7877,6 +8439,13 @@
             <a:prstDash val="solid"/>
           </a:ln>
         </p:spPr>
+        <p:txBody>
+          <a:bodyPr/>
+          <a:lstStyle/>
+          <a:p>
+            <a:endParaRPr lang="en-US"/>
+          </a:p>
+        </p:txBody>
       </p:sp>
       <p:sp>
         <p:nvSpPr>
@@ -7899,7 +8468,7 @@
           <a:bodyPr wrap="square" lIns="0" tIns="0" rIns="0" bIns="0" rtlCol="0" anchor="ctr"/>
           <a:lstStyle/>
           <a:p>
-            <a:pPr algn="r" indent="0" marL="0">
+            <a:pPr marL="0" indent="0" algn="r">
               <a:buNone/>
             </a:pPr>
             <a:r>
@@ -7917,6 +8486,45 @@
       <p:sp>
         <p:nvSpPr>
           <p:cNvPr id="4" name="Text 2"/>
+          <p:cNvSpPr/>
+          <p:nvPr/>
+        </p:nvSpPr>
+        <p:spPr>
+          <a:xfrm>
+            <a:off x="256032" y="4800600"/>
+            <a:ext cx="2011680" cy="228600"/>
+          </a:xfrm>
+          <a:prstGeom prst="rect">
+            <a:avLst/>
+          </a:prstGeom>
+          <a:noFill/>
+          <a:ln/>
+        </p:spPr>
+        <p:txBody>
+          <a:bodyPr wrap="square" lIns="0" tIns="0" rIns="0" bIns="0" rtlCol="0" anchor="ctr"/>
+          <a:lstStyle/>
+          <a:p>
+            <a:pPr marL="0" indent="0" algn="l">
+              <a:buNone/>
+            </a:pPr>
+            <a:r>
+              <a:rPr lang="en-US" sz="750" dirty="0">
+                <a:solidFill>
+                  <a:srgbClr val="C8D8EE"/>
+                </a:solidFill>
+                <a:latin typeface="Calibri" pitchFamily="34" charset="0"/>
+                <a:ea typeface="Calibri" pitchFamily="34" charset="-122"/>
+                <a:cs typeface="Calibri" pitchFamily="34" charset="-120"/>
+              </a:rPr>
+              <a:t>jueewo ventures</a:t>
+            </a:r>
+            <a:endParaRPr lang="en-US" sz="750" dirty="0"/>
+          </a:p>
+        </p:txBody>
+      </p:sp>
+      <p:sp>
+        <p:nvSpPr>
+          <p:cNvPr id="5" name="Text 3"/>
           <p:cNvSpPr/>
           <p:nvPr/>
         </p:nvSpPr>
@@ -7935,11 +8543,11 @@
           <a:bodyPr wrap="square" lIns="0" tIns="0" rIns="0" bIns="0" rtlCol="0" anchor="ctr"/>
           <a:lstStyle/>
           <a:p>
-            <a:pPr algn="l" indent="0" marL="0">
-              <a:buNone/>
-            </a:pPr>
-            <a:r>
-              <a:rPr lang="en-US" sz="900" b="1" spc="300" kern="0" dirty="0">
+            <a:pPr marL="0" indent="0" algn="l">
+              <a:buNone/>
+            </a:pPr>
+            <a:r>
+              <a:rPr lang="en-US" sz="900" b="1" kern="0" spc="300" dirty="0">
                 <a:solidFill>
                   <a:srgbClr val="3B8BF5"/>
                 </a:solidFill>
@@ -7955,7 +8563,7 @@
       </p:sp>
       <p:sp>
         <p:nvSpPr>
-          <p:cNvPr id="5" name="Text 3"/>
+          <p:cNvPr id="6" name="Text 4"/>
           <p:cNvSpPr/>
           <p:nvPr/>
         </p:nvSpPr>
@@ -7974,7 +8582,7 @@
           <a:bodyPr wrap="square" lIns="0" tIns="0" rIns="0" bIns="0" rtlCol="0" anchor="ctr"/>
           <a:lstStyle/>
           <a:p>
-            <a:pPr algn="l" indent="0" marL="0">
+            <a:pPr marL="0" indent="0" algn="l">
               <a:buNone/>
             </a:pPr>
             <a:r>
@@ -7991,7 +8599,7 @@
             <a:endParaRPr lang="en-US" sz="3000" dirty="0"/>
           </a:p>
           <a:p>
-            <a:pPr algn="l" indent="0" marL="0">
+            <a:pPr marL="0" indent="0" algn="l">
               <a:buNone/>
             </a:pPr>
             <a:r>
@@ -8011,7 +8619,7 @@
       </p:sp>
       <p:sp>
         <p:nvSpPr>
-          <p:cNvPr id="6" name="Text 4"/>
+          <p:cNvPr id="7" name="Text 5"/>
           <p:cNvSpPr/>
           <p:nvPr/>
         </p:nvSpPr>
@@ -8030,7 +8638,7 @@
           <a:bodyPr wrap="square" lIns="0" tIns="0" rIns="0" bIns="0" rtlCol="0" anchor="ctr"/>
           <a:lstStyle/>
           <a:p>
-            <a:pPr algn="l" indent="0" marL="0">
+            <a:pPr marL="0" indent="0" algn="l">
               <a:buNone/>
             </a:pPr>
             <a:r>
@@ -8050,7 +8658,7 @@
       </p:sp>
       <p:sp>
         <p:nvSpPr>
-          <p:cNvPr id="7" name="Shape 5"/>
+          <p:cNvPr id="8" name="Shape 6"/>
           <p:cNvSpPr/>
           <p:nvPr/>
         </p:nvSpPr>
@@ -8072,17 +8680,24 @@
             <a:prstDash val="solid"/>
           </a:ln>
           <a:effectLst>
-            <a:outerShdw sx="100000" sy="100000" kx="0" ky="0" algn="bl" rotWithShape="0" blurRad="101600" dist="38100" dir="8100000">
+            <a:outerShdw blurRad="101600" dist="38100" dir="8100000" algn="bl" rotWithShape="0">
               <a:srgbClr val="000000">
                 <a:alpha val="10000"/>
               </a:srgbClr>
             </a:outerShdw>
           </a:effectLst>
         </p:spPr>
-      </p:sp>
-      <p:sp>
-        <p:nvSpPr>
-          <p:cNvPr id="8" name="Shape 6"/>
+        <p:txBody>
+          <a:bodyPr/>
+          <a:lstStyle/>
+          <a:p>
+            <a:endParaRPr lang="en-US"/>
+          </a:p>
+        </p:txBody>
+      </p:sp>
+      <p:sp>
+        <p:nvSpPr>
+          <p:cNvPr id="9" name="Shape 7"/>
           <p:cNvSpPr/>
           <p:nvPr/>
         </p:nvSpPr>
@@ -8104,10 +8719,17 @@
             <a:prstDash val="solid"/>
           </a:ln>
         </p:spPr>
-      </p:sp>
-      <p:sp>
-        <p:nvSpPr>
-          <p:cNvPr id="9" name="Text 7"/>
+        <p:txBody>
+          <a:bodyPr/>
+          <a:lstStyle/>
+          <a:p>
+            <a:endParaRPr lang="en-US"/>
+          </a:p>
+        </p:txBody>
+      </p:sp>
+      <p:sp>
+        <p:nvSpPr>
+          <p:cNvPr id="10" name="Text 8"/>
           <p:cNvSpPr/>
           <p:nvPr/>
         </p:nvSpPr>
@@ -8126,7 +8748,7 @@
           <a:bodyPr wrap="square" lIns="0" tIns="0" rIns="0" bIns="0" rtlCol="0" anchor="ctr"/>
           <a:lstStyle/>
           <a:p>
-            <a:pPr algn="l" indent="0" marL="0">
+            <a:pPr marL="0" indent="0" algn="l">
               <a:buNone/>
             </a:pPr>
             <a:r>
@@ -8146,7 +8768,7 @@
       </p:sp>
       <p:sp>
         <p:nvSpPr>
-          <p:cNvPr id="10" name="Text 8"/>
+          <p:cNvPr id="11" name="Text 9"/>
           <p:cNvSpPr/>
           <p:nvPr/>
         </p:nvSpPr>
@@ -8165,7 +8787,7 @@
           <a:bodyPr wrap="square" lIns="0" tIns="0" rIns="0" bIns="0" rtlCol="0" anchor="ctr"/>
           <a:lstStyle/>
           <a:p>
-            <a:pPr algn="l" indent="0" marL="0">
+            <a:pPr marL="0" indent="0" algn="l">
               <a:buNone/>
             </a:pPr>
             <a:r>
@@ -8185,7 +8807,7 @@
       </p:sp>
       <p:sp>
         <p:nvSpPr>
-          <p:cNvPr id="11" name="Text 9"/>
+          <p:cNvPr id="12" name="Text 10"/>
           <p:cNvSpPr/>
           <p:nvPr/>
         </p:nvSpPr>
@@ -8204,7 +8826,7 @@
           <a:bodyPr wrap="square" lIns="0" tIns="0" rIns="0" bIns="0" rtlCol="0" anchor="ctr"/>
           <a:lstStyle/>
           <a:p>
-            <a:pPr algn="l" indent="0" marL="0">
+            <a:pPr marL="0" indent="0" algn="l">
               <a:buNone/>
             </a:pPr>
             <a:r>
@@ -8224,7 +8846,7 @@
       </p:sp>
       <p:sp>
         <p:nvSpPr>
-          <p:cNvPr id="12" name="Shape 10"/>
+          <p:cNvPr id="13" name="Shape 11"/>
           <p:cNvSpPr/>
           <p:nvPr/>
         </p:nvSpPr>
@@ -8246,17 +8868,24 @@
             <a:prstDash val="solid"/>
           </a:ln>
           <a:effectLst>
-            <a:outerShdw sx="100000" sy="100000" kx="0" ky="0" algn="bl" rotWithShape="0" blurRad="101600" dist="38100" dir="8100000">
+            <a:outerShdw blurRad="101600" dist="38100" dir="8100000" algn="bl" rotWithShape="0">
               <a:srgbClr val="000000">
                 <a:alpha val="10000"/>
               </a:srgbClr>
             </a:outerShdw>
           </a:effectLst>
         </p:spPr>
-      </p:sp>
-      <p:sp>
-        <p:nvSpPr>
-          <p:cNvPr id="13" name="Shape 11"/>
+        <p:txBody>
+          <a:bodyPr/>
+          <a:lstStyle/>
+          <a:p>
+            <a:endParaRPr lang="en-US"/>
+          </a:p>
+        </p:txBody>
+      </p:sp>
+      <p:sp>
+        <p:nvSpPr>
+          <p:cNvPr id="14" name="Shape 12"/>
           <p:cNvSpPr/>
           <p:nvPr/>
         </p:nvSpPr>
@@ -8278,10 +8907,17 @@
             <a:prstDash val="solid"/>
           </a:ln>
         </p:spPr>
-      </p:sp>
-      <p:sp>
-        <p:nvSpPr>
-          <p:cNvPr id="14" name="Text 12"/>
+        <p:txBody>
+          <a:bodyPr/>
+          <a:lstStyle/>
+          <a:p>
+            <a:endParaRPr lang="en-US"/>
+          </a:p>
+        </p:txBody>
+      </p:sp>
+      <p:sp>
+        <p:nvSpPr>
+          <p:cNvPr id="15" name="Text 13"/>
           <p:cNvSpPr/>
           <p:nvPr/>
         </p:nvSpPr>
@@ -8300,7 +8936,7 @@
           <a:bodyPr wrap="square" lIns="0" tIns="0" rIns="0" bIns="0" rtlCol="0" anchor="ctr"/>
           <a:lstStyle/>
           <a:p>
-            <a:pPr algn="l" indent="0" marL="0">
+            <a:pPr marL="0" indent="0" algn="l">
               <a:buNone/>
             </a:pPr>
             <a:r>
@@ -8320,7 +8956,7 @@
       </p:sp>
       <p:sp>
         <p:nvSpPr>
-          <p:cNvPr id="15" name="Text 13"/>
+          <p:cNvPr id="16" name="Text 14"/>
           <p:cNvSpPr/>
           <p:nvPr/>
         </p:nvSpPr>
@@ -8339,7 +8975,7 @@
           <a:bodyPr wrap="square" lIns="0" tIns="0" rIns="0" bIns="0" rtlCol="0" anchor="ctr"/>
           <a:lstStyle/>
           <a:p>
-            <a:pPr algn="l" indent="0" marL="0">
+            <a:pPr marL="0" indent="0" algn="l">
               <a:buNone/>
             </a:pPr>
             <a:r>
@@ -8359,7 +8995,7 @@
       </p:sp>
       <p:sp>
         <p:nvSpPr>
-          <p:cNvPr id="16" name="Text 14"/>
+          <p:cNvPr id="17" name="Text 15"/>
           <p:cNvSpPr/>
           <p:nvPr/>
         </p:nvSpPr>
@@ -8378,7 +9014,7 @@
           <a:bodyPr wrap="square" lIns="0" tIns="0" rIns="0" bIns="0" rtlCol="0" anchor="ctr"/>
           <a:lstStyle/>
           <a:p>
-            <a:pPr algn="l" indent="0" marL="0">
+            <a:pPr marL="0" indent="0" algn="l">
               <a:buNone/>
             </a:pPr>
             <a:r>
@@ -8398,7 +9034,7 @@
       </p:sp>
       <p:sp>
         <p:nvSpPr>
-          <p:cNvPr id="17" name="Shape 15"/>
+          <p:cNvPr id="18" name="Shape 16"/>
           <p:cNvSpPr/>
           <p:nvPr/>
         </p:nvSpPr>
@@ -8420,17 +9056,24 @@
             <a:prstDash val="solid"/>
           </a:ln>
           <a:effectLst>
-            <a:outerShdw sx="100000" sy="100000" kx="0" ky="0" algn="bl" rotWithShape="0" blurRad="101600" dist="38100" dir="8100000">
+            <a:outerShdw blurRad="101600" dist="38100" dir="8100000" algn="bl" rotWithShape="0">
               <a:srgbClr val="000000">
                 <a:alpha val="10000"/>
               </a:srgbClr>
             </a:outerShdw>
           </a:effectLst>
         </p:spPr>
-      </p:sp>
-      <p:sp>
-        <p:nvSpPr>
-          <p:cNvPr id="18" name="Shape 16"/>
+        <p:txBody>
+          <a:bodyPr/>
+          <a:lstStyle/>
+          <a:p>
+            <a:endParaRPr lang="en-US"/>
+          </a:p>
+        </p:txBody>
+      </p:sp>
+      <p:sp>
+        <p:nvSpPr>
+          <p:cNvPr id="19" name="Shape 17"/>
           <p:cNvSpPr/>
           <p:nvPr/>
         </p:nvSpPr>
@@ -8452,10 +9095,17 @@
             <a:prstDash val="solid"/>
           </a:ln>
         </p:spPr>
-      </p:sp>
-      <p:sp>
-        <p:nvSpPr>
-          <p:cNvPr id="19" name="Text 17"/>
+        <p:txBody>
+          <a:bodyPr/>
+          <a:lstStyle/>
+          <a:p>
+            <a:endParaRPr lang="en-US"/>
+          </a:p>
+        </p:txBody>
+      </p:sp>
+      <p:sp>
+        <p:nvSpPr>
+          <p:cNvPr id="20" name="Text 18"/>
           <p:cNvSpPr/>
           <p:nvPr/>
         </p:nvSpPr>
@@ -8474,7 +9124,7 @@
           <a:bodyPr wrap="square" lIns="0" tIns="0" rIns="0" bIns="0" rtlCol="0" anchor="ctr"/>
           <a:lstStyle/>
           <a:p>
-            <a:pPr algn="l" indent="0" marL="0">
+            <a:pPr marL="0" indent="0" algn="l">
               <a:buNone/>
             </a:pPr>
             <a:r>
@@ -8494,7 +9144,7 @@
       </p:sp>
       <p:sp>
         <p:nvSpPr>
-          <p:cNvPr id="20" name="Text 18"/>
+          <p:cNvPr id="21" name="Text 19"/>
           <p:cNvSpPr/>
           <p:nvPr/>
         </p:nvSpPr>
@@ -8513,7 +9163,7 @@
           <a:bodyPr wrap="square" lIns="0" tIns="0" rIns="0" bIns="0" rtlCol="0" anchor="ctr"/>
           <a:lstStyle/>
           <a:p>
-            <a:pPr algn="l" indent="0" marL="0">
+            <a:pPr marL="0" indent="0" algn="l">
               <a:buNone/>
             </a:pPr>
             <a:r>
@@ -8533,7 +9183,7 @@
       </p:sp>
       <p:sp>
         <p:nvSpPr>
-          <p:cNvPr id="21" name="Text 19"/>
+          <p:cNvPr id="22" name="Text 20"/>
           <p:cNvSpPr/>
           <p:nvPr/>
         </p:nvSpPr>
@@ -8552,7 +9202,7 @@
           <a:bodyPr wrap="square" lIns="0" tIns="0" rIns="0" bIns="0" rtlCol="0" anchor="ctr"/>
           <a:lstStyle/>
           <a:p>
-            <a:pPr algn="l" indent="0" marL="0">
+            <a:pPr marL="0" indent="0" algn="l">
               <a:buNone/>
             </a:pPr>
             <a:r>
@@ -8572,7 +9222,7 @@
       </p:sp>
       <p:sp>
         <p:nvSpPr>
-          <p:cNvPr id="22" name="Shape 20"/>
+          <p:cNvPr id="23" name="Shape 21"/>
           <p:cNvSpPr/>
           <p:nvPr/>
         </p:nvSpPr>
@@ -8594,17 +9244,24 @@
             <a:prstDash val="solid"/>
           </a:ln>
           <a:effectLst>
-            <a:outerShdw sx="100000" sy="100000" kx="0" ky="0" algn="bl" rotWithShape="0" blurRad="101600" dist="38100" dir="8100000">
+            <a:outerShdw blurRad="101600" dist="38100" dir="8100000" algn="bl" rotWithShape="0">
               <a:srgbClr val="000000">
                 <a:alpha val="10000"/>
               </a:srgbClr>
             </a:outerShdw>
           </a:effectLst>
         </p:spPr>
-      </p:sp>
-      <p:sp>
-        <p:nvSpPr>
-          <p:cNvPr id="23" name="Shape 21"/>
+        <p:txBody>
+          <a:bodyPr/>
+          <a:lstStyle/>
+          <a:p>
+            <a:endParaRPr lang="en-US"/>
+          </a:p>
+        </p:txBody>
+      </p:sp>
+      <p:sp>
+        <p:nvSpPr>
+          <p:cNvPr id="24" name="Shape 22"/>
           <p:cNvSpPr/>
           <p:nvPr/>
         </p:nvSpPr>
@@ -8626,10 +9283,17 @@
             <a:prstDash val="solid"/>
           </a:ln>
         </p:spPr>
-      </p:sp>
-      <p:sp>
-        <p:nvSpPr>
-          <p:cNvPr id="24" name="Text 22"/>
+        <p:txBody>
+          <a:bodyPr/>
+          <a:lstStyle/>
+          <a:p>
+            <a:endParaRPr lang="en-US"/>
+          </a:p>
+        </p:txBody>
+      </p:sp>
+      <p:sp>
+        <p:nvSpPr>
+          <p:cNvPr id="25" name="Text 23"/>
           <p:cNvSpPr/>
           <p:nvPr/>
         </p:nvSpPr>
@@ -8648,7 +9312,7 @@
           <a:bodyPr wrap="square" lIns="0" tIns="0" rIns="0" bIns="0" rtlCol="0" anchor="ctr"/>
           <a:lstStyle/>
           <a:p>
-            <a:pPr algn="l" indent="0" marL="0">
+            <a:pPr marL="0" indent="0" algn="l">
               <a:buNone/>
             </a:pPr>
             <a:r>
@@ -8668,7 +9332,7 @@
       </p:sp>
       <p:sp>
         <p:nvSpPr>
-          <p:cNvPr id="25" name="Shape 23"/>
+          <p:cNvPr id="26" name="Shape 24"/>
           <p:cNvSpPr/>
           <p:nvPr/>
         </p:nvSpPr>
@@ -8690,10 +9354,17 @@
             <a:prstDash val="solid"/>
           </a:ln>
         </p:spPr>
-      </p:sp>
-      <p:sp>
-        <p:nvSpPr>
-          <p:cNvPr id="26" name="Text 24"/>
+        <p:txBody>
+          <a:bodyPr/>
+          <a:lstStyle/>
+          <a:p>
+            <a:endParaRPr lang="en-US"/>
+          </a:p>
+        </p:txBody>
+      </p:sp>
+      <p:sp>
+        <p:nvSpPr>
+          <p:cNvPr id="27" name="Text 25"/>
           <p:cNvSpPr/>
           <p:nvPr/>
         </p:nvSpPr>
@@ -8712,7 +9383,7 @@
           <a:bodyPr wrap="square" lIns="0" tIns="0" rIns="0" bIns="0" rtlCol="0" anchor="ctr"/>
           <a:lstStyle/>
           <a:p>
-            <a:pPr algn="l" indent="0" marL="0">
+            <a:pPr marL="0" indent="0" algn="l">
               <a:buNone/>
             </a:pPr>
             <a:r>
@@ -8732,7 +9403,7 @@
       </p:sp>
       <p:sp>
         <p:nvSpPr>
-          <p:cNvPr id="27" name="Shape 25"/>
+          <p:cNvPr id="28" name="Shape 26"/>
           <p:cNvSpPr/>
           <p:nvPr/>
         </p:nvSpPr>
@@ -8754,10 +9425,17 @@
             <a:prstDash val="solid"/>
           </a:ln>
         </p:spPr>
-      </p:sp>
-      <p:sp>
-        <p:nvSpPr>
-          <p:cNvPr id="28" name="Text 26"/>
+        <p:txBody>
+          <a:bodyPr/>
+          <a:lstStyle/>
+          <a:p>
+            <a:endParaRPr lang="en-US"/>
+          </a:p>
+        </p:txBody>
+      </p:sp>
+      <p:sp>
+        <p:nvSpPr>
+          <p:cNvPr id="29" name="Text 27"/>
           <p:cNvSpPr/>
           <p:nvPr/>
         </p:nvSpPr>
@@ -8776,7 +9454,7 @@
           <a:bodyPr wrap="square" lIns="0" tIns="0" rIns="0" bIns="0" rtlCol="0" anchor="ctr"/>
           <a:lstStyle/>
           <a:p>
-            <a:pPr algn="l" indent="0" marL="0">
+            <a:pPr marL="0" indent="0" algn="l">
               <a:buNone/>
             </a:pPr>
             <a:r>
@@ -8796,7 +9474,7 @@
       </p:sp>
       <p:sp>
         <p:nvSpPr>
-          <p:cNvPr id="29" name="Shape 27"/>
+          <p:cNvPr id="30" name="Shape 28"/>
           <p:cNvSpPr/>
           <p:nvPr/>
         </p:nvSpPr>
@@ -8818,10 +9496,17 @@
             <a:prstDash val="solid"/>
           </a:ln>
         </p:spPr>
-      </p:sp>
-      <p:sp>
-        <p:nvSpPr>
-          <p:cNvPr id="30" name="Text 28"/>
+        <p:txBody>
+          <a:bodyPr/>
+          <a:lstStyle/>
+          <a:p>
+            <a:endParaRPr lang="en-US"/>
+          </a:p>
+        </p:txBody>
+      </p:sp>
+      <p:sp>
+        <p:nvSpPr>
+          <p:cNvPr id="31" name="Text 29"/>
           <p:cNvSpPr/>
           <p:nvPr/>
         </p:nvSpPr>
@@ -8840,7 +9525,7 @@
           <a:bodyPr wrap="square" lIns="0" tIns="0" rIns="0" bIns="0" rtlCol="0" anchor="ctr"/>
           <a:lstStyle/>
           <a:p>
-            <a:pPr algn="l" indent="0" marL="0">
+            <a:pPr marL="0" indent="0" algn="l">
               <a:buNone/>
             </a:pPr>
             <a:r>
@@ -8860,7 +9545,7 @@
       </p:sp>
       <p:sp>
         <p:nvSpPr>
-          <p:cNvPr id="31" name="Shape 29"/>
+          <p:cNvPr id="32" name="Shape 30"/>
           <p:cNvSpPr/>
           <p:nvPr/>
         </p:nvSpPr>
@@ -8882,10 +9567,17 @@
             <a:prstDash val="solid"/>
           </a:ln>
         </p:spPr>
-      </p:sp>
-      <p:sp>
-        <p:nvSpPr>
-          <p:cNvPr id="32" name="Text 30"/>
+        <p:txBody>
+          <a:bodyPr/>
+          <a:lstStyle/>
+          <a:p>
+            <a:endParaRPr lang="en-US"/>
+          </a:p>
+        </p:txBody>
+      </p:sp>
+      <p:sp>
+        <p:nvSpPr>
+          <p:cNvPr id="33" name="Text 31"/>
           <p:cNvSpPr/>
           <p:nvPr/>
         </p:nvSpPr>
@@ -8904,7 +9596,7 @@
           <a:bodyPr wrap="square" lIns="0" tIns="0" rIns="0" bIns="0" rtlCol="0" anchor="ctr"/>
           <a:lstStyle/>
           <a:p>
-            <a:pPr algn="l" indent="0" marL="0">
+            <a:pPr marL="0" indent="0" algn="l">
               <a:buNone/>
             </a:pPr>
             <a:r>
@@ -8924,7 +9616,7 @@
       </p:sp>
       <p:sp>
         <p:nvSpPr>
-          <p:cNvPr id="33" name="Shape 31"/>
+          <p:cNvPr id="34" name="Shape 32"/>
           <p:cNvSpPr/>
           <p:nvPr/>
         </p:nvSpPr>
@@ -8946,10 +9638,17 @@
             <a:prstDash val="solid"/>
           </a:ln>
         </p:spPr>
-      </p:sp>
-      <p:sp>
-        <p:nvSpPr>
-          <p:cNvPr id="34" name="Text 32"/>
+        <p:txBody>
+          <a:bodyPr/>
+          <a:lstStyle/>
+          <a:p>
+            <a:endParaRPr lang="en-US"/>
+          </a:p>
+        </p:txBody>
+      </p:sp>
+      <p:sp>
+        <p:nvSpPr>
+          <p:cNvPr id="35" name="Text 33"/>
           <p:cNvSpPr/>
           <p:nvPr/>
         </p:nvSpPr>
@@ -8968,7 +9667,7 @@
           <a:bodyPr wrap="square" lIns="0" tIns="0" rIns="0" bIns="0" rtlCol="0" anchor="ctr"/>
           <a:lstStyle/>
           <a:p>
-            <a:pPr algn="l" indent="0" marL="0">
+            <a:pPr marL="0" indent="0" algn="l">
               <a:buNone/>
             </a:pPr>
             <a:r>
@@ -8988,7 +9687,7 @@
       </p:sp>
       <p:sp>
         <p:nvSpPr>
-          <p:cNvPr id="35" name="Shape 33"/>
+          <p:cNvPr id="36" name="Shape 34"/>
           <p:cNvSpPr/>
           <p:nvPr/>
         </p:nvSpPr>
@@ -9010,10 +9709,17 @@
             <a:prstDash val="solid"/>
           </a:ln>
         </p:spPr>
-      </p:sp>
-      <p:sp>
-        <p:nvSpPr>
-          <p:cNvPr id="36" name="Text 34"/>
+        <p:txBody>
+          <a:bodyPr/>
+          <a:lstStyle/>
+          <a:p>
+            <a:endParaRPr lang="en-US"/>
+          </a:p>
+        </p:txBody>
+      </p:sp>
+      <p:sp>
+        <p:nvSpPr>
+          <p:cNvPr id="37" name="Text 35"/>
           <p:cNvSpPr/>
           <p:nvPr/>
         </p:nvSpPr>
@@ -9032,7 +9738,7 @@
           <a:bodyPr wrap="square" lIns="0" tIns="0" rIns="0" bIns="0" rtlCol="0" anchor="ctr"/>
           <a:lstStyle/>
           <a:p>
-            <a:pPr algn="l" indent="0" marL="0">
+            <a:pPr marL="0" indent="0" algn="l">
               <a:buNone/>
             </a:pPr>
             <a:r>
@@ -9052,7 +9758,7 @@
       </p:sp>
       <p:sp>
         <p:nvSpPr>
-          <p:cNvPr id="37" name="Shape 35"/>
+          <p:cNvPr id="38" name="Shape 36"/>
           <p:cNvSpPr/>
           <p:nvPr/>
         </p:nvSpPr>
@@ -9074,10 +9780,17 @@
             <a:prstDash val="solid"/>
           </a:ln>
         </p:spPr>
-      </p:sp>
-      <p:sp>
-        <p:nvSpPr>
-          <p:cNvPr id="38" name="Text 36"/>
+        <p:txBody>
+          <a:bodyPr/>
+          <a:lstStyle/>
+          <a:p>
+            <a:endParaRPr lang="en-US"/>
+          </a:p>
+        </p:txBody>
+      </p:sp>
+      <p:sp>
+        <p:nvSpPr>
+          <p:cNvPr id="39" name="Text 37"/>
           <p:cNvSpPr/>
           <p:nvPr/>
         </p:nvSpPr>
@@ -9096,7 +9809,7 @@
           <a:bodyPr wrap="square" lIns="0" tIns="0" rIns="0" bIns="0" rtlCol="0" anchor="ctr"/>
           <a:lstStyle/>
           <a:p>
-            <a:pPr algn="l" indent="0" marL="0">
+            <a:pPr marL="0" indent="0" algn="l">
               <a:buNone/>
             </a:pPr>
             <a:r>
@@ -9116,7 +9829,7 @@
       </p:sp>
       <p:sp>
         <p:nvSpPr>
-          <p:cNvPr id="39" name="Shape 37"/>
+          <p:cNvPr id="40" name="Shape 38"/>
           <p:cNvSpPr/>
           <p:nvPr/>
         </p:nvSpPr>
@@ -9138,10 +9851,17 @@
             <a:prstDash val="solid"/>
           </a:ln>
         </p:spPr>
-      </p:sp>
-      <p:sp>
-        <p:nvSpPr>
-          <p:cNvPr id="40" name="Text 38"/>
+        <p:txBody>
+          <a:bodyPr/>
+          <a:lstStyle/>
+          <a:p>
+            <a:endParaRPr lang="en-US"/>
+          </a:p>
+        </p:txBody>
+      </p:sp>
+      <p:sp>
+        <p:nvSpPr>
+          <p:cNvPr id="41" name="Text 39"/>
           <p:cNvSpPr/>
           <p:nvPr/>
         </p:nvSpPr>
@@ -9160,7 +9880,7 @@
           <a:bodyPr wrap="square" lIns="0" tIns="0" rIns="0" bIns="0" rtlCol="0" anchor="ctr"/>
           <a:lstStyle/>
           <a:p>
-            <a:pPr algn="l" indent="0" marL="0">
+            <a:pPr marL="0" indent="0" algn="l">
               <a:buNone/>
             </a:pPr>
             <a:r>
@@ -9194,6 +9914,7 @@
         <a:solidFill>
           <a:srgbClr val="0D1B3E"/>
         </a:solidFill>
+        <a:effectLst/>
       </p:bgPr>
     </p:bg>
     <p:spTree>
@@ -9231,7 +9952,7 @@
           <a:bodyPr wrap="square" lIns="0" tIns="0" rIns="0" bIns="0" rtlCol="0" anchor="ctr"/>
           <a:lstStyle/>
           <a:p>
-            <a:pPr algn="r" indent="0" marL="0">
+            <a:pPr marL="0" indent="0" algn="r">
               <a:buNone/>
             </a:pPr>
             <a:r>
@@ -9248,7 +9969,46 @@
       </p:sp>
       <p:sp>
         <p:nvSpPr>
-          <p:cNvPr id="3" name="Shape 1"/>
+          <p:cNvPr id="3" name="Text 1"/>
+          <p:cNvSpPr/>
+          <p:nvPr/>
+        </p:nvSpPr>
+        <p:spPr>
+          <a:xfrm>
+            <a:off x="256032" y="4800600"/>
+            <a:ext cx="2011680" cy="228600"/>
+          </a:xfrm>
+          <a:prstGeom prst="rect">
+            <a:avLst/>
+          </a:prstGeom>
+          <a:noFill/>
+          <a:ln/>
+        </p:spPr>
+        <p:txBody>
+          <a:bodyPr wrap="square" lIns="0" tIns="0" rIns="0" bIns="0" rtlCol="0" anchor="ctr"/>
+          <a:lstStyle/>
+          <a:p>
+            <a:pPr marL="0" indent="0" algn="l">
+              <a:buNone/>
+            </a:pPr>
+            <a:r>
+              <a:rPr lang="en-US" sz="750" dirty="0">
+                <a:solidFill>
+                  <a:srgbClr val="2A4070"/>
+                </a:solidFill>
+                <a:latin typeface="Calibri" pitchFamily="34" charset="0"/>
+                <a:ea typeface="Calibri" pitchFamily="34" charset="-122"/>
+                <a:cs typeface="Calibri" pitchFamily="34" charset="-120"/>
+              </a:rPr>
+              <a:t>jueewo ventures</a:t>
+            </a:r>
+            <a:endParaRPr lang="en-US" sz="750" dirty="0"/>
+          </a:p>
+        </p:txBody>
+      </p:sp>
+      <p:sp>
+        <p:nvSpPr>
+          <p:cNvPr id="4" name="Shape 2"/>
           <p:cNvSpPr/>
           <p:nvPr/>
         </p:nvSpPr>
@@ -9270,10 +10030,17 @@
             <a:prstDash val="solid"/>
           </a:ln>
         </p:spPr>
-      </p:sp>
-      <p:sp>
-        <p:nvSpPr>
-          <p:cNvPr id="4" name="Text 2"/>
+        <p:txBody>
+          <a:bodyPr/>
+          <a:lstStyle/>
+          <a:p>
+            <a:endParaRPr lang="en-US"/>
+          </a:p>
+        </p:txBody>
+      </p:sp>
+      <p:sp>
+        <p:nvSpPr>
+          <p:cNvPr id="5" name="Text 3"/>
           <p:cNvSpPr/>
           <p:nvPr/>
         </p:nvSpPr>
@@ -9292,11 +10059,11 @@
           <a:bodyPr wrap="square" lIns="0" tIns="0" rIns="0" bIns="0" rtlCol="0" anchor="ctr"/>
           <a:lstStyle/>
           <a:p>
-            <a:pPr algn="l" indent="0" marL="0">
-              <a:buNone/>
-            </a:pPr>
-            <a:r>
-              <a:rPr lang="en-US" sz="900" b="1" spc="300" kern="0" dirty="0">
+            <a:pPr marL="0" indent="0" algn="l">
+              <a:buNone/>
+            </a:pPr>
+            <a:r>
+              <a:rPr lang="en-US" sz="900" b="1" kern="0" spc="300" dirty="0">
                 <a:solidFill>
                   <a:srgbClr val="A8C8FA"/>
                 </a:solidFill>
@@ -9312,7 +10079,7 @@
       </p:sp>
       <p:sp>
         <p:nvSpPr>
-          <p:cNvPr id="5" name="Text 3"/>
+          <p:cNvPr id="6" name="Text 4"/>
           <p:cNvSpPr/>
           <p:nvPr/>
         </p:nvSpPr>
@@ -9331,7 +10098,7 @@
           <a:bodyPr wrap="square" lIns="0" tIns="0" rIns="0" bIns="0" rtlCol="0" anchor="ctr"/>
           <a:lstStyle/>
           <a:p>
-            <a:pPr algn="l" indent="0" marL="0">
+            <a:pPr marL="0" indent="0" algn="l">
               <a:buNone/>
             </a:pPr>
             <a:r>
@@ -9348,7 +10115,7 @@
             <a:endParaRPr lang="en-US" sz="3000" dirty="0"/>
           </a:p>
           <a:p>
-            <a:pPr algn="l" indent="0" marL="0">
+            <a:pPr marL="0" indent="0" algn="l">
               <a:buNone/>
             </a:pPr>
             <a:r>
@@ -9368,7 +10135,7 @@
       </p:sp>
       <p:sp>
         <p:nvSpPr>
-          <p:cNvPr id="6" name="Shape 4"/>
+          <p:cNvPr id="7" name="Shape 5"/>
           <p:cNvSpPr/>
           <p:nvPr/>
         </p:nvSpPr>
@@ -9390,17 +10157,24 @@
             <a:prstDash val="solid"/>
           </a:ln>
           <a:effectLst>
-            <a:outerShdw sx="100000" sy="100000" kx="0" ky="0" algn="bl" rotWithShape="0" blurRad="101600" dist="38100" dir="8100000">
+            <a:outerShdw blurRad="101600" dist="38100" dir="8100000" algn="bl" rotWithShape="0">
               <a:srgbClr val="000000">
                 <a:alpha val="10000"/>
               </a:srgbClr>
             </a:outerShdw>
           </a:effectLst>
         </p:spPr>
-      </p:sp>
-      <p:sp>
-        <p:nvSpPr>
-          <p:cNvPr id="7" name="Shape 5"/>
+        <p:txBody>
+          <a:bodyPr/>
+          <a:lstStyle/>
+          <a:p>
+            <a:endParaRPr lang="en-US"/>
+          </a:p>
+        </p:txBody>
+      </p:sp>
+      <p:sp>
+        <p:nvSpPr>
+          <p:cNvPr id="8" name="Shape 6"/>
           <p:cNvSpPr/>
           <p:nvPr/>
         </p:nvSpPr>
@@ -9422,10 +10196,17 @@
             <a:prstDash val="solid"/>
           </a:ln>
         </p:spPr>
-      </p:sp>
-      <p:sp>
-        <p:nvSpPr>
-          <p:cNvPr id="8" name="Text 6"/>
+        <p:txBody>
+          <a:bodyPr/>
+          <a:lstStyle/>
+          <a:p>
+            <a:endParaRPr lang="en-US"/>
+          </a:p>
+        </p:txBody>
+      </p:sp>
+      <p:sp>
+        <p:nvSpPr>
+          <p:cNvPr id="9" name="Text 7"/>
           <p:cNvSpPr/>
           <p:nvPr/>
         </p:nvSpPr>
@@ -9444,7 +10225,7 @@
           <a:bodyPr wrap="square" lIns="0" tIns="0" rIns="0" bIns="0" rtlCol="0" anchor="ctr"/>
           <a:lstStyle/>
           <a:p>
-            <a:pPr algn="l" indent="0" marL="0">
+            <a:pPr marL="0" indent="0" algn="l">
               <a:buNone/>
             </a:pPr>
             <a:r>
@@ -9464,7 +10245,7 @@
       </p:sp>
       <p:sp>
         <p:nvSpPr>
-          <p:cNvPr id="9" name="Text 7"/>
+          <p:cNvPr id="10" name="Text 8"/>
           <p:cNvSpPr/>
           <p:nvPr/>
         </p:nvSpPr>
@@ -9483,7 +10264,7 @@
           <a:bodyPr wrap="square" lIns="0" tIns="0" rIns="0" bIns="0" rtlCol="0" anchor="ctr"/>
           <a:lstStyle/>
           <a:p>
-            <a:pPr algn="l" indent="0" marL="0">
+            <a:pPr marL="0" indent="0" algn="l">
               <a:buNone/>
             </a:pPr>
             <a:r>
@@ -9503,7 +10284,7 @@
       </p:sp>
       <p:sp>
         <p:nvSpPr>
-          <p:cNvPr id="10" name="Text 8"/>
+          <p:cNvPr id="11" name="Text 9"/>
           <p:cNvSpPr/>
           <p:nvPr/>
         </p:nvSpPr>
@@ -9522,7 +10303,7 @@
           <a:bodyPr wrap="square" lIns="0" tIns="0" rIns="0" bIns="0" rtlCol="0" anchor="ctr"/>
           <a:lstStyle/>
           <a:p>
-            <a:pPr algn="l" indent="0" marL="0">
+            <a:pPr marL="0" indent="0" algn="l">
               <a:buNone/>
             </a:pPr>
             <a:r>
@@ -9542,7 +10323,7 @@
       </p:sp>
       <p:sp>
         <p:nvSpPr>
-          <p:cNvPr id="11" name="Text 9"/>
+          <p:cNvPr id="12" name="Text 10"/>
           <p:cNvSpPr/>
           <p:nvPr/>
         </p:nvSpPr>
@@ -9561,7 +10342,7 @@
           <a:bodyPr wrap="square" lIns="0" tIns="0" rIns="0" bIns="0" rtlCol="0" anchor="ctr"/>
           <a:lstStyle/>
           <a:p>
-            <a:pPr algn="l" indent="0" marL="0">
+            <a:pPr marL="0" indent="0" algn="l">
               <a:buNone/>
             </a:pPr>
             <a:r>
@@ -9581,7 +10362,7 @@
       </p:sp>
       <p:sp>
         <p:nvSpPr>
-          <p:cNvPr id="12" name="Text 10"/>
+          <p:cNvPr id="13" name="Text 11"/>
           <p:cNvSpPr/>
           <p:nvPr/>
         </p:nvSpPr>
@@ -9600,7 +10381,7 @@
           <a:bodyPr wrap="square" lIns="0" tIns="0" rIns="0" bIns="0" rtlCol="0" anchor="ctr"/>
           <a:lstStyle/>
           <a:p>
-            <a:pPr algn="l" indent="0" marL="0">
+            <a:pPr marL="0" indent="0" algn="l">
               <a:buNone/>
             </a:pPr>
             <a:r>
@@ -9620,7 +10401,7 @@
       </p:sp>
       <p:sp>
         <p:nvSpPr>
-          <p:cNvPr id="13" name="Shape 11"/>
+          <p:cNvPr id="14" name="Shape 12"/>
           <p:cNvSpPr/>
           <p:nvPr/>
         </p:nvSpPr>
@@ -9642,17 +10423,24 @@
             <a:prstDash val="solid"/>
           </a:ln>
           <a:effectLst>
-            <a:outerShdw sx="100000" sy="100000" kx="0" ky="0" algn="bl" rotWithShape="0" blurRad="101600" dist="38100" dir="8100000">
+            <a:outerShdw blurRad="101600" dist="38100" dir="8100000" algn="bl" rotWithShape="0">
               <a:srgbClr val="000000">
                 <a:alpha val="10000"/>
               </a:srgbClr>
             </a:outerShdw>
           </a:effectLst>
         </p:spPr>
-      </p:sp>
-      <p:sp>
-        <p:nvSpPr>
-          <p:cNvPr id="14" name="Shape 12"/>
+        <p:txBody>
+          <a:bodyPr/>
+          <a:lstStyle/>
+          <a:p>
+            <a:endParaRPr lang="en-US"/>
+          </a:p>
+        </p:txBody>
+      </p:sp>
+      <p:sp>
+        <p:nvSpPr>
+          <p:cNvPr id="15" name="Shape 13"/>
           <p:cNvSpPr/>
           <p:nvPr/>
         </p:nvSpPr>
@@ -9674,10 +10462,17 @@
             <a:prstDash val="solid"/>
           </a:ln>
         </p:spPr>
-      </p:sp>
-      <p:sp>
-        <p:nvSpPr>
-          <p:cNvPr id="15" name="Text 13"/>
+        <p:txBody>
+          <a:bodyPr/>
+          <a:lstStyle/>
+          <a:p>
+            <a:endParaRPr lang="en-US"/>
+          </a:p>
+        </p:txBody>
+      </p:sp>
+      <p:sp>
+        <p:nvSpPr>
+          <p:cNvPr id="16" name="Text 14"/>
           <p:cNvSpPr/>
           <p:nvPr/>
         </p:nvSpPr>
@@ -9696,7 +10491,7 @@
           <a:bodyPr wrap="square" lIns="0" tIns="0" rIns="0" bIns="0" rtlCol="0" anchor="ctr"/>
           <a:lstStyle/>
           <a:p>
-            <a:pPr algn="l" indent="0" marL="0">
+            <a:pPr marL="0" indent="0" algn="l">
               <a:buNone/>
             </a:pPr>
             <a:r>
@@ -9716,7 +10511,7 @@
       </p:sp>
       <p:sp>
         <p:nvSpPr>
-          <p:cNvPr id="16" name="Text 14"/>
+          <p:cNvPr id="17" name="Text 15"/>
           <p:cNvSpPr/>
           <p:nvPr/>
         </p:nvSpPr>
@@ -9735,7 +10530,7 @@
           <a:bodyPr wrap="square" lIns="0" tIns="0" rIns="0" bIns="0" rtlCol="0" anchor="ctr"/>
           <a:lstStyle/>
           <a:p>
-            <a:pPr algn="l" indent="0" marL="0">
+            <a:pPr marL="0" indent="0" algn="l">
               <a:buNone/>
             </a:pPr>
             <a:r>
@@ -9755,7 +10550,7 @@
       </p:sp>
       <p:sp>
         <p:nvSpPr>
-          <p:cNvPr id="17" name="Text 15"/>
+          <p:cNvPr id="18" name="Text 16"/>
           <p:cNvSpPr/>
           <p:nvPr/>
         </p:nvSpPr>
@@ -9774,7 +10569,7 @@
           <a:bodyPr wrap="square" lIns="0" tIns="0" rIns="0" bIns="0" rtlCol="0" anchor="ctr"/>
           <a:lstStyle/>
           <a:p>
-            <a:pPr algn="l" indent="0" marL="0">
+            <a:pPr marL="0" indent="0" algn="l">
               <a:buNone/>
             </a:pPr>
             <a:r>
@@ -9794,7 +10589,7 @@
       </p:sp>
       <p:sp>
         <p:nvSpPr>
-          <p:cNvPr id="18" name="Text 16"/>
+          <p:cNvPr id="19" name="Text 17"/>
           <p:cNvSpPr/>
           <p:nvPr/>
         </p:nvSpPr>
@@ -9813,7 +10608,7 @@
           <a:bodyPr wrap="square" lIns="0" tIns="0" rIns="0" bIns="0" rtlCol="0" anchor="ctr"/>
           <a:lstStyle/>
           <a:p>
-            <a:pPr algn="l" indent="0" marL="0">
+            <a:pPr marL="0" indent="0" algn="l">
               <a:buNone/>
             </a:pPr>
             <a:r>
@@ -9833,7 +10628,7 @@
       </p:sp>
       <p:sp>
         <p:nvSpPr>
-          <p:cNvPr id="19" name="Text 17"/>
+          <p:cNvPr id="20" name="Text 18"/>
           <p:cNvSpPr/>
           <p:nvPr/>
         </p:nvSpPr>
@@ -9852,7 +10647,7 @@
           <a:bodyPr wrap="square" lIns="0" tIns="0" rIns="0" bIns="0" rtlCol="0" anchor="ctr"/>
           <a:lstStyle/>
           <a:p>
-            <a:pPr algn="l" indent="0" marL="0">
+            <a:pPr marL="0" indent="0" algn="l">
               <a:buNone/>
             </a:pPr>
             <a:r>
@@ -9872,7 +10667,7 @@
       </p:sp>
       <p:sp>
         <p:nvSpPr>
-          <p:cNvPr id="20" name="Shape 18"/>
+          <p:cNvPr id="21" name="Shape 19"/>
           <p:cNvSpPr/>
           <p:nvPr/>
         </p:nvSpPr>
@@ -9894,17 +10689,24 @@
             <a:prstDash val="solid"/>
           </a:ln>
           <a:effectLst>
-            <a:outerShdw sx="100000" sy="100000" kx="0" ky="0" algn="bl" rotWithShape="0" blurRad="101600" dist="38100" dir="8100000">
+            <a:outerShdw blurRad="101600" dist="38100" dir="8100000" algn="bl" rotWithShape="0">
               <a:srgbClr val="000000">
                 <a:alpha val="10000"/>
               </a:srgbClr>
             </a:outerShdw>
           </a:effectLst>
         </p:spPr>
-      </p:sp>
-      <p:sp>
-        <p:nvSpPr>
-          <p:cNvPr id="21" name="Shape 19"/>
+        <p:txBody>
+          <a:bodyPr/>
+          <a:lstStyle/>
+          <a:p>
+            <a:endParaRPr lang="en-US"/>
+          </a:p>
+        </p:txBody>
+      </p:sp>
+      <p:sp>
+        <p:nvSpPr>
+          <p:cNvPr id="22" name="Shape 20"/>
           <p:cNvSpPr/>
           <p:nvPr/>
         </p:nvSpPr>
@@ -9926,10 +10728,17 @@
             <a:prstDash val="solid"/>
           </a:ln>
         </p:spPr>
-      </p:sp>
-      <p:sp>
-        <p:nvSpPr>
-          <p:cNvPr id="22" name="Text 20"/>
+        <p:txBody>
+          <a:bodyPr/>
+          <a:lstStyle/>
+          <a:p>
+            <a:endParaRPr lang="en-US"/>
+          </a:p>
+        </p:txBody>
+      </p:sp>
+      <p:sp>
+        <p:nvSpPr>
+          <p:cNvPr id="23" name="Text 21"/>
           <p:cNvSpPr/>
           <p:nvPr/>
         </p:nvSpPr>
@@ -9948,7 +10757,7 @@
           <a:bodyPr wrap="square" lIns="0" tIns="0" rIns="0" bIns="0" rtlCol="0" anchor="ctr"/>
           <a:lstStyle/>
           <a:p>
-            <a:pPr algn="l" indent="0" marL="0">
+            <a:pPr marL="0" indent="0" algn="l">
               <a:buNone/>
             </a:pPr>
             <a:r>
@@ -9968,7 +10777,7 @@
       </p:sp>
       <p:sp>
         <p:nvSpPr>
-          <p:cNvPr id="23" name="Text 21"/>
+          <p:cNvPr id="24" name="Text 22"/>
           <p:cNvSpPr/>
           <p:nvPr/>
         </p:nvSpPr>
@@ -9987,7 +10796,7 @@
           <a:bodyPr wrap="square" lIns="0" tIns="0" rIns="0" bIns="0" rtlCol="0" anchor="ctr"/>
           <a:lstStyle/>
           <a:p>
-            <a:pPr algn="l" indent="0" marL="0">
+            <a:pPr marL="0" indent="0" algn="l">
               <a:buNone/>
             </a:pPr>
             <a:r>
@@ -10007,7 +10816,7 @@
       </p:sp>
       <p:sp>
         <p:nvSpPr>
-          <p:cNvPr id="24" name="Text 22"/>
+          <p:cNvPr id="25" name="Text 23"/>
           <p:cNvSpPr/>
           <p:nvPr/>
         </p:nvSpPr>
@@ -10026,7 +10835,7 @@
           <a:bodyPr wrap="square" lIns="0" tIns="0" rIns="0" bIns="0" rtlCol="0" anchor="ctr"/>
           <a:lstStyle/>
           <a:p>
-            <a:pPr algn="l" indent="0" marL="0">
+            <a:pPr marL="0" indent="0" algn="l">
               <a:buNone/>
             </a:pPr>
             <a:r>
@@ -10046,7 +10855,7 @@
       </p:sp>
       <p:sp>
         <p:nvSpPr>
-          <p:cNvPr id="25" name="Text 23"/>
+          <p:cNvPr id="26" name="Text 24"/>
           <p:cNvSpPr/>
           <p:nvPr/>
         </p:nvSpPr>
@@ -10065,7 +10874,7 @@
           <a:bodyPr wrap="square" lIns="0" tIns="0" rIns="0" bIns="0" rtlCol="0" anchor="ctr"/>
           <a:lstStyle/>
           <a:p>
-            <a:pPr algn="l" indent="0" marL="0">
+            <a:pPr marL="0" indent="0" algn="l">
               <a:buNone/>
             </a:pPr>
             <a:r>
@@ -10085,7 +10894,7 @@
       </p:sp>
       <p:sp>
         <p:nvSpPr>
-          <p:cNvPr id="26" name="Text 24"/>
+          <p:cNvPr id="27" name="Text 25"/>
           <p:cNvSpPr/>
           <p:nvPr/>
         </p:nvSpPr>
@@ -10104,7 +10913,7 @@
           <a:bodyPr wrap="square" lIns="0" tIns="0" rIns="0" bIns="0" rtlCol="0" anchor="ctr"/>
           <a:lstStyle/>
           <a:p>
-            <a:pPr algn="l" indent="0" marL="0">
+            <a:pPr marL="0" indent="0" algn="l">
               <a:buNone/>
             </a:pPr>
             <a:r>
@@ -10124,7 +10933,7 @@
       </p:sp>
       <p:sp>
         <p:nvSpPr>
-          <p:cNvPr id="27" name="Shape 25"/>
+          <p:cNvPr id="28" name="Shape 26"/>
           <p:cNvSpPr/>
           <p:nvPr/>
         </p:nvSpPr>
@@ -10146,17 +10955,24 @@
             <a:prstDash val="solid"/>
           </a:ln>
           <a:effectLst>
-            <a:outerShdw sx="100000" sy="100000" kx="0" ky="0" algn="bl" rotWithShape="0" blurRad="101600" dist="38100" dir="8100000">
+            <a:outerShdw blurRad="101600" dist="38100" dir="8100000" algn="bl" rotWithShape="0">
               <a:srgbClr val="000000">
                 <a:alpha val="10000"/>
               </a:srgbClr>
             </a:outerShdw>
           </a:effectLst>
         </p:spPr>
-      </p:sp>
-      <p:sp>
-        <p:nvSpPr>
-          <p:cNvPr id="28" name="Shape 26"/>
+        <p:txBody>
+          <a:bodyPr/>
+          <a:lstStyle/>
+          <a:p>
+            <a:endParaRPr lang="en-US"/>
+          </a:p>
+        </p:txBody>
+      </p:sp>
+      <p:sp>
+        <p:nvSpPr>
+          <p:cNvPr id="29" name="Shape 27"/>
           <p:cNvSpPr/>
           <p:nvPr/>
         </p:nvSpPr>
@@ -10178,10 +10994,17 @@
             <a:prstDash val="solid"/>
           </a:ln>
         </p:spPr>
-      </p:sp>
-      <p:sp>
-        <p:nvSpPr>
-          <p:cNvPr id="29" name="Text 27"/>
+        <p:txBody>
+          <a:bodyPr/>
+          <a:lstStyle/>
+          <a:p>
+            <a:endParaRPr lang="en-US"/>
+          </a:p>
+        </p:txBody>
+      </p:sp>
+      <p:sp>
+        <p:nvSpPr>
+          <p:cNvPr id="30" name="Text 28"/>
           <p:cNvSpPr/>
           <p:nvPr/>
         </p:nvSpPr>
@@ -10200,7 +11023,7 @@
           <a:bodyPr wrap="square" lIns="0" tIns="0" rIns="0" bIns="0" rtlCol="0" anchor="ctr"/>
           <a:lstStyle/>
           <a:p>
-            <a:pPr algn="l" indent="0" marL="0">
+            <a:pPr marL="0" indent="0" algn="l">
               <a:buNone/>
             </a:pPr>
             <a:r>
@@ -10220,7 +11043,7 @@
       </p:sp>
       <p:sp>
         <p:nvSpPr>
-          <p:cNvPr id="30" name="Text 28"/>
+          <p:cNvPr id="31" name="Text 29"/>
           <p:cNvSpPr/>
           <p:nvPr/>
         </p:nvSpPr>
@@ -10239,7 +11062,7 @@
           <a:bodyPr wrap="square" lIns="0" tIns="0" rIns="0" bIns="0" rtlCol="0" anchor="ctr"/>
           <a:lstStyle/>
           <a:p>
-            <a:pPr algn="l" indent="0" marL="0">
+            <a:pPr marL="0" indent="0" algn="l">
               <a:buNone/>
             </a:pPr>
             <a:r>
@@ -10259,7 +11082,7 @@
       </p:sp>
       <p:sp>
         <p:nvSpPr>
-          <p:cNvPr id="31" name="Text 29"/>
+          <p:cNvPr id="32" name="Text 30"/>
           <p:cNvSpPr/>
           <p:nvPr/>
         </p:nvSpPr>
@@ -10278,7 +11101,7 @@
           <a:bodyPr wrap="square" lIns="0" tIns="0" rIns="0" bIns="0" rtlCol="0" anchor="ctr"/>
           <a:lstStyle/>
           <a:p>
-            <a:pPr algn="l" indent="0" marL="0">
+            <a:pPr marL="0" indent="0" algn="l">
               <a:buNone/>
             </a:pPr>
             <a:r>
@@ -10298,7 +11121,7 @@
       </p:sp>
       <p:sp>
         <p:nvSpPr>
-          <p:cNvPr id="32" name="Text 30"/>
+          <p:cNvPr id="33" name="Text 31"/>
           <p:cNvSpPr/>
           <p:nvPr/>
         </p:nvSpPr>
@@ -10317,7 +11140,7 @@
           <a:bodyPr wrap="square" lIns="0" tIns="0" rIns="0" bIns="0" rtlCol="0" anchor="ctr"/>
           <a:lstStyle/>
           <a:p>
-            <a:pPr algn="l" indent="0" marL="0">
+            <a:pPr marL="0" indent="0" algn="l">
               <a:buNone/>
             </a:pPr>
             <a:r>
@@ -10337,7 +11160,7 @@
       </p:sp>
       <p:sp>
         <p:nvSpPr>
-          <p:cNvPr id="33" name="Text 31"/>
+          <p:cNvPr id="34" name="Text 32"/>
           <p:cNvSpPr/>
           <p:nvPr/>
         </p:nvSpPr>
@@ -10356,7 +11179,7 @@
           <a:bodyPr wrap="square" lIns="0" tIns="0" rIns="0" bIns="0" rtlCol="0" anchor="ctr"/>
           <a:lstStyle/>
           <a:p>
-            <a:pPr algn="l" indent="0" marL="0">
+            <a:pPr marL="0" indent="0" algn="l">
               <a:buNone/>
             </a:pPr>
             <a:r>
@@ -10376,7 +11199,7 @@
       </p:sp>
       <p:sp>
         <p:nvSpPr>
-          <p:cNvPr id="34" name="Shape 32"/>
+          <p:cNvPr id="35" name="Shape 33"/>
           <p:cNvSpPr/>
           <p:nvPr/>
         </p:nvSpPr>
@@ -10398,17 +11221,24 @@
             <a:prstDash val="solid"/>
           </a:ln>
           <a:effectLst>
-            <a:outerShdw sx="100000" sy="100000" kx="0" ky="0" algn="bl" rotWithShape="0" blurRad="101600" dist="38100" dir="8100000">
+            <a:outerShdw blurRad="101600" dist="38100" dir="8100000" algn="bl" rotWithShape="0">
               <a:srgbClr val="000000">
                 <a:alpha val="10000"/>
               </a:srgbClr>
             </a:outerShdw>
           </a:effectLst>
         </p:spPr>
-      </p:sp>
-      <p:sp>
-        <p:nvSpPr>
-          <p:cNvPr id="35" name="Shape 33"/>
+        <p:txBody>
+          <a:bodyPr/>
+          <a:lstStyle/>
+          <a:p>
+            <a:endParaRPr lang="en-US"/>
+          </a:p>
+        </p:txBody>
+      </p:sp>
+      <p:sp>
+        <p:nvSpPr>
+          <p:cNvPr id="36" name="Shape 34"/>
           <p:cNvSpPr/>
           <p:nvPr/>
         </p:nvSpPr>
@@ -10430,10 +11260,17 @@
             <a:prstDash val="solid"/>
           </a:ln>
         </p:spPr>
-      </p:sp>
-      <p:sp>
-        <p:nvSpPr>
-          <p:cNvPr id="36" name="Text 34"/>
+        <p:txBody>
+          <a:bodyPr/>
+          <a:lstStyle/>
+          <a:p>
+            <a:endParaRPr lang="en-US"/>
+          </a:p>
+        </p:txBody>
+      </p:sp>
+      <p:sp>
+        <p:nvSpPr>
+          <p:cNvPr id="37" name="Text 35"/>
           <p:cNvSpPr/>
           <p:nvPr/>
         </p:nvSpPr>
@@ -10452,7 +11289,7 @@
           <a:bodyPr wrap="square" lIns="0" tIns="0" rIns="0" bIns="0" rtlCol="0" anchor="ctr"/>
           <a:lstStyle/>
           <a:p>
-            <a:pPr algn="l" indent="0" marL="0">
+            <a:pPr marL="0" indent="0" algn="l">
               <a:buNone/>
             </a:pPr>
             <a:r>
@@ -10472,7 +11309,7 @@
       </p:sp>
       <p:sp>
         <p:nvSpPr>
-          <p:cNvPr id="37" name="Text 35"/>
+          <p:cNvPr id="38" name="Text 36"/>
           <p:cNvSpPr/>
           <p:nvPr/>
         </p:nvSpPr>
@@ -10491,7 +11328,7 @@
           <a:bodyPr wrap="square" lIns="0" tIns="0" rIns="0" bIns="0" rtlCol="0" anchor="ctr"/>
           <a:lstStyle/>
           <a:p>
-            <a:pPr algn="l" indent="0" marL="0">
+            <a:pPr marL="0" indent="0" algn="l">
               <a:buNone/>
             </a:pPr>
             <a:r>
@@ -10511,7 +11348,7 @@
       </p:sp>
       <p:sp>
         <p:nvSpPr>
-          <p:cNvPr id="38" name="Text 36"/>
+          <p:cNvPr id="39" name="Text 37"/>
           <p:cNvSpPr/>
           <p:nvPr/>
         </p:nvSpPr>
@@ -10530,7 +11367,7 @@
           <a:bodyPr wrap="square" lIns="0" tIns="0" rIns="0" bIns="0" rtlCol="0" anchor="ctr"/>
           <a:lstStyle/>
           <a:p>
-            <a:pPr algn="l" indent="0" marL="0">
+            <a:pPr marL="0" indent="0" algn="l">
               <a:buNone/>
             </a:pPr>
             <a:r>
@@ -10550,7 +11387,7 @@
       </p:sp>
       <p:sp>
         <p:nvSpPr>
-          <p:cNvPr id="39" name="Text 37"/>
+          <p:cNvPr id="40" name="Text 38"/>
           <p:cNvSpPr/>
           <p:nvPr/>
         </p:nvSpPr>
@@ -10569,7 +11406,7 @@
           <a:bodyPr wrap="square" lIns="0" tIns="0" rIns="0" bIns="0" rtlCol="0" anchor="ctr"/>
           <a:lstStyle/>
           <a:p>
-            <a:pPr algn="l" indent="0" marL="0">
+            <a:pPr marL="0" indent="0" algn="l">
               <a:buNone/>
             </a:pPr>
             <a:r>
@@ -10589,7 +11426,7 @@
       </p:sp>
       <p:sp>
         <p:nvSpPr>
-          <p:cNvPr id="40" name="Text 38"/>
+          <p:cNvPr id="41" name="Text 39"/>
           <p:cNvSpPr/>
           <p:nvPr/>
         </p:nvSpPr>
@@ -10608,7 +11445,7 @@
           <a:bodyPr wrap="square" lIns="0" tIns="0" rIns="0" bIns="0" rtlCol="0" anchor="ctr"/>
           <a:lstStyle/>
           <a:p>
-            <a:pPr algn="l" indent="0" marL="0">
+            <a:pPr marL="0" indent="0" algn="l">
               <a:buNone/>
             </a:pPr>
             <a:r>
@@ -10628,7 +11465,7 @@
       </p:sp>
       <p:sp>
         <p:nvSpPr>
-          <p:cNvPr id="41" name="Shape 39"/>
+          <p:cNvPr id="42" name="Shape 40"/>
           <p:cNvSpPr/>
           <p:nvPr/>
         </p:nvSpPr>
@@ -10650,17 +11487,24 @@
             <a:prstDash val="solid"/>
           </a:ln>
           <a:effectLst>
-            <a:outerShdw sx="100000" sy="100000" kx="0" ky="0" algn="bl" rotWithShape="0" blurRad="101600" dist="38100" dir="8100000">
+            <a:outerShdw blurRad="101600" dist="38100" dir="8100000" algn="bl" rotWithShape="0">
               <a:srgbClr val="000000">
                 <a:alpha val="10000"/>
               </a:srgbClr>
             </a:outerShdw>
           </a:effectLst>
         </p:spPr>
-      </p:sp>
-      <p:sp>
-        <p:nvSpPr>
-          <p:cNvPr id="42" name="Shape 40"/>
+        <p:txBody>
+          <a:bodyPr/>
+          <a:lstStyle/>
+          <a:p>
+            <a:endParaRPr lang="en-US"/>
+          </a:p>
+        </p:txBody>
+      </p:sp>
+      <p:sp>
+        <p:nvSpPr>
+          <p:cNvPr id="43" name="Shape 41"/>
           <p:cNvSpPr/>
           <p:nvPr/>
         </p:nvSpPr>
@@ -10682,10 +11526,17 @@
             <a:prstDash val="solid"/>
           </a:ln>
         </p:spPr>
-      </p:sp>
-      <p:sp>
-        <p:nvSpPr>
-          <p:cNvPr id="43" name="Text 41"/>
+        <p:txBody>
+          <a:bodyPr/>
+          <a:lstStyle/>
+          <a:p>
+            <a:endParaRPr lang="en-US"/>
+          </a:p>
+        </p:txBody>
+      </p:sp>
+      <p:sp>
+        <p:nvSpPr>
+          <p:cNvPr id="44" name="Text 42"/>
           <p:cNvSpPr/>
           <p:nvPr/>
         </p:nvSpPr>
@@ -10704,7 +11555,7 @@
           <a:bodyPr wrap="square" lIns="0" tIns="0" rIns="0" bIns="0" rtlCol="0" anchor="ctr"/>
           <a:lstStyle/>
           <a:p>
-            <a:pPr algn="l" indent="0" marL="0">
+            <a:pPr marL="0" indent="0" algn="l">
               <a:buNone/>
             </a:pPr>
             <a:r>
@@ -10724,7 +11575,7 @@
       </p:sp>
       <p:sp>
         <p:nvSpPr>
-          <p:cNvPr id="44" name="Text 42"/>
+          <p:cNvPr id="45" name="Text 43"/>
           <p:cNvSpPr/>
           <p:nvPr/>
         </p:nvSpPr>
@@ -10743,7 +11594,7 @@
           <a:bodyPr wrap="square" lIns="0" tIns="0" rIns="0" bIns="0" rtlCol="0" anchor="ctr"/>
           <a:lstStyle/>
           <a:p>
-            <a:pPr algn="l" indent="0" marL="0">
+            <a:pPr marL="0" indent="0" algn="l">
               <a:buNone/>
             </a:pPr>
             <a:r>
@@ -10763,7 +11614,7 @@
       </p:sp>
       <p:sp>
         <p:nvSpPr>
-          <p:cNvPr id="45" name="Text 43"/>
+          <p:cNvPr id="46" name="Text 44"/>
           <p:cNvSpPr/>
           <p:nvPr/>
         </p:nvSpPr>
@@ -10782,7 +11633,7 @@
           <a:bodyPr wrap="square" lIns="0" tIns="0" rIns="0" bIns="0" rtlCol="0" anchor="ctr"/>
           <a:lstStyle/>
           <a:p>
-            <a:pPr algn="l" indent="0" marL="0">
+            <a:pPr marL="0" indent="0" algn="l">
               <a:buNone/>
             </a:pPr>
             <a:r>
@@ -10802,7 +11653,7 @@
       </p:sp>
       <p:sp>
         <p:nvSpPr>
-          <p:cNvPr id="46" name="Text 44"/>
+          <p:cNvPr id="47" name="Text 45"/>
           <p:cNvSpPr/>
           <p:nvPr/>
         </p:nvSpPr>
@@ -10821,7 +11672,7 @@
           <a:bodyPr wrap="square" lIns="0" tIns="0" rIns="0" bIns="0" rtlCol="0" anchor="ctr"/>
           <a:lstStyle/>
           <a:p>
-            <a:pPr algn="l" indent="0" marL="0">
+            <a:pPr marL="0" indent="0" algn="l">
               <a:buNone/>
             </a:pPr>
             <a:r>
@@ -10841,7 +11692,7 @@
       </p:sp>
       <p:sp>
         <p:nvSpPr>
-          <p:cNvPr id="47" name="Text 45"/>
+          <p:cNvPr id="48" name="Text 46"/>
           <p:cNvSpPr/>
           <p:nvPr/>
         </p:nvSpPr>
@@ -10860,7 +11711,7 @@
           <a:bodyPr wrap="square" lIns="0" tIns="0" rIns="0" bIns="0" rtlCol="0" anchor="ctr"/>
           <a:lstStyle/>
           <a:p>
-            <a:pPr algn="l" indent="0" marL="0">
+            <a:pPr marL="0" indent="0" algn="l">
               <a:buNone/>
             </a:pPr>
             <a:r>
@@ -10894,6 +11745,7 @@
         <a:solidFill>
           <a:srgbClr val="F4F7FF"/>
         </a:solidFill>
+        <a:effectLst/>
       </p:bgPr>
     </p:bg>
     <p:spTree>
@@ -10934,6 +11786,13 @@
             <a:prstDash val="solid"/>
           </a:ln>
         </p:spPr>
+        <p:txBody>
+          <a:bodyPr/>
+          <a:lstStyle/>
+          <a:p>
+            <a:endParaRPr lang="en-US"/>
+          </a:p>
+        </p:txBody>
       </p:sp>
       <p:sp>
         <p:nvSpPr>
@@ -10956,7 +11815,7 @@
           <a:bodyPr wrap="square" lIns="0" tIns="0" rIns="0" bIns="0" rtlCol="0" anchor="ctr"/>
           <a:lstStyle/>
           <a:p>
-            <a:pPr algn="r" indent="0" marL="0">
+            <a:pPr marL="0" indent="0" algn="r">
               <a:buNone/>
             </a:pPr>
             <a:r>
@@ -10974,6 +11833,45 @@
       <p:sp>
         <p:nvSpPr>
           <p:cNvPr id="4" name="Text 2"/>
+          <p:cNvSpPr/>
+          <p:nvPr/>
+        </p:nvSpPr>
+        <p:spPr>
+          <a:xfrm>
+            <a:off x="256032" y="4800600"/>
+            <a:ext cx="2011680" cy="228600"/>
+          </a:xfrm>
+          <a:prstGeom prst="rect">
+            <a:avLst/>
+          </a:prstGeom>
+          <a:noFill/>
+          <a:ln/>
+        </p:spPr>
+        <p:txBody>
+          <a:bodyPr wrap="square" lIns="0" tIns="0" rIns="0" bIns="0" rtlCol="0" anchor="ctr"/>
+          <a:lstStyle/>
+          <a:p>
+            <a:pPr marL="0" indent="0" algn="l">
+              <a:buNone/>
+            </a:pPr>
+            <a:r>
+              <a:rPr lang="en-US" sz="750" dirty="0">
+                <a:solidFill>
+                  <a:srgbClr val="C8D8EE"/>
+                </a:solidFill>
+                <a:latin typeface="Calibri" pitchFamily="34" charset="0"/>
+                <a:ea typeface="Calibri" pitchFamily="34" charset="-122"/>
+                <a:cs typeface="Calibri" pitchFamily="34" charset="-120"/>
+              </a:rPr>
+              <a:t>jueewo ventures</a:t>
+            </a:r>
+            <a:endParaRPr lang="en-US" sz="750" dirty="0"/>
+          </a:p>
+        </p:txBody>
+      </p:sp>
+      <p:sp>
+        <p:nvSpPr>
+          <p:cNvPr id="5" name="Text 3"/>
           <p:cNvSpPr/>
           <p:nvPr/>
         </p:nvSpPr>
@@ -10992,11 +11890,11 @@
           <a:bodyPr wrap="square" lIns="0" tIns="0" rIns="0" bIns="0" rtlCol="0" anchor="ctr"/>
           <a:lstStyle/>
           <a:p>
-            <a:pPr algn="l" indent="0" marL="0">
-              <a:buNone/>
-            </a:pPr>
-            <a:r>
-              <a:rPr lang="en-US" sz="900" b="1" spc="300" kern="0" dirty="0">
+            <a:pPr marL="0" indent="0" algn="l">
+              <a:buNone/>
+            </a:pPr>
+            <a:r>
+              <a:rPr lang="en-US" sz="900" b="1" kern="0" spc="300" dirty="0">
                 <a:solidFill>
                   <a:srgbClr val="3B8BF5"/>
                 </a:solidFill>
@@ -11012,7 +11910,7 @@
       </p:sp>
       <p:sp>
         <p:nvSpPr>
-          <p:cNvPr id="5" name="Text 3"/>
+          <p:cNvPr id="6" name="Text 4"/>
           <p:cNvSpPr/>
           <p:nvPr/>
         </p:nvSpPr>
@@ -11031,7 +11929,7 @@
           <a:bodyPr wrap="square" lIns="0" tIns="0" rIns="0" bIns="0" rtlCol="0" anchor="ctr"/>
           <a:lstStyle/>
           <a:p>
-            <a:pPr algn="l" indent="0" marL="0">
+            <a:pPr marL="0" indent="0" algn="l">
               <a:buNone/>
             </a:pPr>
             <a:r>
@@ -11051,7 +11949,7 @@
       </p:sp>
       <p:sp>
         <p:nvSpPr>
-          <p:cNvPr id="6" name="Shape 4"/>
+          <p:cNvPr id="7" name="Shape 5"/>
           <p:cNvSpPr/>
           <p:nvPr/>
         </p:nvSpPr>
@@ -11073,17 +11971,24 @@
             <a:prstDash val="solid"/>
           </a:ln>
           <a:effectLst>
-            <a:outerShdw sx="100000" sy="100000" kx="0" ky="0" algn="bl" rotWithShape="0" blurRad="101600" dist="38100" dir="8100000">
+            <a:outerShdw blurRad="101600" dist="38100" dir="8100000" algn="bl" rotWithShape="0">
               <a:srgbClr val="000000">
                 <a:alpha val="10000"/>
               </a:srgbClr>
             </a:outerShdw>
           </a:effectLst>
         </p:spPr>
-      </p:sp>
-      <p:sp>
-        <p:nvSpPr>
-          <p:cNvPr id="7" name="Shape 5"/>
+        <p:txBody>
+          <a:bodyPr/>
+          <a:lstStyle/>
+          <a:p>
+            <a:endParaRPr lang="en-US"/>
+          </a:p>
+        </p:txBody>
+      </p:sp>
+      <p:sp>
+        <p:nvSpPr>
+          <p:cNvPr id="8" name="Shape 6"/>
           <p:cNvSpPr/>
           <p:nvPr/>
         </p:nvSpPr>
@@ -11105,10 +12010,17 @@
             <a:prstDash val="solid"/>
           </a:ln>
         </p:spPr>
-      </p:sp>
-      <p:sp>
-        <p:nvSpPr>
-          <p:cNvPr id="8" name="Shape 6"/>
+        <p:txBody>
+          <a:bodyPr/>
+          <a:lstStyle/>
+          <a:p>
+            <a:endParaRPr lang="en-US"/>
+          </a:p>
+        </p:txBody>
+      </p:sp>
+      <p:sp>
+        <p:nvSpPr>
+          <p:cNvPr id="9" name="Shape 7"/>
           <p:cNvSpPr/>
           <p:nvPr/>
         </p:nvSpPr>
@@ -11130,10 +12042,17 @@
             <a:prstDash val="solid"/>
           </a:ln>
         </p:spPr>
-      </p:sp>
-      <p:sp>
-        <p:nvSpPr>
-          <p:cNvPr id="9" name="Text 7"/>
+        <p:txBody>
+          <a:bodyPr/>
+          <a:lstStyle/>
+          <a:p>
+            <a:endParaRPr lang="en-US"/>
+          </a:p>
+        </p:txBody>
+      </p:sp>
+      <p:sp>
+        <p:nvSpPr>
+          <p:cNvPr id="10" name="Text 8"/>
           <p:cNvSpPr/>
           <p:nvPr/>
         </p:nvSpPr>
@@ -11152,7 +12071,7 @@
           <a:bodyPr wrap="square" lIns="0" tIns="0" rIns="0" bIns="0" rtlCol="0" anchor="ctr"/>
           <a:lstStyle/>
           <a:p>
-            <a:pPr algn="ctr" indent="0" marL="0">
+            <a:pPr marL="0" indent="0" algn="ctr">
               <a:buNone/>
             </a:pPr>
             <a:r>
@@ -11172,7 +12091,7 @@
       </p:sp>
       <p:sp>
         <p:nvSpPr>
-          <p:cNvPr id="10" name="Text 8"/>
+          <p:cNvPr id="11" name="Text 9"/>
           <p:cNvSpPr/>
           <p:nvPr/>
         </p:nvSpPr>
@@ -11191,7 +12110,7 @@
           <a:bodyPr wrap="square" lIns="0" tIns="0" rIns="0" bIns="0" rtlCol="0" anchor="ctr"/>
           <a:lstStyle/>
           <a:p>
-            <a:pPr algn="l" indent="0" marL="0">
+            <a:pPr marL="0" indent="0" algn="l">
               <a:buNone/>
             </a:pPr>
             <a:r>
@@ -11211,7 +12130,7 @@
       </p:sp>
       <p:sp>
         <p:nvSpPr>
-          <p:cNvPr id="11" name="Text 9"/>
+          <p:cNvPr id="12" name="Text 10"/>
           <p:cNvSpPr/>
           <p:nvPr/>
         </p:nvSpPr>
@@ -11230,7 +12149,7 @@
           <a:bodyPr wrap="square" lIns="0" tIns="0" rIns="0" bIns="0" rtlCol="0" anchor="ctr"/>
           <a:lstStyle/>
           <a:p>
-            <a:pPr algn="l" indent="0" marL="0">
+            <a:pPr marL="0" indent="0" algn="l">
               <a:buNone/>
             </a:pPr>
             <a:r>
@@ -11250,7 +12169,7 @@
       </p:sp>
       <p:sp>
         <p:nvSpPr>
-          <p:cNvPr id="12" name="Shape 10"/>
+          <p:cNvPr id="13" name="Shape 11"/>
           <p:cNvSpPr/>
           <p:nvPr/>
         </p:nvSpPr>
@@ -11272,17 +12191,24 @@
             <a:prstDash val="solid"/>
           </a:ln>
           <a:effectLst>
-            <a:outerShdw sx="100000" sy="100000" kx="0" ky="0" algn="bl" rotWithShape="0" blurRad="101600" dist="38100" dir="8100000">
+            <a:outerShdw blurRad="101600" dist="38100" dir="8100000" algn="bl" rotWithShape="0">
               <a:srgbClr val="000000">
                 <a:alpha val="10000"/>
               </a:srgbClr>
             </a:outerShdw>
           </a:effectLst>
         </p:spPr>
-      </p:sp>
-      <p:sp>
-        <p:nvSpPr>
-          <p:cNvPr id="13" name="Shape 11"/>
+        <p:txBody>
+          <a:bodyPr/>
+          <a:lstStyle/>
+          <a:p>
+            <a:endParaRPr lang="en-US"/>
+          </a:p>
+        </p:txBody>
+      </p:sp>
+      <p:sp>
+        <p:nvSpPr>
+          <p:cNvPr id="14" name="Shape 12"/>
           <p:cNvSpPr/>
           <p:nvPr/>
         </p:nvSpPr>
@@ -11304,10 +12230,17 @@
             <a:prstDash val="solid"/>
           </a:ln>
         </p:spPr>
-      </p:sp>
-      <p:sp>
-        <p:nvSpPr>
-          <p:cNvPr id="14" name="Shape 12"/>
+        <p:txBody>
+          <a:bodyPr/>
+          <a:lstStyle/>
+          <a:p>
+            <a:endParaRPr lang="en-US"/>
+          </a:p>
+        </p:txBody>
+      </p:sp>
+      <p:sp>
+        <p:nvSpPr>
+          <p:cNvPr id="15" name="Shape 13"/>
           <p:cNvSpPr/>
           <p:nvPr/>
         </p:nvSpPr>
@@ -11329,10 +12262,17 @@
             <a:prstDash val="solid"/>
           </a:ln>
         </p:spPr>
-      </p:sp>
-      <p:sp>
-        <p:nvSpPr>
-          <p:cNvPr id="15" name="Text 13"/>
+        <p:txBody>
+          <a:bodyPr/>
+          <a:lstStyle/>
+          <a:p>
+            <a:endParaRPr lang="en-US"/>
+          </a:p>
+        </p:txBody>
+      </p:sp>
+      <p:sp>
+        <p:nvSpPr>
+          <p:cNvPr id="16" name="Text 14"/>
           <p:cNvSpPr/>
           <p:nvPr/>
         </p:nvSpPr>
@@ -11351,7 +12291,7 @@
           <a:bodyPr wrap="square" lIns="0" tIns="0" rIns="0" bIns="0" rtlCol="0" anchor="ctr"/>
           <a:lstStyle/>
           <a:p>
-            <a:pPr algn="ctr" indent="0" marL="0">
+            <a:pPr marL="0" indent="0" algn="ctr">
               <a:buNone/>
             </a:pPr>
             <a:r>
@@ -11371,7 +12311,7 @@
       </p:sp>
       <p:sp>
         <p:nvSpPr>
-          <p:cNvPr id="16" name="Text 14"/>
+          <p:cNvPr id="17" name="Text 15"/>
           <p:cNvSpPr/>
           <p:nvPr/>
         </p:nvSpPr>
@@ -11390,7 +12330,7 @@
           <a:bodyPr wrap="square" lIns="0" tIns="0" rIns="0" bIns="0" rtlCol="0" anchor="ctr"/>
           <a:lstStyle/>
           <a:p>
-            <a:pPr algn="l" indent="0" marL="0">
+            <a:pPr marL="0" indent="0" algn="l">
               <a:buNone/>
             </a:pPr>
             <a:r>
@@ -11410,7 +12350,7 @@
       </p:sp>
       <p:sp>
         <p:nvSpPr>
-          <p:cNvPr id="17" name="Text 15"/>
+          <p:cNvPr id="18" name="Text 16"/>
           <p:cNvSpPr/>
           <p:nvPr/>
         </p:nvSpPr>
@@ -11429,7 +12369,7 @@
           <a:bodyPr wrap="square" lIns="0" tIns="0" rIns="0" bIns="0" rtlCol="0" anchor="ctr"/>
           <a:lstStyle/>
           <a:p>
-            <a:pPr algn="l" indent="0" marL="0">
+            <a:pPr marL="0" indent="0" algn="l">
               <a:buNone/>
             </a:pPr>
             <a:r>
@@ -11449,7 +12389,7 @@
       </p:sp>
       <p:sp>
         <p:nvSpPr>
-          <p:cNvPr id="18" name="Shape 16"/>
+          <p:cNvPr id="19" name="Shape 17"/>
           <p:cNvSpPr/>
           <p:nvPr/>
         </p:nvSpPr>
@@ -11471,17 +12411,24 @@
             <a:prstDash val="solid"/>
           </a:ln>
           <a:effectLst>
-            <a:outerShdw sx="100000" sy="100000" kx="0" ky="0" algn="bl" rotWithShape="0" blurRad="101600" dist="38100" dir="8100000">
+            <a:outerShdw blurRad="101600" dist="38100" dir="8100000" algn="bl" rotWithShape="0">
               <a:srgbClr val="000000">
                 <a:alpha val="10000"/>
               </a:srgbClr>
             </a:outerShdw>
           </a:effectLst>
         </p:spPr>
-      </p:sp>
-      <p:sp>
-        <p:nvSpPr>
-          <p:cNvPr id="19" name="Shape 17"/>
+        <p:txBody>
+          <a:bodyPr/>
+          <a:lstStyle/>
+          <a:p>
+            <a:endParaRPr lang="en-US"/>
+          </a:p>
+        </p:txBody>
+      </p:sp>
+      <p:sp>
+        <p:nvSpPr>
+          <p:cNvPr id="20" name="Shape 18"/>
           <p:cNvSpPr/>
           <p:nvPr/>
         </p:nvSpPr>
@@ -11503,10 +12450,17 @@
             <a:prstDash val="solid"/>
           </a:ln>
         </p:spPr>
-      </p:sp>
-      <p:sp>
-        <p:nvSpPr>
-          <p:cNvPr id="20" name="Shape 18"/>
+        <p:txBody>
+          <a:bodyPr/>
+          <a:lstStyle/>
+          <a:p>
+            <a:endParaRPr lang="en-US"/>
+          </a:p>
+        </p:txBody>
+      </p:sp>
+      <p:sp>
+        <p:nvSpPr>
+          <p:cNvPr id="21" name="Shape 19"/>
           <p:cNvSpPr/>
           <p:nvPr/>
         </p:nvSpPr>
@@ -11528,10 +12482,17 @@
             <a:prstDash val="solid"/>
           </a:ln>
         </p:spPr>
-      </p:sp>
-      <p:sp>
-        <p:nvSpPr>
-          <p:cNvPr id="21" name="Text 19"/>
+        <p:txBody>
+          <a:bodyPr/>
+          <a:lstStyle/>
+          <a:p>
+            <a:endParaRPr lang="en-US"/>
+          </a:p>
+        </p:txBody>
+      </p:sp>
+      <p:sp>
+        <p:nvSpPr>
+          <p:cNvPr id="22" name="Text 20"/>
           <p:cNvSpPr/>
           <p:nvPr/>
         </p:nvSpPr>
@@ -11550,7 +12511,7 @@
           <a:bodyPr wrap="square" lIns="0" tIns="0" rIns="0" bIns="0" rtlCol="0" anchor="ctr"/>
           <a:lstStyle/>
           <a:p>
-            <a:pPr algn="ctr" indent="0" marL="0">
+            <a:pPr marL="0" indent="0" algn="ctr">
               <a:buNone/>
             </a:pPr>
             <a:r>
@@ -11570,7 +12531,7 @@
       </p:sp>
       <p:sp>
         <p:nvSpPr>
-          <p:cNvPr id="22" name="Text 20"/>
+          <p:cNvPr id="23" name="Text 21"/>
           <p:cNvSpPr/>
           <p:nvPr/>
         </p:nvSpPr>
@@ -11589,7 +12550,7 @@
           <a:bodyPr wrap="square" lIns="0" tIns="0" rIns="0" bIns="0" rtlCol="0" anchor="ctr"/>
           <a:lstStyle/>
           <a:p>
-            <a:pPr algn="l" indent="0" marL="0">
+            <a:pPr marL="0" indent="0" algn="l">
               <a:buNone/>
             </a:pPr>
             <a:r>
@@ -11609,7 +12570,7 @@
       </p:sp>
       <p:sp>
         <p:nvSpPr>
-          <p:cNvPr id="23" name="Text 21"/>
+          <p:cNvPr id="24" name="Text 22"/>
           <p:cNvSpPr/>
           <p:nvPr/>
         </p:nvSpPr>
@@ -11628,7 +12589,7 @@
           <a:bodyPr wrap="square" lIns="0" tIns="0" rIns="0" bIns="0" rtlCol="0" anchor="ctr"/>
           <a:lstStyle/>
           <a:p>
-            <a:pPr algn="l" indent="0" marL="0">
+            <a:pPr marL="0" indent="0" algn="l">
               <a:buNone/>
             </a:pPr>
             <a:r>
@@ -11648,7 +12609,7 @@
       </p:sp>
       <p:sp>
         <p:nvSpPr>
-          <p:cNvPr id="24" name="Shape 22"/>
+          <p:cNvPr id="25" name="Shape 23"/>
           <p:cNvSpPr/>
           <p:nvPr/>
         </p:nvSpPr>
@@ -11670,17 +12631,24 @@
             <a:prstDash val="solid"/>
           </a:ln>
           <a:effectLst>
-            <a:outerShdw sx="100000" sy="100000" kx="0" ky="0" algn="bl" rotWithShape="0" blurRad="101600" dist="38100" dir="8100000">
+            <a:outerShdw blurRad="101600" dist="38100" dir="8100000" algn="bl" rotWithShape="0">
               <a:srgbClr val="000000">
                 <a:alpha val="10000"/>
               </a:srgbClr>
             </a:outerShdw>
           </a:effectLst>
         </p:spPr>
-      </p:sp>
-      <p:sp>
-        <p:nvSpPr>
-          <p:cNvPr id="25" name="Shape 23"/>
+        <p:txBody>
+          <a:bodyPr/>
+          <a:lstStyle/>
+          <a:p>
+            <a:endParaRPr lang="en-US"/>
+          </a:p>
+        </p:txBody>
+      </p:sp>
+      <p:sp>
+        <p:nvSpPr>
+          <p:cNvPr id="26" name="Shape 24"/>
           <p:cNvSpPr/>
           <p:nvPr/>
         </p:nvSpPr>
@@ -11702,10 +12670,17 @@
             <a:prstDash val="solid"/>
           </a:ln>
         </p:spPr>
-      </p:sp>
-      <p:sp>
-        <p:nvSpPr>
-          <p:cNvPr id="26" name="Shape 24"/>
+        <p:txBody>
+          <a:bodyPr/>
+          <a:lstStyle/>
+          <a:p>
+            <a:endParaRPr lang="en-US"/>
+          </a:p>
+        </p:txBody>
+      </p:sp>
+      <p:sp>
+        <p:nvSpPr>
+          <p:cNvPr id="27" name="Shape 25"/>
           <p:cNvSpPr/>
           <p:nvPr/>
         </p:nvSpPr>
@@ -11727,10 +12702,17 @@
             <a:prstDash val="solid"/>
           </a:ln>
         </p:spPr>
-      </p:sp>
-      <p:sp>
-        <p:nvSpPr>
-          <p:cNvPr id="27" name="Text 25"/>
+        <p:txBody>
+          <a:bodyPr/>
+          <a:lstStyle/>
+          <a:p>
+            <a:endParaRPr lang="en-US"/>
+          </a:p>
+        </p:txBody>
+      </p:sp>
+      <p:sp>
+        <p:nvSpPr>
+          <p:cNvPr id="28" name="Text 26"/>
           <p:cNvSpPr/>
           <p:nvPr/>
         </p:nvSpPr>
@@ -11749,7 +12731,7 @@
           <a:bodyPr wrap="square" lIns="0" tIns="0" rIns="0" bIns="0" rtlCol="0" anchor="ctr"/>
           <a:lstStyle/>
           <a:p>
-            <a:pPr algn="ctr" indent="0" marL="0">
+            <a:pPr marL="0" indent="0" algn="ctr">
               <a:buNone/>
             </a:pPr>
             <a:r>
@@ -11769,7 +12751,7 @@
       </p:sp>
       <p:sp>
         <p:nvSpPr>
-          <p:cNvPr id="28" name="Text 26"/>
+          <p:cNvPr id="29" name="Text 27"/>
           <p:cNvSpPr/>
           <p:nvPr/>
         </p:nvSpPr>
@@ -11788,7 +12770,7 @@
           <a:bodyPr wrap="square" lIns="0" tIns="0" rIns="0" bIns="0" rtlCol="0" anchor="ctr"/>
           <a:lstStyle/>
           <a:p>
-            <a:pPr algn="l" indent="0" marL="0">
+            <a:pPr marL="0" indent="0" algn="l">
               <a:buNone/>
             </a:pPr>
             <a:r>
@@ -11808,7 +12790,7 @@
       </p:sp>
       <p:sp>
         <p:nvSpPr>
-          <p:cNvPr id="29" name="Text 27"/>
+          <p:cNvPr id="30" name="Text 28"/>
           <p:cNvSpPr/>
           <p:nvPr/>
         </p:nvSpPr>
@@ -11827,7 +12809,7 @@
           <a:bodyPr wrap="square" lIns="0" tIns="0" rIns="0" bIns="0" rtlCol="0" anchor="ctr"/>
           <a:lstStyle/>
           <a:p>
-            <a:pPr algn="l" indent="0" marL="0">
+            <a:pPr marL="0" indent="0" algn="l">
               <a:buNone/>
             </a:pPr>
             <a:r>
@@ -11847,7 +12829,7 @@
       </p:sp>
       <p:sp>
         <p:nvSpPr>
-          <p:cNvPr id="30" name="Shape 28"/>
+          <p:cNvPr id="31" name="Shape 29"/>
           <p:cNvSpPr/>
           <p:nvPr/>
         </p:nvSpPr>
@@ -11869,17 +12851,24 @@
             <a:prstDash val="solid"/>
           </a:ln>
           <a:effectLst>
-            <a:outerShdw sx="100000" sy="100000" kx="0" ky="0" algn="bl" rotWithShape="0" blurRad="101600" dist="38100" dir="8100000">
+            <a:outerShdw blurRad="101600" dist="38100" dir="8100000" algn="bl" rotWithShape="0">
               <a:srgbClr val="000000">
                 <a:alpha val="10000"/>
               </a:srgbClr>
             </a:outerShdw>
           </a:effectLst>
         </p:spPr>
-      </p:sp>
-      <p:sp>
-        <p:nvSpPr>
-          <p:cNvPr id="31" name="Shape 29"/>
+        <p:txBody>
+          <a:bodyPr/>
+          <a:lstStyle/>
+          <a:p>
+            <a:endParaRPr lang="en-US"/>
+          </a:p>
+        </p:txBody>
+      </p:sp>
+      <p:sp>
+        <p:nvSpPr>
+          <p:cNvPr id="32" name="Shape 30"/>
           <p:cNvSpPr/>
           <p:nvPr/>
         </p:nvSpPr>
@@ -11901,10 +12890,17 @@
             <a:prstDash val="solid"/>
           </a:ln>
         </p:spPr>
-      </p:sp>
-      <p:sp>
-        <p:nvSpPr>
-          <p:cNvPr id="32" name="Shape 30"/>
+        <p:txBody>
+          <a:bodyPr/>
+          <a:lstStyle/>
+          <a:p>
+            <a:endParaRPr lang="en-US"/>
+          </a:p>
+        </p:txBody>
+      </p:sp>
+      <p:sp>
+        <p:nvSpPr>
+          <p:cNvPr id="33" name="Shape 31"/>
           <p:cNvSpPr/>
           <p:nvPr/>
         </p:nvSpPr>
@@ -11926,10 +12922,17 @@
             <a:prstDash val="solid"/>
           </a:ln>
         </p:spPr>
-      </p:sp>
-      <p:sp>
-        <p:nvSpPr>
-          <p:cNvPr id="33" name="Text 31"/>
+        <p:txBody>
+          <a:bodyPr/>
+          <a:lstStyle/>
+          <a:p>
+            <a:endParaRPr lang="en-US"/>
+          </a:p>
+        </p:txBody>
+      </p:sp>
+      <p:sp>
+        <p:nvSpPr>
+          <p:cNvPr id="34" name="Text 32"/>
           <p:cNvSpPr/>
           <p:nvPr/>
         </p:nvSpPr>
@@ -11948,7 +12951,7 @@
           <a:bodyPr wrap="square" lIns="0" tIns="0" rIns="0" bIns="0" rtlCol="0" anchor="ctr"/>
           <a:lstStyle/>
           <a:p>
-            <a:pPr algn="ctr" indent="0" marL="0">
+            <a:pPr marL="0" indent="0" algn="ctr">
               <a:buNone/>
             </a:pPr>
             <a:r>
@@ -11968,7 +12971,7 @@
       </p:sp>
       <p:sp>
         <p:nvSpPr>
-          <p:cNvPr id="34" name="Text 32"/>
+          <p:cNvPr id="35" name="Text 33"/>
           <p:cNvSpPr/>
           <p:nvPr/>
         </p:nvSpPr>
@@ -11987,7 +12990,7 @@
           <a:bodyPr wrap="square" lIns="0" tIns="0" rIns="0" bIns="0" rtlCol="0" anchor="ctr"/>
           <a:lstStyle/>
           <a:p>
-            <a:pPr algn="l" indent="0" marL="0">
+            <a:pPr marL="0" indent="0" algn="l">
               <a:buNone/>
             </a:pPr>
             <a:r>
@@ -12007,7 +13010,7 @@
       </p:sp>
       <p:sp>
         <p:nvSpPr>
-          <p:cNvPr id="35" name="Text 33"/>
+          <p:cNvPr id="36" name="Text 34"/>
           <p:cNvSpPr/>
           <p:nvPr/>
         </p:nvSpPr>
@@ -12026,7 +13029,7 @@
           <a:bodyPr wrap="square" lIns="0" tIns="0" rIns="0" bIns="0" rtlCol="0" anchor="ctr"/>
           <a:lstStyle/>
           <a:p>
-            <a:pPr algn="l" indent="0" marL="0">
+            <a:pPr marL="0" indent="0" algn="l">
               <a:buNone/>
             </a:pPr>
             <a:r>
@@ -12046,7 +13049,7 @@
       </p:sp>
       <p:sp>
         <p:nvSpPr>
-          <p:cNvPr id="36" name="Shape 34"/>
+          <p:cNvPr id="37" name="Shape 35"/>
           <p:cNvSpPr/>
           <p:nvPr/>
         </p:nvSpPr>
@@ -12068,17 +13071,24 @@
             <a:prstDash val="solid"/>
           </a:ln>
           <a:effectLst>
-            <a:outerShdw sx="100000" sy="100000" kx="0" ky="0" algn="bl" rotWithShape="0" blurRad="101600" dist="38100" dir="8100000">
+            <a:outerShdw blurRad="101600" dist="38100" dir="8100000" algn="bl" rotWithShape="0">
               <a:srgbClr val="000000">
                 <a:alpha val="10000"/>
               </a:srgbClr>
             </a:outerShdw>
           </a:effectLst>
         </p:spPr>
-      </p:sp>
-      <p:sp>
-        <p:nvSpPr>
-          <p:cNvPr id="37" name="Shape 35"/>
+        <p:txBody>
+          <a:bodyPr/>
+          <a:lstStyle/>
+          <a:p>
+            <a:endParaRPr lang="en-US"/>
+          </a:p>
+        </p:txBody>
+      </p:sp>
+      <p:sp>
+        <p:nvSpPr>
+          <p:cNvPr id="38" name="Shape 36"/>
           <p:cNvSpPr/>
           <p:nvPr/>
         </p:nvSpPr>
@@ -12100,10 +13110,17 @@
             <a:prstDash val="solid"/>
           </a:ln>
         </p:spPr>
-      </p:sp>
-      <p:sp>
-        <p:nvSpPr>
-          <p:cNvPr id="38" name="Shape 36"/>
+        <p:txBody>
+          <a:bodyPr/>
+          <a:lstStyle/>
+          <a:p>
+            <a:endParaRPr lang="en-US"/>
+          </a:p>
+        </p:txBody>
+      </p:sp>
+      <p:sp>
+        <p:nvSpPr>
+          <p:cNvPr id="39" name="Shape 37"/>
           <p:cNvSpPr/>
           <p:nvPr/>
         </p:nvSpPr>
@@ -12125,10 +13142,17 @@
             <a:prstDash val="solid"/>
           </a:ln>
         </p:spPr>
-      </p:sp>
-      <p:sp>
-        <p:nvSpPr>
-          <p:cNvPr id="39" name="Text 37"/>
+        <p:txBody>
+          <a:bodyPr/>
+          <a:lstStyle/>
+          <a:p>
+            <a:endParaRPr lang="en-US"/>
+          </a:p>
+        </p:txBody>
+      </p:sp>
+      <p:sp>
+        <p:nvSpPr>
+          <p:cNvPr id="40" name="Text 38"/>
           <p:cNvSpPr/>
           <p:nvPr/>
         </p:nvSpPr>
@@ -12147,7 +13171,7 @@
           <a:bodyPr wrap="square" lIns="0" tIns="0" rIns="0" bIns="0" rtlCol="0" anchor="ctr"/>
           <a:lstStyle/>
           <a:p>
-            <a:pPr algn="ctr" indent="0" marL="0">
+            <a:pPr marL="0" indent="0" algn="ctr">
               <a:buNone/>
             </a:pPr>
             <a:r>
@@ -12167,7 +13191,7 @@
       </p:sp>
       <p:sp>
         <p:nvSpPr>
-          <p:cNvPr id="40" name="Text 38"/>
+          <p:cNvPr id="41" name="Text 39"/>
           <p:cNvSpPr/>
           <p:nvPr/>
         </p:nvSpPr>
@@ -12186,7 +13210,7 @@
           <a:bodyPr wrap="square" lIns="0" tIns="0" rIns="0" bIns="0" rtlCol="0" anchor="ctr"/>
           <a:lstStyle/>
           <a:p>
-            <a:pPr algn="l" indent="0" marL="0">
+            <a:pPr marL="0" indent="0" algn="l">
               <a:buNone/>
             </a:pPr>
             <a:r>
@@ -12206,7 +13230,7 @@
       </p:sp>
       <p:sp>
         <p:nvSpPr>
-          <p:cNvPr id="41" name="Text 39"/>
+          <p:cNvPr id="42" name="Text 40"/>
           <p:cNvSpPr/>
           <p:nvPr/>
         </p:nvSpPr>
@@ -12225,7 +13249,7 @@
           <a:bodyPr wrap="square" lIns="0" tIns="0" rIns="0" bIns="0" rtlCol="0" anchor="ctr"/>
           <a:lstStyle/>
           <a:p>
-            <a:pPr algn="l" indent="0" marL="0">
+            <a:pPr marL="0" indent="0" algn="l">
               <a:buNone/>
             </a:pPr>
             <a:r>
@@ -12259,6 +13283,7 @@
         <a:solidFill>
           <a:srgbClr val="0D1B3E"/>
         </a:solidFill>
+        <a:effectLst/>
       </p:bgPr>
     </p:bg>
     <p:spTree>
@@ -12283,7 +13308,7 @@
         </p:nvSpPr>
         <p:spPr>
           <a:xfrm>
-            <a:off x="8046720" y="4754880"/>
+            <a:off x="8046720" y="4133088"/>
             <a:ext cx="914400" cy="274320"/>
           </a:xfrm>
           <a:prstGeom prst="rect">
@@ -12296,7 +13321,7 @@
           <a:bodyPr wrap="square" lIns="0" tIns="0" rIns="0" bIns="0" rtlCol="0" anchor="ctr"/>
           <a:lstStyle/>
           <a:p>
-            <a:pPr algn="r" indent="0" marL="0">
+            <a:pPr marL="0" indent="0" algn="r">
               <a:buNone/>
             </a:pPr>
             <a:r>
@@ -12313,7 +13338,46 @@
       </p:sp>
       <p:sp>
         <p:nvSpPr>
-          <p:cNvPr id="3" name="Shape 1"/>
+          <p:cNvPr id="3" name="Text 1"/>
+          <p:cNvSpPr/>
+          <p:nvPr/>
+        </p:nvSpPr>
+        <p:spPr>
+          <a:xfrm>
+            <a:off x="256032" y="4800600"/>
+            <a:ext cx="2011680" cy="228600"/>
+          </a:xfrm>
+          <a:prstGeom prst="rect">
+            <a:avLst/>
+          </a:prstGeom>
+          <a:noFill/>
+          <a:ln/>
+        </p:spPr>
+        <p:txBody>
+          <a:bodyPr wrap="square" lIns="0" tIns="0" rIns="0" bIns="0" rtlCol="0" anchor="ctr"/>
+          <a:lstStyle/>
+          <a:p>
+            <a:pPr marL="0" indent="0" algn="l">
+              <a:buNone/>
+            </a:pPr>
+            <a:r>
+              <a:rPr lang="en-US" sz="750" dirty="0">
+                <a:solidFill>
+                  <a:srgbClr val="2A4070"/>
+                </a:solidFill>
+                <a:latin typeface="Calibri" pitchFamily="34" charset="0"/>
+                <a:ea typeface="Calibri" pitchFamily="34" charset="-122"/>
+                <a:cs typeface="Calibri" pitchFamily="34" charset="-120"/>
+              </a:rPr>
+              <a:t>jueewo ventures</a:t>
+            </a:r>
+            <a:endParaRPr lang="en-US" sz="750" dirty="0"/>
+          </a:p>
+        </p:txBody>
+      </p:sp>
+      <p:sp>
+        <p:nvSpPr>
+          <p:cNvPr id="4" name="Shape 2"/>
           <p:cNvSpPr/>
           <p:nvPr/>
         </p:nvSpPr>
@@ -12335,10 +13399,17 @@
             <a:prstDash val="solid"/>
           </a:ln>
         </p:spPr>
-      </p:sp>
-      <p:sp>
-        <p:nvSpPr>
-          <p:cNvPr id="4" name="Text 2"/>
+        <p:txBody>
+          <a:bodyPr/>
+          <a:lstStyle/>
+          <a:p>
+            <a:endParaRPr lang="en-US"/>
+          </a:p>
+        </p:txBody>
+      </p:sp>
+      <p:sp>
+        <p:nvSpPr>
+          <p:cNvPr id="5" name="Text 3"/>
           <p:cNvSpPr/>
           <p:nvPr/>
         </p:nvSpPr>
@@ -12357,11 +13428,11 @@
           <a:bodyPr wrap="square" lIns="0" tIns="0" rIns="0" bIns="0" rtlCol="0" anchor="ctr"/>
           <a:lstStyle/>
           <a:p>
-            <a:pPr algn="l" indent="0" marL="0">
-              <a:buNone/>
-            </a:pPr>
-            <a:r>
-              <a:rPr lang="en-US" sz="900" b="1" spc="300" kern="0" dirty="0">
+            <a:pPr marL="0" indent="0" algn="l">
+              <a:buNone/>
+            </a:pPr>
+            <a:r>
+              <a:rPr lang="en-US" sz="900" b="1" kern="0" spc="300" dirty="0">
                 <a:solidFill>
                   <a:srgbClr val="A8C8FA"/>
                 </a:solidFill>
@@ -12377,7 +13448,7 @@
       </p:sp>
       <p:sp>
         <p:nvSpPr>
-          <p:cNvPr id="5" name="Text 3"/>
+          <p:cNvPr id="6" name="Text 4"/>
           <p:cNvSpPr/>
           <p:nvPr/>
         </p:nvSpPr>
@@ -12396,7 +13467,7 @@
           <a:bodyPr wrap="square" lIns="0" tIns="0" rIns="0" bIns="0" rtlCol="0" anchor="ctr"/>
           <a:lstStyle/>
           <a:p>
-            <a:pPr algn="l" indent="0" marL="0">
+            <a:pPr marL="0" indent="0" algn="l">
               <a:buNone/>
             </a:pPr>
             <a:r>
@@ -12413,7 +13484,7 @@
             <a:endParaRPr lang="en-US" sz="3000" dirty="0"/>
           </a:p>
           <a:p>
-            <a:pPr algn="l" indent="0" marL="0">
+            <a:pPr marL="0" indent="0" algn="l">
               <a:buNone/>
             </a:pPr>
             <a:r>
@@ -12433,7 +13504,7 @@
       </p:sp>
       <p:sp>
         <p:nvSpPr>
-          <p:cNvPr id="6" name="Text 4"/>
+          <p:cNvPr id="7" name="Text 5"/>
           <p:cNvSpPr/>
           <p:nvPr/>
         </p:nvSpPr>
@@ -12452,7 +13523,7 @@
           <a:bodyPr wrap="square" lIns="0" tIns="0" rIns="0" bIns="0" rtlCol="0" anchor="ctr"/>
           <a:lstStyle/>
           <a:p>
-            <a:pPr algn="l" indent="0" marL="0">
+            <a:pPr marL="0" indent="0" algn="l">
               <a:buNone/>
             </a:pPr>
             <a:r>
@@ -12472,7 +13543,7 @@
       </p:sp>
       <p:sp>
         <p:nvSpPr>
-          <p:cNvPr id="7" name="Shape 5"/>
+          <p:cNvPr id="8" name="Shape 6"/>
           <p:cNvSpPr/>
           <p:nvPr/>
         </p:nvSpPr>
@@ -12494,17 +13565,24 @@
             <a:prstDash val="solid"/>
           </a:ln>
           <a:effectLst>
-            <a:outerShdw sx="100000" sy="100000" kx="0" ky="0" algn="bl" rotWithShape="0" blurRad="101600" dist="38100" dir="8100000">
+            <a:outerShdw blurRad="101600" dist="38100" dir="8100000" algn="bl" rotWithShape="0">
               <a:srgbClr val="000000">
                 <a:alpha val="10000"/>
               </a:srgbClr>
             </a:outerShdw>
           </a:effectLst>
         </p:spPr>
-      </p:sp>
-      <p:sp>
-        <p:nvSpPr>
-          <p:cNvPr id="8" name="Shape 6"/>
+        <p:txBody>
+          <a:bodyPr/>
+          <a:lstStyle/>
+          <a:p>
+            <a:endParaRPr lang="en-US"/>
+          </a:p>
+        </p:txBody>
+      </p:sp>
+      <p:sp>
+        <p:nvSpPr>
+          <p:cNvPr id="9" name="Shape 7"/>
           <p:cNvSpPr/>
           <p:nvPr/>
         </p:nvSpPr>
@@ -12526,10 +13604,17 @@
             <a:prstDash val="solid"/>
           </a:ln>
         </p:spPr>
-      </p:sp>
-      <p:sp>
-        <p:nvSpPr>
-          <p:cNvPr id="9" name="Shape 7"/>
+        <p:txBody>
+          <a:bodyPr/>
+          <a:lstStyle/>
+          <a:p>
+            <a:endParaRPr lang="en-US"/>
+          </a:p>
+        </p:txBody>
+      </p:sp>
+      <p:sp>
+        <p:nvSpPr>
+          <p:cNvPr id="10" name="Shape 8"/>
           <p:cNvSpPr/>
           <p:nvPr/>
         </p:nvSpPr>
@@ -12551,10 +13636,17 @@
             <a:prstDash val="solid"/>
           </a:ln>
         </p:spPr>
-      </p:sp>
-      <p:sp>
-        <p:nvSpPr>
-          <p:cNvPr id="10" name="Text 8"/>
+        <p:txBody>
+          <a:bodyPr/>
+          <a:lstStyle/>
+          <a:p>
+            <a:endParaRPr lang="en-US"/>
+          </a:p>
+        </p:txBody>
+      </p:sp>
+      <p:sp>
+        <p:nvSpPr>
+          <p:cNvPr id="11" name="Text 9"/>
           <p:cNvSpPr/>
           <p:nvPr/>
         </p:nvSpPr>
@@ -12573,7 +13665,7 @@
           <a:bodyPr wrap="square" lIns="0" tIns="0" rIns="0" bIns="0" rtlCol="0" anchor="ctr"/>
           <a:lstStyle/>
           <a:p>
-            <a:pPr algn="ctr" indent="0" marL="0">
+            <a:pPr marL="0" indent="0" algn="ctr">
               <a:buNone/>
             </a:pPr>
             <a:r>
@@ -12593,7 +13685,7 @@
       </p:sp>
       <p:sp>
         <p:nvSpPr>
-          <p:cNvPr id="11" name="Text 9"/>
+          <p:cNvPr id="12" name="Text 10"/>
           <p:cNvSpPr/>
           <p:nvPr/>
         </p:nvSpPr>
@@ -12612,7 +13704,7 @@
           <a:bodyPr wrap="square" lIns="0" tIns="0" rIns="0" bIns="0" rtlCol="0" anchor="ctr"/>
           <a:lstStyle/>
           <a:p>
-            <a:pPr algn="l" indent="0" marL="0">
+            <a:pPr marL="0" indent="0" algn="l">
               <a:buNone/>
             </a:pPr>
             <a:r>
@@ -12632,7 +13724,7 @@
       </p:sp>
       <p:sp>
         <p:nvSpPr>
-          <p:cNvPr id="12" name="Text 10"/>
+          <p:cNvPr id="13" name="Text 11"/>
           <p:cNvSpPr/>
           <p:nvPr/>
         </p:nvSpPr>
@@ -12651,7 +13743,7 @@
           <a:bodyPr wrap="square" lIns="0" tIns="0" rIns="0" bIns="0" rtlCol="0" anchor="ctr"/>
           <a:lstStyle/>
           <a:p>
-            <a:pPr algn="l" indent="0" marL="0">
+            <a:pPr marL="0" indent="0" algn="l">
               <a:buNone/>
             </a:pPr>
             <a:r>
@@ -12671,7 +13763,7 @@
       </p:sp>
       <p:sp>
         <p:nvSpPr>
-          <p:cNvPr id="13" name="Shape 11"/>
+          <p:cNvPr id="14" name="Shape 12"/>
           <p:cNvSpPr/>
           <p:nvPr/>
         </p:nvSpPr>
@@ -12693,17 +13785,24 @@
             <a:prstDash val="solid"/>
           </a:ln>
           <a:effectLst>
-            <a:outerShdw sx="100000" sy="100000" kx="0" ky="0" algn="bl" rotWithShape="0" blurRad="101600" dist="38100" dir="8100000">
+            <a:outerShdw blurRad="101600" dist="38100" dir="8100000" algn="bl" rotWithShape="0">
               <a:srgbClr val="000000">
                 <a:alpha val="10000"/>
               </a:srgbClr>
             </a:outerShdw>
           </a:effectLst>
         </p:spPr>
-      </p:sp>
-      <p:sp>
-        <p:nvSpPr>
-          <p:cNvPr id="14" name="Shape 12"/>
+        <p:txBody>
+          <a:bodyPr/>
+          <a:lstStyle/>
+          <a:p>
+            <a:endParaRPr lang="en-US"/>
+          </a:p>
+        </p:txBody>
+      </p:sp>
+      <p:sp>
+        <p:nvSpPr>
+          <p:cNvPr id="15" name="Shape 13"/>
           <p:cNvSpPr/>
           <p:nvPr/>
         </p:nvSpPr>
@@ -12725,10 +13824,17 @@
             <a:prstDash val="solid"/>
           </a:ln>
         </p:spPr>
-      </p:sp>
-      <p:sp>
-        <p:nvSpPr>
-          <p:cNvPr id="15" name="Shape 13"/>
+        <p:txBody>
+          <a:bodyPr/>
+          <a:lstStyle/>
+          <a:p>
+            <a:endParaRPr lang="en-US"/>
+          </a:p>
+        </p:txBody>
+      </p:sp>
+      <p:sp>
+        <p:nvSpPr>
+          <p:cNvPr id="16" name="Shape 14"/>
           <p:cNvSpPr/>
           <p:nvPr/>
         </p:nvSpPr>
@@ -12750,10 +13856,17 @@
             <a:prstDash val="solid"/>
           </a:ln>
         </p:spPr>
-      </p:sp>
-      <p:sp>
-        <p:nvSpPr>
-          <p:cNvPr id="16" name="Text 14"/>
+        <p:txBody>
+          <a:bodyPr/>
+          <a:lstStyle/>
+          <a:p>
+            <a:endParaRPr lang="en-US"/>
+          </a:p>
+        </p:txBody>
+      </p:sp>
+      <p:sp>
+        <p:nvSpPr>
+          <p:cNvPr id="17" name="Text 15"/>
           <p:cNvSpPr/>
           <p:nvPr/>
         </p:nvSpPr>
@@ -12772,7 +13885,7 @@
           <a:bodyPr wrap="square" lIns="0" tIns="0" rIns="0" bIns="0" rtlCol="0" anchor="ctr"/>
           <a:lstStyle/>
           <a:p>
-            <a:pPr algn="ctr" indent="0" marL="0">
+            <a:pPr marL="0" indent="0" algn="ctr">
               <a:buNone/>
             </a:pPr>
             <a:r>
@@ -12792,7 +13905,7 @@
       </p:sp>
       <p:sp>
         <p:nvSpPr>
-          <p:cNvPr id="17" name="Text 15"/>
+          <p:cNvPr id="18" name="Text 16"/>
           <p:cNvSpPr/>
           <p:nvPr/>
         </p:nvSpPr>
@@ -12811,7 +13924,7 @@
           <a:bodyPr wrap="square" lIns="0" tIns="0" rIns="0" bIns="0" rtlCol="0" anchor="ctr"/>
           <a:lstStyle/>
           <a:p>
-            <a:pPr algn="l" indent="0" marL="0">
+            <a:pPr marL="0" indent="0" algn="l">
               <a:buNone/>
             </a:pPr>
             <a:r>
@@ -12831,7 +13944,7 @@
       </p:sp>
       <p:sp>
         <p:nvSpPr>
-          <p:cNvPr id="18" name="Text 16"/>
+          <p:cNvPr id="19" name="Text 17"/>
           <p:cNvSpPr/>
           <p:nvPr/>
         </p:nvSpPr>
@@ -12850,7 +13963,7 @@
           <a:bodyPr wrap="square" lIns="0" tIns="0" rIns="0" bIns="0" rtlCol="0" anchor="ctr"/>
           <a:lstStyle/>
           <a:p>
-            <a:pPr algn="l" indent="0" marL="0">
+            <a:pPr marL="0" indent="0" algn="l">
               <a:buNone/>
             </a:pPr>
             <a:r>
@@ -12870,7 +13983,7 @@
       </p:sp>
       <p:sp>
         <p:nvSpPr>
-          <p:cNvPr id="19" name="Shape 17"/>
+          <p:cNvPr id="20" name="Shape 18"/>
           <p:cNvSpPr/>
           <p:nvPr/>
         </p:nvSpPr>
@@ -12892,17 +14005,24 @@
             <a:prstDash val="solid"/>
           </a:ln>
           <a:effectLst>
-            <a:outerShdw sx="100000" sy="100000" kx="0" ky="0" algn="bl" rotWithShape="0" blurRad="101600" dist="38100" dir="8100000">
+            <a:outerShdw blurRad="101600" dist="38100" dir="8100000" algn="bl" rotWithShape="0">
               <a:srgbClr val="000000">
                 <a:alpha val="10000"/>
               </a:srgbClr>
             </a:outerShdw>
           </a:effectLst>
         </p:spPr>
-      </p:sp>
-      <p:sp>
-        <p:nvSpPr>
-          <p:cNvPr id="20" name="Shape 18"/>
+        <p:txBody>
+          <a:bodyPr/>
+          <a:lstStyle/>
+          <a:p>
+            <a:endParaRPr lang="en-US"/>
+          </a:p>
+        </p:txBody>
+      </p:sp>
+      <p:sp>
+        <p:nvSpPr>
+          <p:cNvPr id="21" name="Shape 19"/>
           <p:cNvSpPr/>
           <p:nvPr/>
         </p:nvSpPr>
@@ -12924,10 +14044,17 @@
             <a:prstDash val="solid"/>
           </a:ln>
         </p:spPr>
-      </p:sp>
-      <p:sp>
-        <p:nvSpPr>
-          <p:cNvPr id="21" name="Shape 19"/>
+        <p:txBody>
+          <a:bodyPr/>
+          <a:lstStyle/>
+          <a:p>
+            <a:endParaRPr lang="en-US"/>
+          </a:p>
+        </p:txBody>
+      </p:sp>
+      <p:sp>
+        <p:nvSpPr>
+          <p:cNvPr id="22" name="Shape 20"/>
           <p:cNvSpPr/>
           <p:nvPr/>
         </p:nvSpPr>
@@ -12949,10 +14076,17 @@
             <a:prstDash val="solid"/>
           </a:ln>
         </p:spPr>
-      </p:sp>
-      <p:sp>
-        <p:nvSpPr>
-          <p:cNvPr id="22" name="Text 20"/>
+        <p:txBody>
+          <a:bodyPr/>
+          <a:lstStyle/>
+          <a:p>
+            <a:endParaRPr lang="en-US"/>
+          </a:p>
+        </p:txBody>
+      </p:sp>
+      <p:sp>
+        <p:nvSpPr>
+          <p:cNvPr id="23" name="Text 21"/>
           <p:cNvSpPr/>
           <p:nvPr/>
         </p:nvSpPr>
@@ -12971,7 +14105,7 @@
           <a:bodyPr wrap="square" lIns="0" tIns="0" rIns="0" bIns="0" rtlCol="0" anchor="ctr"/>
           <a:lstStyle/>
           <a:p>
-            <a:pPr algn="ctr" indent="0" marL="0">
+            <a:pPr marL="0" indent="0" algn="ctr">
               <a:buNone/>
             </a:pPr>
             <a:r>
@@ -12991,7 +14125,7 @@
       </p:sp>
       <p:sp>
         <p:nvSpPr>
-          <p:cNvPr id="23" name="Text 21"/>
+          <p:cNvPr id="24" name="Text 22"/>
           <p:cNvSpPr/>
           <p:nvPr/>
         </p:nvSpPr>
@@ -13010,7 +14144,7 @@
           <a:bodyPr wrap="square" lIns="0" tIns="0" rIns="0" bIns="0" rtlCol="0" anchor="ctr"/>
           <a:lstStyle/>
           <a:p>
-            <a:pPr algn="l" indent="0" marL="0">
+            <a:pPr marL="0" indent="0" algn="l">
               <a:buNone/>
             </a:pPr>
             <a:r>
@@ -13030,7 +14164,7 @@
       </p:sp>
       <p:sp>
         <p:nvSpPr>
-          <p:cNvPr id="24" name="Text 22"/>
+          <p:cNvPr id="25" name="Text 23"/>
           <p:cNvSpPr/>
           <p:nvPr/>
         </p:nvSpPr>
@@ -13049,7 +14183,7 @@
           <a:bodyPr wrap="square" lIns="0" tIns="0" rIns="0" bIns="0" rtlCol="0" anchor="ctr"/>
           <a:lstStyle/>
           <a:p>
-            <a:pPr algn="l" indent="0" marL="0">
+            <a:pPr marL="0" indent="0" algn="l">
               <a:buNone/>
             </a:pPr>
             <a:r>
@@ -13069,7 +14203,7 @@
       </p:sp>
       <p:sp>
         <p:nvSpPr>
-          <p:cNvPr id="25" name="Shape 23"/>
+          <p:cNvPr id="26" name="Shape 24"/>
           <p:cNvSpPr/>
           <p:nvPr/>
         </p:nvSpPr>
@@ -13091,10 +14225,17 @@
             <a:prstDash val="solid"/>
           </a:ln>
         </p:spPr>
-      </p:sp>
-      <p:sp>
-        <p:nvSpPr>
-          <p:cNvPr id="26" name="Shape 24"/>
+        <p:txBody>
+          <a:bodyPr/>
+          <a:lstStyle/>
+          <a:p>
+            <a:endParaRPr lang="en-US"/>
+          </a:p>
+        </p:txBody>
+      </p:sp>
+      <p:sp>
+        <p:nvSpPr>
+          <p:cNvPr id="27" name="Shape 25"/>
           <p:cNvSpPr/>
           <p:nvPr/>
         </p:nvSpPr>
@@ -13116,10 +14257,17 @@
             <a:prstDash val="solid"/>
           </a:ln>
         </p:spPr>
-      </p:sp>
-      <p:sp>
-        <p:nvSpPr>
-          <p:cNvPr id="27" name="Text 25"/>
+        <p:txBody>
+          <a:bodyPr/>
+          <a:lstStyle/>
+          <a:p>
+            <a:endParaRPr lang="en-US"/>
+          </a:p>
+        </p:txBody>
+      </p:sp>
+      <p:sp>
+        <p:nvSpPr>
+          <p:cNvPr id="28" name="Text 26"/>
           <p:cNvSpPr/>
           <p:nvPr/>
         </p:nvSpPr>
@@ -13138,7 +14286,7 @@
           <a:bodyPr wrap="square" lIns="0" tIns="0" rIns="0" bIns="0" rtlCol="0" anchor="ctr"/>
           <a:lstStyle/>
           <a:p>
-            <a:pPr algn="l" indent="0" marL="0">
+            <a:pPr marL="0" indent="0" algn="l">
               <a:buNone/>
             </a:pPr>
             <a:r>
@@ -13172,6 +14320,7 @@
         <a:solidFill>
           <a:srgbClr val="F4F7FF"/>
         </a:solidFill>
+        <a:effectLst/>
       </p:bgPr>
     </p:bg>
     <p:spTree>
@@ -13212,6 +14361,13 @@
             <a:prstDash val="solid"/>
           </a:ln>
         </p:spPr>
+        <p:txBody>
+          <a:bodyPr/>
+          <a:lstStyle/>
+          <a:p>
+            <a:endParaRPr lang="en-US"/>
+          </a:p>
+        </p:txBody>
       </p:sp>
       <p:sp>
         <p:nvSpPr>
@@ -13234,7 +14390,7 @@
           <a:bodyPr wrap="square" lIns="0" tIns="0" rIns="0" bIns="0" rtlCol="0" anchor="ctr"/>
           <a:lstStyle/>
           <a:p>
-            <a:pPr algn="r" indent="0" marL="0">
+            <a:pPr marL="0" indent="0" algn="r">
               <a:buNone/>
             </a:pPr>
             <a:r>
@@ -13252,6 +14408,45 @@
       <p:sp>
         <p:nvSpPr>
           <p:cNvPr id="4" name="Text 2"/>
+          <p:cNvSpPr/>
+          <p:nvPr/>
+        </p:nvSpPr>
+        <p:spPr>
+          <a:xfrm>
+            <a:off x="256032" y="4800600"/>
+            <a:ext cx="2011680" cy="228600"/>
+          </a:xfrm>
+          <a:prstGeom prst="rect">
+            <a:avLst/>
+          </a:prstGeom>
+          <a:noFill/>
+          <a:ln/>
+        </p:spPr>
+        <p:txBody>
+          <a:bodyPr wrap="square" lIns="0" tIns="0" rIns="0" bIns="0" rtlCol="0" anchor="ctr"/>
+          <a:lstStyle/>
+          <a:p>
+            <a:pPr marL="0" indent="0" algn="l">
+              <a:buNone/>
+            </a:pPr>
+            <a:r>
+              <a:rPr lang="en-US" sz="750" dirty="0">
+                <a:solidFill>
+                  <a:srgbClr val="C8D8EE"/>
+                </a:solidFill>
+                <a:latin typeface="Calibri" pitchFamily="34" charset="0"/>
+                <a:ea typeface="Calibri" pitchFamily="34" charset="-122"/>
+                <a:cs typeface="Calibri" pitchFamily="34" charset="-120"/>
+              </a:rPr>
+              <a:t>jueewo ventures</a:t>
+            </a:r>
+            <a:endParaRPr lang="en-US" sz="750" dirty="0"/>
+          </a:p>
+        </p:txBody>
+      </p:sp>
+      <p:sp>
+        <p:nvSpPr>
+          <p:cNvPr id="5" name="Text 3"/>
           <p:cNvSpPr/>
           <p:nvPr/>
         </p:nvSpPr>
@@ -13270,11 +14465,11 @@
           <a:bodyPr wrap="square" lIns="0" tIns="0" rIns="0" bIns="0" rtlCol="0" anchor="ctr"/>
           <a:lstStyle/>
           <a:p>
-            <a:pPr algn="l" indent="0" marL="0">
-              <a:buNone/>
-            </a:pPr>
-            <a:r>
-              <a:rPr lang="en-US" sz="900" b="1" spc="300" kern="0" dirty="0">
+            <a:pPr marL="0" indent="0" algn="l">
+              <a:buNone/>
+            </a:pPr>
+            <a:r>
+              <a:rPr lang="en-US" sz="900" b="1" kern="0" spc="300" dirty="0">
                 <a:solidFill>
                   <a:srgbClr val="3B8BF5"/>
                 </a:solidFill>
@@ -13290,7 +14485,7 @@
       </p:sp>
       <p:sp>
         <p:nvSpPr>
-          <p:cNvPr id="5" name="Text 3"/>
+          <p:cNvPr id="6" name="Text 4"/>
           <p:cNvSpPr/>
           <p:nvPr/>
         </p:nvSpPr>
@@ -13309,7 +14504,7 @@
           <a:bodyPr wrap="square" lIns="0" tIns="0" rIns="0" bIns="0" rtlCol="0" anchor="ctr"/>
           <a:lstStyle/>
           <a:p>
-            <a:pPr algn="l" indent="0" marL="0">
+            <a:pPr marL="0" indent="0" algn="l">
               <a:buNone/>
             </a:pPr>
             <a:r>
@@ -13326,7 +14521,7 @@
             <a:endParaRPr lang="en-US" sz="2800" dirty="0"/>
           </a:p>
           <a:p>
-            <a:pPr algn="l" indent="0" marL="0">
+            <a:pPr marL="0" indent="0" algn="l">
               <a:buNone/>
             </a:pPr>
             <a:r>
@@ -13346,7 +14541,7 @@
       </p:sp>
       <p:sp>
         <p:nvSpPr>
-          <p:cNvPr id="6" name="Shape 4"/>
+          <p:cNvPr id="7" name="Shape 5"/>
           <p:cNvSpPr/>
           <p:nvPr/>
         </p:nvSpPr>
@@ -13368,17 +14563,24 @@
             <a:prstDash val="solid"/>
           </a:ln>
           <a:effectLst>
-            <a:outerShdw sx="100000" sy="100000" kx="0" ky="0" algn="bl" rotWithShape="0" blurRad="101600" dist="38100" dir="8100000">
+            <a:outerShdw blurRad="101600" dist="38100" dir="8100000" algn="bl" rotWithShape="0">
               <a:srgbClr val="000000">
                 <a:alpha val="10000"/>
               </a:srgbClr>
             </a:outerShdw>
           </a:effectLst>
         </p:spPr>
-      </p:sp>
-      <p:sp>
-        <p:nvSpPr>
-          <p:cNvPr id="7" name="Shape 5"/>
+        <p:txBody>
+          <a:bodyPr/>
+          <a:lstStyle/>
+          <a:p>
+            <a:endParaRPr lang="en-US"/>
+          </a:p>
+        </p:txBody>
+      </p:sp>
+      <p:sp>
+        <p:nvSpPr>
+          <p:cNvPr id="8" name="Shape 6"/>
           <p:cNvSpPr/>
           <p:nvPr/>
         </p:nvSpPr>
@@ -13400,10 +14602,17 @@
             <a:prstDash val="solid"/>
           </a:ln>
         </p:spPr>
-      </p:sp>
-      <p:sp>
-        <p:nvSpPr>
-          <p:cNvPr id="8" name="Text 6"/>
+        <p:txBody>
+          <a:bodyPr/>
+          <a:lstStyle/>
+          <a:p>
+            <a:endParaRPr lang="en-US"/>
+          </a:p>
+        </p:txBody>
+      </p:sp>
+      <p:sp>
+        <p:nvSpPr>
+          <p:cNvPr id="9" name="Text 7"/>
           <p:cNvSpPr/>
           <p:nvPr/>
         </p:nvSpPr>
@@ -13422,7 +14631,7 @@
           <a:bodyPr wrap="square" lIns="0" tIns="0" rIns="0" bIns="0" rtlCol="0" anchor="ctr"/>
           <a:lstStyle/>
           <a:p>
-            <a:pPr algn="l" indent="0" marL="0">
+            <a:pPr marL="0" indent="0" algn="l">
               <a:buNone/>
             </a:pPr>
             <a:r>
@@ -13442,7 +14651,7 @@
       </p:sp>
       <p:sp>
         <p:nvSpPr>
-          <p:cNvPr id="9" name="Text 7"/>
+          <p:cNvPr id="10" name="Text 8"/>
           <p:cNvSpPr/>
           <p:nvPr/>
         </p:nvSpPr>
@@ -13461,7 +14670,7 @@
           <a:bodyPr wrap="square" lIns="0" tIns="0" rIns="0" bIns="0" rtlCol="0" anchor="ctr"/>
           <a:lstStyle/>
           <a:p>
-            <a:pPr algn="l" indent="0" marL="0">
+            <a:pPr marL="0" indent="0" algn="l">
               <a:buNone/>
             </a:pPr>
             <a:r>
@@ -13481,7 +14690,7 @@
       </p:sp>
       <p:sp>
         <p:nvSpPr>
-          <p:cNvPr id="10" name="Shape 8"/>
+          <p:cNvPr id="11" name="Shape 9"/>
           <p:cNvSpPr/>
           <p:nvPr/>
         </p:nvSpPr>
@@ -13503,10 +14712,17 @@
             <a:prstDash val="solid"/>
           </a:ln>
         </p:spPr>
-      </p:sp>
-      <p:sp>
-        <p:nvSpPr>
-          <p:cNvPr id="11" name="Text 9"/>
+        <p:txBody>
+          <a:bodyPr/>
+          <a:lstStyle/>
+          <a:p>
+            <a:endParaRPr lang="en-US"/>
+          </a:p>
+        </p:txBody>
+      </p:sp>
+      <p:sp>
+        <p:nvSpPr>
+          <p:cNvPr id="12" name="Text 10"/>
           <p:cNvSpPr/>
           <p:nvPr/>
         </p:nvSpPr>
@@ -13525,7 +14741,7 @@
           <a:bodyPr wrap="square" lIns="0" tIns="0" rIns="0" bIns="0" rtlCol="0" anchor="ctr"/>
           <a:lstStyle/>
           <a:p>
-            <a:pPr algn="l" indent="0" marL="0">
+            <a:pPr marL="0" indent="0" algn="l">
               <a:buNone/>
             </a:pPr>
             <a:r>
@@ -13545,7 +14761,7 @@
       </p:sp>
       <p:sp>
         <p:nvSpPr>
-          <p:cNvPr id="12" name="Text 10"/>
+          <p:cNvPr id="13" name="Text 11"/>
           <p:cNvSpPr/>
           <p:nvPr/>
         </p:nvSpPr>
@@ -13564,7 +14780,7 @@
           <a:bodyPr wrap="square" lIns="0" tIns="0" rIns="0" bIns="0" rtlCol="0" anchor="ctr"/>
           <a:lstStyle/>
           <a:p>
-            <a:pPr algn="l" indent="0" marL="0">
+            <a:pPr marL="0" indent="0" algn="l">
               <a:buNone/>
             </a:pPr>
             <a:r>
@@ -13584,7 +14800,7 @@
       </p:sp>
       <p:sp>
         <p:nvSpPr>
-          <p:cNvPr id="13" name="Text 11"/>
+          <p:cNvPr id="14" name="Text 12"/>
           <p:cNvSpPr/>
           <p:nvPr/>
         </p:nvSpPr>
@@ -13603,7 +14819,7 @@
           <a:bodyPr wrap="square" lIns="0" tIns="0" rIns="0" bIns="0" rtlCol="0" anchor="ctr"/>
           <a:lstStyle/>
           <a:p>
-            <a:pPr algn="l" indent="0" marL="0">
+            <a:pPr marL="0" indent="0" algn="l">
               <a:buNone/>
             </a:pPr>
             <a:r>
@@ -13623,7 +14839,7 @@
       </p:sp>
       <p:sp>
         <p:nvSpPr>
-          <p:cNvPr id="14" name="Text 12"/>
+          <p:cNvPr id="15" name="Text 13"/>
           <p:cNvSpPr/>
           <p:nvPr/>
         </p:nvSpPr>
@@ -13642,7 +14858,7 @@
           <a:bodyPr wrap="square" lIns="0" tIns="0" rIns="0" bIns="0" rtlCol="0" anchor="ctr"/>
           <a:lstStyle/>
           <a:p>
-            <a:pPr algn="l" indent="0" marL="0">
+            <a:pPr marL="0" indent="0" algn="l">
               <a:buNone/>
             </a:pPr>
             <a:r>
@@ -13662,7 +14878,7 @@
       </p:sp>
       <p:sp>
         <p:nvSpPr>
-          <p:cNvPr id="15" name="Shape 13"/>
+          <p:cNvPr id="16" name="Shape 14"/>
           <p:cNvSpPr/>
           <p:nvPr/>
         </p:nvSpPr>
@@ -13684,10 +14900,17 @@
             <a:prstDash val="solid"/>
           </a:ln>
         </p:spPr>
-      </p:sp>
-      <p:sp>
-        <p:nvSpPr>
-          <p:cNvPr id="16" name="Text 14"/>
+        <p:txBody>
+          <a:bodyPr/>
+          <a:lstStyle/>
+          <a:p>
+            <a:endParaRPr lang="en-US"/>
+          </a:p>
+        </p:txBody>
+      </p:sp>
+      <p:sp>
+        <p:nvSpPr>
+          <p:cNvPr id="17" name="Text 15"/>
           <p:cNvSpPr/>
           <p:nvPr/>
         </p:nvSpPr>
@@ -13706,7 +14929,7 @@
           <a:bodyPr wrap="square" lIns="0" tIns="0" rIns="0" bIns="0" rtlCol="0" anchor="ctr"/>
           <a:lstStyle/>
           <a:p>
-            <a:pPr algn="l" indent="0" marL="0">
+            <a:pPr marL="0" indent="0" algn="l">
               <a:buNone/>
             </a:pPr>
             <a:r>
@@ -13726,7 +14949,7 @@
       </p:sp>
       <p:sp>
         <p:nvSpPr>
-          <p:cNvPr id="17" name="Shape 15"/>
+          <p:cNvPr id="18" name="Shape 16"/>
           <p:cNvSpPr/>
           <p:nvPr/>
         </p:nvSpPr>
@@ -13748,17 +14971,24 @@
             <a:prstDash val="solid"/>
           </a:ln>
           <a:effectLst>
-            <a:outerShdw sx="100000" sy="100000" kx="0" ky="0" algn="bl" rotWithShape="0" blurRad="101600" dist="38100" dir="8100000">
+            <a:outerShdw blurRad="101600" dist="38100" dir="8100000" algn="bl" rotWithShape="0">
               <a:srgbClr val="000000">
                 <a:alpha val="10000"/>
               </a:srgbClr>
             </a:outerShdw>
           </a:effectLst>
         </p:spPr>
-      </p:sp>
-      <p:sp>
-        <p:nvSpPr>
-          <p:cNvPr id="18" name="Shape 16"/>
+        <p:txBody>
+          <a:bodyPr/>
+          <a:lstStyle/>
+          <a:p>
+            <a:endParaRPr lang="en-US"/>
+          </a:p>
+        </p:txBody>
+      </p:sp>
+      <p:sp>
+        <p:nvSpPr>
+          <p:cNvPr id="19" name="Shape 17"/>
           <p:cNvSpPr/>
           <p:nvPr/>
         </p:nvSpPr>
@@ -13780,10 +15010,17 @@
             <a:prstDash val="solid"/>
           </a:ln>
         </p:spPr>
-      </p:sp>
-      <p:sp>
-        <p:nvSpPr>
-          <p:cNvPr id="19" name="Text 17"/>
+        <p:txBody>
+          <a:bodyPr/>
+          <a:lstStyle/>
+          <a:p>
+            <a:endParaRPr lang="en-US"/>
+          </a:p>
+        </p:txBody>
+      </p:sp>
+      <p:sp>
+        <p:nvSpPr>
+          <p:cNvPr id="20" name="Text 18"/>
           <p:cNvSpPr/>
           <p:nvPr/>
         </p:nvSpPr>
@@ -13802,7 +15039,7 @@
           <a:bodyPr wrap="square" lIns="0" tIns="0" rIns="0" bIns="0" rtlCol="0" anchor="ctr"/>
           <a:lstStyle/>
           <a:p>
-            <a:pPr algn="l" indent="0" marL="0">
+            <a:pPr marL="0" indent="0" algn="l">
               <a:buNone/>
             </a:pPr>
             <a:r>
@@ -13822,7 +15059,7 @@
       </p:sp>
       <p:sp>
         <p:nvSpPr>
-          <p:cNvPr id="20" name="Text 18"/>
+          <p:cNvPr id="21" name="Text 19"/>
           <p:cNvSpPr/>
           <p:nvPr/>
         </p:nvSpPr>
@@ -13841,7 +15078,7 @@
           <a:bodyPr wrap="square" lIns="0" tIns="0" rIns="0" bIns="0" rtlCol="0" anchor="ctr"/>
           <a:lstStyle/>
           <a:p>
-            <a:pPr algn="l" indent="0" marL="0">
+            <a:pPr marL="0" indent="0" algn="l">
               <a:buNone/>
             </a:pPr>
             <a:r>
@@ -13861,7 +15098,7 @@
       </p:sp>
       <p:sp>
         <p:nvSpPr>
-          <p:cNvPr id="21" name="Shape 19"/>
+          <p:cNvPr id="22" name="Shape 20"/>
           <p:cNvSpPr/>
           <p:nvPr/>
         </p:nvSpPr>
@@ -13883,10 +15120,17 @@
             <a:prstDash val="solid"/>
           </a:ln>
         </p:spPr>
-      </p:sp>
-      <p:sp>
-        <p:nvSpPr>
-          <p:cNvPr id="22" name="Text 20"/>
+        <p:txBody>
+          <a:bodyPr/>
+          <a:lstStyle/>
+          <a:p>
+            <a:endParaRPr lang="en-US"/>
+          </a:p>
+        </p:txBody>
+      </p:sp>
+      <p:sp>
+        <p:nvSpPr>
+          <p:cNvPr id="23" name="Text 21"/>
           <p:cNvSpPr/>
           <p:nvPr/>
         </p:nvSpPr>
@@ -13905,7 +15149,7 @@
           <a:bodyPr wrap="square" lIns="0" tIns="0" rIns="0" bIns="0" rtlCol="0" anchor="ctr"/>
           <a:lstStyle/>
           <a:p>
-            <a:pPr algn="l" indent="0" marL="0">
+            <a:pPr marL="0" indent="0" algn="l">
               <a:buNone/>
             </a:pPr>
             <a:r>
@@ -13925,7 +15169,7 @@
       </p:sp>
       <p:sp>
         <p:nvSpPr>
-          <p:cNvPr id="23" name="Text 21"/>
+          <p:cNvPr id="24" name="Text 22"/>
           <p:cNvSpPr/>
           <p:nvPr/>
         </p:nvSpPr>
@@ -13944,7 +15188,7 @@
           <a:bodyPr wrap="square" lIns="0" tIns="0" rIns="0" bIns="0" rtlCol="0" anchor="ctr"/>
           <a:lstStyle/>
           <a:p>
-            <a:pPr algn="l" indent="0" marL="0">
+            <a:pPr marL="0" indent="0" algn="l">
               <a:buNone/>
             </a:pPr>
             <a:r>
@@ -13964,7 +15208,7 @@
       </p:sp>
       <p:sp>
         <p:nvSpPr>
-          <p:cNvPr id="24" name="Text 22"/>
+          <p:cNvPr id="25" name="Text 23"/>
           <p:cNvSpPr/>
           <p:nvPr/>
         </p:nvSpPr>
@@ -13983,7 +15227,7 @@
           <a:bodyPr wrap="square" lIns="0" tIns="0" rIns="0" bIns="0" rtlCol="0" anchor="ctr"/>
           <a:lstStyle/>
           <a:p>
-            <a:pPr algn="l" indent="0" marL="0">
+            <a:pPr marL="0" indent="0" algn="l">
               <a:buNone/>
             </a:pPr>
             <a:r>
@@ -14003,7 +15247,7 @@
       </p:sp>
       <p:sp>
         <p:nvSpPr>
-          <p:cNvPr id="25" name="Text 23"/>
+          <p:cNvPr id="26" name="Text 24"/>
           <p:cNvSpPr/>
           <p:nvPr/>
         </p:nvSpPr>
@@ -14022,7 +15266,7 @@
           <a:bodyPr wrap="square" lIns="0" tIns="0" rIns="0" bIns="0" rtlCol="0" anchor="ctr"/>
           <a:lstStyle/>
           <a:p>
-            <a:pPr algn="l" indent="0" marL="0">
+            <a:pPr marL="0" indent="0" algn="l">
               <a:buNone/>
             </a:pPr>
             <a:r>
@@ -14042,7 +15286,7 @@
       </p:sp>
       <p:sp>
         <p:nvSpPr>
-          <p:cNvPr id="26" name="Shape 24"/>
+          <p:cNvPr id="27" name="Shape 25"/>
           <p:cNvSpPr/>
           <p:nvPr/>
         </p:nvSpPr>
@@ -14064,10 +15308,17 @@
             <a:prstDash val="solid"/>
           </a:ln>
         </p:spPr>
-      </p:sp>
-      <p:sp>
-        <p:nvSpPr>
-          <p:cNvPr id="27" name="Text 25"/>
+        <p:txBody>
+          <a:bodyPr/>
+          <a:lstStyle/>
+          <a:p>
+            <a:endParaRPr lang="en-US"/>
+          </a:p>
+        </p:txBody>
+      </p:sp>
+      <p:sp>
+        <p:nvSpPr>
+          <p:cNvPr id="28" name="Text 26"/>
           <p:cNvSpPr/>
           <p:nvPr/>
         </p:nvSpPr>
@@ -14086,7 +15337,7 @@
           <a:bodyPr wrap="square" lIns="0" tIns="0" rIns="0" bIns="0" rtlCol="0" anchor="ctr"/>
           <a:lstStyle/>
           <a:p>
-            <a:pPr algn="l" indent="0" marL="0">
+            <a:pPr marL="0" indent="0" algn="l">
               <a:buNone/>
             </a:pPr>
             <a:r>
@@ -14106,7 +15357,7 @@
       </p:sp>
       <p:sp>
         <p:nvSpPr>
-          <p:cNvPr id="28" name="Shape 26"/>
+          <p:cNvPr id="29" name="Shape 27"/>
           <p:cNvSpPr/>
           <p:nvPr/>
         </p:nvSpPr>
@@ -14128,17 +15379,24 @@
             <a:prstDash val="solid"/>
           </a:ln>
           <a:effectLst>
-            <a:outerShdw sx="100000" sy="100000" kx="0" ky="0" algn="bl" rotWithShape="0" blurRad="101600" dist="38100" dir="8100000">
+            <a:outerShdw blurRad="101600" dist="38100" dir="8100000" algn="bl" rotWithShape="0">
               <a:srgbClr val="000000">
                 <a:alpha val="10000"/>
               </a:srgbClr>
             </a:outerShdw>
           </a:effectLst>
         </p:spPr>
-      </p:sp>
-      <p:sp>
-        <p:nvSpPr>
-          <p:cNvPr id="29" name="Shape 27"/>
+        <p:txBody>
+          <a:bodyPr/>
+          <a:lstStyle/>
+          <a:p>
+            <a:endParaRPr lang="en-US"/>
+          </a:p>
+        </p:txBody>
+      </p:sp>
+      <p:sp>
+        <p:nvSpPr>
+          <p:cNvPr id="30" name="Shape 28"/>
           <p:cNvSpPr/>
           <p:nvPr/>
         </p:nvSpPr>
@@ -14160,10 +15418,17 @@
             <a:prstDash val="solid"/>
           </a:ln>
         </p:spPr>
-      </p:sp>
-      <p:sp>
-        <p:nvSpPr>
-          <p:cNvPr id="30" name="Text 28"/>
+        <p:txBody>
+          <a:bodyPr/>
+          <a:lstStyle/>
+          <a:p>
+            <a:endParaRPr lang="en-US"/>
+          </a:p>
+        </p:txBody>
+      </p:sp>
+      <p:sp>
+        <p:nvSpPr>
+          <p:cNvPr id="31" name="Text 29"/>
           <p:cNvSpPr/>
           <p:nvPr/>
         </p:nvSpPr>
@@ -14182,7 +15447,7 @@
           <a:bodyPr wrap="square" lIns="0" tIns="0" rIns="0" bIns="0" rtlCol="0" anchor="ctr"/>
           <a:lstStyle/>
           <a:p>
-            <a:pPr algn="l" indent="0" marL="0">
+            <a:pPr marL="0" indent="0" algn="l">
               <a:buNone/>
             </a:pPr>
             <a:r>
@@ -14202,7 +15467,7 @@
       </p:sp>
       <p:sp>
         <p:nvSpPr>
-          <p:cNvPr id="31" name="Text 29"/>
+          <p:cNvPr id="32" name="Text 30"/>
           <p:cNvSpPr/>
           <p:nvPr/>
         </p:nvSpPr>
@@ -14221,7 +15486,7 @@
           <a:bodyPr wrap="square" lIns="0" tIns="0" rIns="0" bIns="0" rtlCol="0" anchor="ctr"/>
           <a:lstStyle/>
           <a:p>
-            <a:pPr algn="l" indent="0" marL="0">
+            <a:pPr marL="0" indent="0" algn="l">
               <a:buNone/>
             </a:pPr>
             <a:r>
@@ -14241,7 +15506,7 @@
       </p:sp>
       <p:sp>
         <p:nvSpPr>
-          <p:cNvPr id="32" name="Shape 30"/>
+          <p:cNvPr id="33" name="Shape 31"/>
           <p:cNvSpPr/>
           <p:nvPr/>
         </p:nvSpPr>
@@ -14263,10 +15528,17 @@
             <a:prstDash val="solid"/>
           </a:ln>
         </p:spPr>
-      </p:sp>
-      <p:sp>
-        <p:nvSpPr>
-          <p:cNvPr id="33" name="Text 31"/>
+        <p:txBody>
+          <a:bodyPr/>
+          <a:lstStyle/>
+          <a:p>
+            <a:endParaRPr lang="en-US"/>
+          </a:p>
+        </p:txBody>
+      </p:sp>
+      <p:sp>
+        <p:nvSpPr>
+          <p:cNvPr id="34" name="Text 32"/>
           <p:cNvSpPr/>
           <p:nvPr/>
         </p:nvSpPr>
@@ -14285,7 +15557,7 @@
           <a:bodyPr wrap="square" lIns="0" tIns="0" rIns="0" bIns="0" rtlCol="0" anchor="ctr"/>
           <a:lstStyle/>
           <a:p>
-            <a:pPr algn="l" indent="0" marL="0">
+            <a:pPr marL="0" indent="0" algn="l">
               <a:buNone/>
             </a:pPr>
             <a:r>
@@ -14305,7 +15577,7 @@
       </p:sp>
       <p:sp>
         <p:nvSpPr>
-          <p:cNvPr id="34" name="Text 32"/>
+          <p:cNvPr id="35" name="Text 33"/>
           <p:cNvSpPr/>
           <p:nvPr/>
         </p:nvSpPr>
@@ -14324,7 +15596,7 @@
           <a:bodyPr wrap="square" lIns="0" tIns="0" rIns="0" bIns="0" rtlCol="0" anchor="ctr"/>
           <a:lstStyle/>
           <a:p>
-            <a:pPr algn="l" indent="0" marL="0">
+            <a:pPr marL="0" indent="0" algn="l">
               <a:buNone/>
             </a:pPr>
             <a:r>
@@ -14344,7 +15616,7 @@
       </p:sp>
       <p:sp>
         <p:nvSpPr>
-          <p:cNvPr id="35" name="Text 33"/>
+          <p:cNvPr id="36" name="Text 34"/>
           <p:cNvSpPr/>
           <p:nvPr/>
         </p:nvSpPr>
@@ -14363,7 +15635,7 @@
           <a:bodyPr wrap="square" lIns="0" tIns="0" rIns="0" bIns="0" rtlCol="0" anchor="ctr"/>
           <a:lstStyle/>
           <a:p>
-            <a:pPr algn="l" indent="0" marL="0">
+            <a:pPr marL="0" indent="0" algn="l">
               <a:buNone/>
             </a:pPr>
             <a:r>
@@ -14383,7 +15655,7 @@
       </p:sp>
       <p:sp>
         <p:nvSpPr>
-          <p:cNvPr id="36" name="Text 34"/>
+          <p:cNvPr id="37" name="Text 35"/>
           <p:cNvSpPr/>
           <p:nvPr/>
         </p:nvSpPr>
@@ -14402,7 +15674,7 @@
           <a:bodyPr wrap="square" lIns="0" tIns="0" rIns="0" bIns="0" rtlCol="0" anchor="ctr"/>
           <a:lstStyle/>
           <a:p>
-            <a:pPr algn="l" indent="0" marL="0">
+            <a:pPr marL="0" indent="0" algn="l">
               <a:buNone/>
             </a:pPr>
             <a:r>
@@ -14422,7 +15694,7 @@
       </p:sp>
       <p:sp>
         <p:nvSpPr>
-          <p:cNvPr id="37" name="Shape 35"/>
+          <p:cNvPr id="38" name="Shape 36"/>
           <p:cNvSpPr/>
           <p:nvPr/>
         </p:nvSpPr>
@@ -14444,10 +15716,17 @@
             <a:prstDash val="solid"/>
           </a:ln>
         </p:spPr>
-      </p:sp>
-      <p:sp>
-        <p:nvSpPr>
-          <p:cNvPr id="38" name="Text 36"/>
+        <p:txBody>
+          <a:bodyPr/>
+          <a:lstStyle/>
+          <a:p>
+            <a:endParaRPr lang="en-US"/>
+          </a:p>
+        </p:txBody>
+      </p:sp>
+      <p:sp>
+        <p:nvSpPr>
+          <p:cNvPr id="39" name="Text 37"/>
           <p:cNvSpPr/>
           <p:nvPr/>
         </p:nvSpPr>
@@ -14466,7 +15745,7 @@
           <a:bodyPr wrap="square" lIns="0" tIns="0" rIns="0" bIns="0" rtlCol="0" anchor="ctr"/>
           <a:lstStyle/>
           <a:p>
-            <a:pPr algn="l" indent="0" marL="0">
+            <a:pPr marL="0" indent="0" algn="l">
               <a:buNone/>
             </a:pPr>
             <a:r>
@@ -14500,6 +15779,7 @@
         <a:solidFill>
           <a:srgbClr val="F4F7FF"/>
         </a:solidFill>
+        <a:effectLst/>
       </p:bgPr>
     </p:bg>
     <p:spTree>
@@ -14540,6 +15820,13 @@
             <a:prstDash val="solid"/>
           </a:ln>
         </p:spPr>
+        <p:txBody>
+          <a:bodyPr/>
+          <a:lstStyle/>
+          <a:p>
+            <a:endParaRPr lang="en-US"/>
+          </a:p>
+        </p:txBody>
       </p:sp>
       <p:sp>
         <p:nvSpPr>
@@ -14562,7 +15849,7 @@
           <a:bodyPr wrap="square" lIns="0" tIns="0" rIns="0" bIns="0" rtlCol="0" anchor="ctr"/>
           <a:lstStyle/>
           <a:p>
-            <a:pPr algn="r" indent="0" marL="0">
+            <a:pPr marL="0" indent="0" algn="r">
               <a:buNone/>
             </a:pPr>
             <a:r>
@@ -14580,6 +15867,45 @@
       <p:sp>
         <p:nvSpPr>
           <p:cNvPr id="4" name="Text 2"/>
+          <p:cNvSpPr/>
+          <p:nvPr/>
+        </p:nvSpPr>
+        <p:spPr>
+          <a:xfrm>
+            <a:off x="256032" y="4800600"/>
+            <a:ext cx="2011680" cy="228600"/>
+          </a:xfrm>
+          <a:prstGeom prst="rect">
+            <a:avLst/>
+          </a:prstGeom>
+          <a:noFill/>
+          <a:ln/>
+        </p:spPr>
+        <p:txBody>
+          <a:bodyPr wrap="square" lIns="0" tIns="0" rIns="0" bIns="0" rtlCol="0" anchor="ctr"/>
+          <a:lstStyle/>
+          <a:p>
+            <a:pPr marL="0" indent="0" algn="l">
+              <a:buNone/>
+            </a:pPr>
+            <a:r>
+              <a:rPr lang="en-US" sz="750" dirty="0">
+                <a:solidFill>
+                  <a:srgbClr val="C8D8EE"/>
+                </a:solidFill>
+                <a:latin typeface="Calibri" pitchFamily="34" charset="0"/>
+                <a:ea typeface="Calibri" pitchFamily="34" charset="-122"/>
+                <a:cs typeface="Calibri" pitchFamily="34" charset="-120"/>
+              </a:rPr>
+              <a:t>jueewo ventures</a:t>
+            </a:r>
+            <a:endParaRPr lang="en-US" sz="750" dirty="0"/>
+          </a:p>
+        </p:txBody>
+      </p:sp>
+      <p:sp>
+        <p:nvSpPr>
+          <p:cNvPr id="5" name="Text 3"/>
           <p:cNvSpPr/>
           <p:nvPr/>
         </p:nvSpPr>
@@ -14598,11 +15924,11 @@
           <a:bodyPr wrap="square" lIns="0" tIns="0" rIns="0" bIns="0" rtlCol="0" anchor="ctr"/>
           <a:lstStyle/>
           <a:p>
-            <a:pPr algn="l" indent="0" marL="0">
-              <a:buNone/>
-            </a:pPr>
-            <a:r>
-              <a:rPr lang="en-US" sz="900" b="1" spc="300" kern="0" dirty="0">
+            <a:pPr marL="0" indent="0" algn="l">
+              <a:buNone/>
+            </a:pPr>
+            <a:r>
+              <a:rPr lang="en-US" sz="900" b="1" kern="0" spc="300" dirty="0">
                 <a:solidFill>
                   <a:srgbClr val="3B8BF5"/>
                 </a:solidFill>
@@ -14618,7 +15944,7 @@
       </p:sp>
       <p:sp>
         <p:nvSpPr>
-          <p:cNvPr id="5" name="Text 3"/>
+          <p:cNvPr id="6" name="Text 4"/>
           <p:cNvSpPr/>
           <p:nvPr/>
         </p:nvSpPr>
@@ -14637,7 +15963,7 @@
           <a:bodyPr wrap="square" lIns="0" tIns="0" rIns="0" bIns="0" rtlCol="0" anchor="ctr"/>
           <a:lstStyle/>
           <a:p>
-            <a:pPr algn="l" indent="0" marL="0">
+            <a:pPr marL="0" indent="0" algn="l">
               <a:buNone/>
             </a:pPr>
             <a:r>
@@ -14657,7 +15983,7 @@
       </p:sp>
       <p:sp>
         <p:nvSpPr>
-          <p:cNvPr id="6" name="Shape 4"/>
+          <p:cNvPr id="7" name="Shape 5"/>
           <p:cNvSpPr/>
           <p:nvPr/>
         </p:nvSpPr>
@@ -14679,17 +16005,24 @@
             <a:prstDash val="solid"/>
           </a:ln>
           <a:effectLst>
-            <a:outerShdw sx="100000" sy="100000" kx="0" ky="0" algn="bl" rotWithShape="0" blurRad="101600" dist="38100" dir="8100000">
+            <a:outerShdw blurRad="101600" dist="38100" dir="8100000" algn="bl" rotWithShape="0">
               <a:srgbClr val="000000">
                 <a:alpha val="10000"/>
               </a:srgbClr>
             </a:outerShdw>
           </a:effectLst>
         </p:spPr>
-      </p:sp>
-      <p:sp>
-        <p:nvSpPr>
-          <p:cNvPr id="7" name="Shape 5"/>
+        <p:txBody>
+          <a:bodyPr/>
+          <a:lstStyle/>
+          <a:p>
+            <a:endParaRPr lang="en-US"/>
+          </a:p>
+        </p:txBody>
+      </p:sp>
+      <p:sp>
+        <p:nvSpPr>
+          <p:cNvPr id="8" name="Shape 6"/>
           <p:cNvSpPr/>
           <p:nvPr/>
         </p:nvSpPr>
@@ -14711,10 +16044,17 @@
             <a:prstDash val="solid"/>
           </a:ln>
         </p:spPr>
-      </p:sp>
-      <p:sp>
-        <p:nvSpPr>
-          <p:cNvPr id="8" name="Text 6"/>
+        <p:txBody>
+          <a:bodyPr/>
+          <a:lstStyle/>
+          <a:p>
+            <a:endParaRPr lang="en-US"/>
+          </a:p>
+        </p:txBody>
+      </p:sp>
+      <p:sp>
+        <p:nvSpPr>
+          <p:cNvPr id="9" name="Text 7"/>
           <p:cNvSpPr/>
           <p:nvPr/>
         </p:nvSpPr>
@@ -14733,7 +16073,7 @@
           <a:bodyPr wrap="square" lIns="0" tIns="0" rIns="0" bIns="0" rtlCol="0" anchor="ctr"/>
           <a:lstStyle/>
           <a:p>
-            <a:pPr algn="l" indent="0" marL="0">
+            <a:pPr marL="0" indent="0" algn="l">
               <a:buNone/>
             </a:pPr>
             <a:r>
@@ -14753,7 +16093,7 @@
       </p:sp>
       <p:sp>
         <p:nvSpPr>
-          <p:cNvPr id="9" name="Text 7"/>
+          <p:cNvPr id="10" name="Text 8"/>
           <p:cNvSpPr/>
           <p:nvPr/>
         </p:nvSpPr>
@@ -14772,7 +16112,7 @@
           <a:bodyPr wrap="square" lIns="0" tIns="0" rIns="0" bIns="0" rtlCol="0" anchor="ctr"/>
           <a:lstStyle/>
           <a:p>
-            <a:pPr algn="l" indent="0" marL="0">
+            <a:pPr marL="0" indent="0" algn="l">
               <a:buNone/>
             </a:pPr>
             <a:r>
@@ -14789,7 +16129,7 @@
             <a:endParaRPr lang="en-US" sz="900" dirty="0"/>
           </a:p>
           <a:p>
-            <a:pPr algn="l" indent="0" marL="0">
+            <a:pPr marL="0" indent="0" algn="l">
               <a:buNone/>
             </a:pPr>
             <a:r>
@@ -14806,7 +16146,7 @@
             <a:endParaRPr lang="en-US" sz="900" dirty="0"/>
           </a:p>
           <a:p>
-            <a:pPr algn="l" indent="0" marL="0">
+            <a:pPr marL="0" indent="0" algn="l">
               <a:buNone/>
             </a:pPr>
             <a:r>
@@ -14823,7 +16163,7 @@
             <a:endParaRPr lang="en-US" sz="900" dirty="0"/>
           </a:p>
           <a:p>
-            <a:pPr algn="l" indent="0" marL="0">
+            <a:pPr marL="0" indent="0" algn="l">
               <a:buNone/>
             </a:pPr>
             <a:r>
@@ -14840,7 +16180,7 @@
             <a:endParaRPr lang="en-US" sz="900" dirty="0"/>
           </a:p>
           <a:p>
-            <a:pPr algn="l" indent="0" marL="0">
+            <a:pPr marL="0" indent="0" algn="l">
               <a:buNone/>
             </a:pPr>
             <a:r>
@@ -14860,7 +16200,7 @@
       </p:sp>
       <p:sp>
         <p:nvSpPr>
-          <p:cNvPr id="10" name="Shape 8"/>
+          <p:cNvPr id="11" name="Shape 9"/>
           <p:cNvSpPr/>
           <p:nvPr/>
         </p:nvSpPr>
@@ -14882,17 +16222,24 @@
             <a:prstDash val="solid"/>
           </a:ln>
           <a:effectLst>
-            <a:outerShdw sx="100000" sy="100000" kx="0" ky="0" algn="bl" rotWithShape="0" blurRad="101600" dist="38100" dir="8100000">
+            <a:outerShdw blurRad="101600" dist="38100" dir="8100000" algn="bl" rotWithShape="0">
               <a:srgbClr val="000000">
                 <a:alpha val="10000"/>
               </a:srgbClr>
             </a:outerShdw>
           </a:effectLst>
         </p:spPr>
-      </p:sp>
-      <p:sp>
-        <p:nvSpPr>
-          <p:cNvPr id="11" name="Shape 9"/>
+        <p:txBody>
+          <a:bodyPr/>
+          <a:lstStyle/>
+          <a:p>
+            <a:endParaRPr lang="en-US"/>
+          </a:p>
+        </p:txBody>
+      </p:sp>
+      <p:sp>
+        <p:nvSpPr>
+          <p:cNvPr id="12" name="Shape 10"/>
           <p:cNvSpPr/>
           <p:nvPr/>
         </p:nvSpPr>
@@ -14914,10 +16261,17 @@
             <a:prstDash val="solid"/>
           </a:ln>
         </p:spPr>
-      </p:sp>
-      <p:sp>
-        <p:nvSpPr>
-          <p:cNvPr id="12" name="Text 10"/>
+        <p:txBody>
+          <a:bodyPr/>
+          <a:lstStyle/>
+          <a:p>
+            <a:endParaRPr lang="en-US"/>
+          </a:p>
+        </p:txBody>
+      </p:sp>
+      <p:sp>
+        <p:nvSpPr>
+          <p:cNvPr id="13" name="Text 11"/>
           <p:cNvSpPr/>
           <p:nvPr/>
         </p:nvSpPr>
@@ -14936,7 +16290,7 @@
           <a:bodyPr wrap="square" lIns="0" tIns="0" rIns="0" bIns="0" rtlCol="0" anchor="ctr"/>
           <a:lstStyle/>
           <a:p>
-            <a:pPr algn="l" indent="0" marL="0">
+            <a:pPr marL="0" indent="0" algn="l">
               <a:buNone/>
             </a:pPr>
             <a:r>
@@ -14956,7 +16310,7 @@
       </p:sp>
       <p:sp>
         <p:nvSpPr>
-          <p:cNvPr id="13" name="Text 11"/>
+          <p:cNvPr id="14" name="Text 12"/>
           <p:cNvSpPr/>
           <p:nvPr/>
         </p:nvSpPr>
@@ -14975,7 +16329,7 @@
           <a:bodyPr wrap="square" lIns="0" tIns="0" rIns="0" bIns="0" rtlCol="0" anchor="ctr"/>
           <a:lstStyle/>
           <a:p>
-            <a:pPr algn="l" indent="0" marL="0">
+            <a:pPr marL="0" indent="0" algn="l">
               <a:buNone/>
             </a:pPr>
             <a:r>
@@ -14992,7 +16346,7 @@
             <a:endParaRPr lang="en-US" sz="900" dirty="0"/>
           </a:p>
           <a:p>
-            <a:pPr algn="l" indent="0" marL="0">
+            <a:pPr marL="0" indent="0" algn="l">
               <a:buNone/>
             </a:pPr>
             <a:r>
@@ -15009,7 +16363,7 @@
             <a:endParaRPr lang="en-US" sz="900" dirty="0"/>
           </a:p>
           <a:p>
-            <a:pPr algn="l" indent="0" marL="0">
+            <a:pPr marL="0" indent="0" algn="l">
               <a:buNone/>
             </a:pPr>
             <a:r>
@@ -15026,7 +16380,7 @@
             <a:endParaRPr lang="en-US" sz="900" dirty="0"/>
           </a:p>
           <a:p>
-            <a:pPr algn="l" indent="0" marL="0">
+            <a:pPr marL="0" indent="0" algn="l">
               <a:buNone/>
             </a:pPr>
             <a:r>
@@ -15046,7 +16400,7 @@
       </p:sp>
       <p:sp>
         <p:nvSpPr>
-          <p:cNvPr id="14" name="Shape 12"/>
+          <p:cNvPr id="15" name="Shape 13"/>
           <p:cNvSpPr/>
           <p:nvPr/>
         </p:nvSpPr>
@@ -15068,17 +16422,24 @@
             <a:prstDash val="solid"/>
           </a:ln>
           <a:effectLst>
-            <a:outerShdw sx="100000" sy="100000" kx="0" ky="0" algn="bl" rotWithShape="0" blurRad="101600" dist="38100" dir="8100000">
+            <a:outerShdw blurRad="101600" dist="38100" dir="8100000" algn="bl" rotWithShape="0">
               <a:srgbClr val="000000">
                 <a:alpha val="10000"/>
               </a:srgbClr>
             </a:outerShdw>
           </a:effectLst>
         </p:spPr>
-      </p:sp>
-      <p:sp>
-        <p:nvSpPr>
-          <p:cNvPr id="15" name="Shape 13"/>
+        <p:txBody>
+          <a:bodyPr/>
+          <a:lstStyle/>
+          <a:p>
+            <a:endParaRPr lang="en-US"/>
+          </a:p>
+        </p:txBody>
+      </p:sp>
+      <p:sp>
+        <p:nvSpPr>
+          <p:cNvPr id="16" name="Shape 14"/>
           <p:cNvSpPr/>
           <p:nvPr/>
         </p:nvSpPr>
@@ -15100,10 +16461,17 @@
             <a:prstDash val="solid"/>
           </a:ln>
         </p:spPr>
-      </p:sp>
-      <p:sp>
-        <p:nvSpPr>
-          <p:cNvPr id="16" name="Text 14"/>
+        <p:txBody>
+          <a:bodyPr/>
+          <a:lstStyle/>
+          <a:p>
+            <a:endParaRPr lang="en-US"/>
+          </a:p>
+        </p:txBody>
+      </p:sp>
+      <p:sp>
+        <p:nvSpPr>
+          <p:cNvPr id="17" name="Text 15"/>
           <p:cNvSpPr/>
           <p:nvPr/>
         </p:nvSpPr>
@@ -15122,7 +16490,7 @@
           <a:bodyPr wrap="square" lIns="0" tIns="0" rIns="0" bIns="0" rtlCol="0" anchor="ctr"/>
           <a:lstStyle/>
           <a:p>
-            <a:pPr algn="l" indent="0" marL="0">
+            <a:pPr marL="0" indent="0" algn="l">
               <a:buNone/>
             </a:pPr>
             <a:r>
@@ -15142,7 +16510,7 @@
       </p:sp>
       <p:sp>
         <p:nvSpPr>
-          <p:cNvPr id="17" name="Text 15"/>
+          <p:cNvPr id="18" name="Text 16"/>
           <p:cNvSpPr/>
           <p:nvPr/>
         </p:nvSpPr>
@@ -15161,7 +16529,7 @@
           <a:bodyPr wrap="square" lIns="0" tIns="0" rIns="0" bIns="0" rtlCol="0" anchor="ctr"/>
           <a:lstStyle/>
           <a:p>
-            <a:pPr algn="l" indent="0" marL="0">
+            <a:pPr marL="0" indent="0" algn="l">
               <a:buNone/>
             </a:pPr>
             <a:r>
@@ -15178,7 +16546,7 @@
             <a:endParaRPr lang="en-US" sz="900" dirty="0"/>
           </a:p>
           <a:p>
-            <a:pPr algn="l" indent="0" marL="0">
+            <a:pPr marL="0" indent="0" algn="l">
               <a:buNone/>
             </a:pPr>
             <a:r>
@@ -15195,7 +16563,7 @@
             <a:endParaRPr lang="en-US" sz="900" dirty="0"/>
           </a:p>
           <a:p>
-            <a:pPr algn="l" indent="0" marL="0">
+            <a:pPr marL="0" indent="0" algn="l">
               <a:buNone/>
             </a:pPr>
             <a:r>
@@ -15212,7 +16580,7 @@
             <a:endParaRPr lang="en-US" sz="900" dirty="0"/>
           </a:p>
           <a:p>
-            <a:pPr algn="l" indent="0" marL="0">
+            <a:pPr marL="0" indent="0" algn="l">
               <a:buNone/>
             </a:pPr>
             <a:r>
@@ -15232,7 +16600,7 @@
       </p:sp>
       <p:sp>
         <p:nvSpPr>
-          <p:cNvPr id="18" name="Shape 16"/>
+          <p:cNvPr id="19" name="Shape 17"/>
           <p:cNvSpPr/>
           <p:nvPr/>
         </p:nvSpPr>
@@ -15254,17 +16622,24 @@
             <a:prstDash val="solid"/>
           </a:ln>
           <a:effectLst>
-            <a:outerShdw sx="100000" sy="100000" kx="0" ky="0" algn="bl" rotWithShape="0" blurRad="101600" dist="38100" dir="8100000">
+            <a:outerShdw blurRad="101600" dist="38100" dir="8100000" algn="bl" rotWithShape="0">
               <a:srgbClr val="000000">
                 <a:alpha val="10000"/>
               </a:srgbClr>
             </a:outerShdw>
           </a:effectLst>
         </p:spPr>
-      </p:sp>
-      <p:sp>
-        <p:nvSpPr>
-          <p:cNvPr id="19" name="Shape 17"/>
+        <p:txBody>
+          <a:bodyPr/>
+          <a:lstStyle/>
+          <a:p>
+            <a:endParaRPr lang="en-US"/>
+          </a:p>
+        </p:txBody>
+      </p:sp>
+      <p:sp>
+        <p:nvSpPr>
+          <p:cNvPr id="20" name="Shape 18"/>
           <p:cNvSpPr/>
           <p:nvPr/>
         </p:nvSpPr>
@@ -15286,10 +16661,17 @@
             <a:prstDash val="solid"/>
           </a:ln>
         </p:spPr>
-      </p:sp>
-      <p:sp>
-        <p:nvSpPr>
-          <p:cNvPr id="20" name="Text 18"/>
+        <p:txBody>
+          <a:bodyPr/>
+          <a:lstStyle/>
+          <a:p>
+            <a:endParaRPr lang="en-US"/>
+          </a:p>
+        </p:txBody>
+      </p:sp>
+      <p:sp>
+        <p:nvSpPr>
+          <p:cNvPr id="21" name="Text 19"/>
           <p:cNvSpPr/>
           <p:nvPr/>
         </p:nvSpPr>
@@ -15308,7 +16690,7 @@
           <a:bodyPr wrap="square" lIns="0" tIns="0" rIns="0" bIns="0" rtlCol="0" anchor="ctr"/>
           <a:lstStyle/>
           <a:p>
-            <a:pPr algn="l" indent="0" marL="0">
+            <a:pPr marL="0" indent="0" algn="l">
               <a:buNone/>
             </a:pPr>
             <a:r>
@@ -15328,7 +16710,7 @@
       </p:sp>
       <p:sp>
         <p:nvSpPr>
-          <p:cNvPr id="21" name="Text 19"/>
+          <p:cNvPr id="22" name="Text 20"/>
           <p:cNvSpPr/>
           <p:nvPr/>
         </p:nvSpPr>
@@ -15347,7 +16729,7 @@
           <a:bodyPr wrap="square" lIns="0" tIns="0" rIns="0" bIns="0" rtlCol="0" anchor="ctr"/>
           <a:lstStyle/>
           <a:p>
-            <a:pPr algn="l" indent="0" marL="0">
+            <a:pPr marL="0" indent="0" algn="l">
               <a:buNone/>
             </a:pPr>
             <a:r>
@@ -15364,7 +16746,7 @@
             <a:endParaRPr lang="en-US" sz="900" dirty="0"/>
           </a:p>
           <a:p>
-            <a:pPr algn="l" indent="0" marL="0">
+            <a:pPr marL="0" indent="0" algn="l">
               <a:buNone/>
             </a:pPr>
             <a:r>
@@ -15381,7 +16763,7 @@
             <a:endParaRPr lang="en-US" sz="900" dirty="0"/>
           </a:p>
           <a:p>
-            <a:pPr algn="l" indent="0" marL="0">
+            <a:pPr marL="0" indent="0" algn="l">
               <a:buNone/>
             </a:pPr>
             <a:r>
@@ -15398,7 +16780,7 @@
             <a:endParaRPr lang="en-US" sz="900" dirty="0"/>
           </a:p>
           <a:p>
-            <a:pPr algn="l" indent="0" marL="0">
+            <a:pPr marL="0" indent="0" algn="l">
               <a:buNone/>
             </a:pPr>
             <a:r>
@@ -15717,4 +17099,319 @@
     </a:ext>
   </a:extLst>
 </a:theme>
+</file>
+
+<file path=ppt/theme/theme2.xml><?xml version="1.0" encoding="utf-8"?>
+<a:theme xmlns:a="http://schemas.openxmlformats.org/drawingml/2006/main" name="Office Theme">
+  <a:themeElements>
+    <a:clrScheme name="Office">
+      <a:dk1>
+        <a:sysClr val="windowText" lastClr="000000"/>
+      </a:dk1>
+      <a:lt1>
+        <a:sysClr val="window" lastClr="FFFFFF"/>
+      </a:lt1>
+      <a:dk2>
+        <a:srgbClr val="0E2841"/>
+      </a:dk2>
+      <a:lt2>
+        <a:srgbClr val="E8E8E8"/>
+      </a:lt2>
+      <a:accent1>
+        <a:srgbClr val="156082"/>
+      </a:accent1>
+      <a:accent2>
+        <a:srgbClr val="E97132"/>
+      </a:accent2>
+      <a:accent3>
+        <a:srgbClr val="196B24"/>
+      </a:accent3>
+      <a:accent4>
+        <a:srgbClr val="0F9ED5"/>
+      </a:accent4>
+      <a:accent5>
+        <a:srgbClr val="A02B93"/>
+      </a:accent5>
+      <a:accent6>
+        <a:srgbClr val="4EA72E"/>
+      </a:accent6>
+      <a:hlink>
+        <a:srgbClr val="467886"/>
+      </a:hlink>
+      <a:folHlink>
+        <a:srgbClr val="96607D"/>
+      </a:folHlink>
+    </a:clrScheme>
+    <a:fontScheme name="Office">
+      <a:majorFont>
+        <a:latin typeface="Aptos Display" panose="02110004020202020204"/>
+        <a:ea typeface=""/>
+        <a:cs typeface=""/>
+        <a:font script="Jpan" typeface="游ゴシック Light"/>
+        <a:font script="Hang" typeface="맑은 고딕"/>
+        <a:font script="Hans" typeface="等线 Light"/>
+        <a:font script="Hant" typeface="新細明體"/>
+        <a:font script="Arab" typeface="Times New Roman"/>
+        <a:font script="Hebr" typeface="Times New Roman"/>
+        <a:font script="Thai" typeface="Angsana New"/>
+        <a:font script="Ethi" typeface="Nyala"/>
+        <a:font script="Beng" typeface="Vrinda"/>
+        <a:font script="Gujr" typeface="Shruti"/>
+        <a:font script="Khmr" typeface="MoolBoran"/>
+        <a:font script="Knda" typeface="Tunga"/>
+        <a:font script="Guru" typeface="Raavi"/>
+        <a:font script="Cans" typeface="Euphemia"/>
+        <a:font script="Cher" typeface="Plantagenet Cherokee"/>
+        <a:font script="Yiii" typeface="Microsoft Yi Baiti"/>
+        <a:font script="Tibt" typeface="Microsoft Himalaya"/>
+        <a:font script="Thaa" typeface="MV Boli"/>
+        <a:font script="Deva" typeface="Mangal"/>
+        <a:font script="Telu" typeface="Gautami"/>
+        <a:font script="Taml" typeface="Latha"/>
+        <a:font script="Syrc" typeface="Estrangelo Edessa"/>
+        <a:font script="Orya" typeface="Kalinga"/>
+        <a:font script="Mlym" typeface="Kartika"/>
+        <a:font script="Laoo" typeface="DokChampa"/>
+        <a:font script="Sinh" typeface="Iskoola Pota"/>
+        <a:font script="Mong" typeface="Mongolian Baiti"/>
+        <a:font script="Viet" typeface="Times New Roman"/>
+        <a:font script="Uigh" typeface="Microsoft Uighur"/>
+        <a:font script="Geor" typeface="Sylfaen"/>
+        <a:font script="Armn" typeface="Arial"/>
+        <a:font script="Bugi" typeface="Leelawadee UI"/>
+        <a:font script="Bopo" typeface="Microsoft JhengHei"/>
+        <a:font script="Java" typeface="Javanese Text"/>
+        <a:font script="Lisu" typeface="Segoe UI"/>
+        <a:font script="Mymr" typeface="Myanmar Text"/>
+        <a:font script="Nkoo" typeface="Ebrima"/>
+        <a:font script="Olck" typeface="Nirmala UI"/>
+        <a:font script="Osma" typeface="Ebrima"/>
+        <a:font script="Phag" typeface="Phagspa"/>
+        <a:font script="Syrn" typeface="Estrangelo Edessa"/>
+        <a:font script="Syrj" typeface="Estrangelo Edessa"/>
+        <a:font script="Syre" typeface="Estrangelo Edessa"/>
+        <a:font script="Sora" typeface="Nirmala UI"/>
+        <a:font script="Tale" typeface="Microsoft Tai Le"/>
+        <a:font script="Talu" typeface="Microsoft New Tai Lue"/>
+        <a:font script="Tfng" typeface="Ebrima"/>
+      </a:majorFont>
+      <a:minorFont>
+        <a:latin typeface="Aptos" panose="02110004020202020204"/>
+        <a:ea typeface=""/>
+        <a:cs typeface=""/>
+        <a:font script="Jpan" typeface="游ゴシック"/>
+        <a:font script="Hang" typeface="맑은 고딕"/>
+        <a:font script="Hans" typeface="等线"/>
+        <a:font script="Hant" typeface="新細明體"/>
+        <a:font script="Arab" typeface="Arial"/>
+        <a:font script="Hebr" typeface="Arial"/>
+        <a:font script="Thai" typeface="Cordia New"/>
+        <a:font script="Ethi" typeface="Nyala"/>
+        <a:font script="Beng" typeface="Vrinda"/>
+        <a:font script="Gujr" typeface="Shruti"/>
+        <a:font script="Khmr" typeface="DaunPenh"/>
+        <a:font script="Knda" typeface="Tunga"/>
+        <a:font script="Guru" typeface="Raavi"/>
+        <a:font script="Cans" typeface="Euphemia"/>
+        <a:font script="Cher" typeface="Plantagenet Cherokee"/>
+        <a:font script="Yiii" typeface="Microsoft Yi Baiti"/>
+        <a:font script="Tibt" typeface="Microsoft Himalaya"/>
+        <a:font script="Thaa" typeface="MV Boli"/>
+        <a:font script="Deva" typeface="Mangal"/>
+        <a:font script="Telu" typeface="Gautami"/>
+        <a:font script="Taml" typeface="Latha"/>
+        <a:font script="Syrc" typeface="Estrangelo Edessa"/>
+        <a:font script="Orya" typeface="Kalinga"/>
+        <a:font script="Mlym" typeface="Kartika"/>
+        <a:font script="Laoo" typeface="DokChampa"/>
+        <a:font script="Sinh" typeface="Iskoola Pota"/>
+        <a:font script="Mong" typeface="Mongolian Baiti"/>
+        <a:font script="Viet" typeface="Arial"/>
+        <a:font script="Uigh" typeface="Microsoft Uighur"/>
+        <a:font script="Geor" typeface="Sylfaen"/>
+        <a:font script="Armn" typeface="Arial"/>
+        <a:font script="Bugi" typeface="Leelawadee UI"/>
+        <a:font script="Bopo" typeface="Microsoft JhengHei"/>
+        <a:font script="Java" typeface="Javanese Text"/>
+        <a:font script="Lisu" typeface="Segoe UI"/>
+        <a:font script="Mymr" typeface="Myanmar Text"/>
+        <a:font script="Nkoo" typeface="Ebrima"/>
+        <a:font script="Olck" typeface="Nirmala UI"/>
+        <a:font script="Osma" typeface="Ebrima"/>
+        <a:font script="Phag" typeface="Phagspa"/>
+        <a:font script="Syrn" typeface="Estrangelo Edessa"/>
+        <a:font script="Syrj" typeface="Estrangelo Edessa"/>
+        <a:font script="Syre" typeface="Estrangelo Edessa"/>
+        <a:font script="Sora" typeface="Nirmala UI"/>
+        <a:font script="Tale" typeface="Microsoft Tai Le"/>
+        <a:font script="Talu" typeface="Microsoft New Tai Lue"/>
+        <a:font script="Tfng" typeface="Ebrima"/>
+      </a:minorFont>
+    </a:fontScheme>
+    <a:fmtScheme name="Office">
+      <a:fillStyleLst>
+        <a:solidFill>
+          <a:schemeClr val="phClr"/>
+        </a:solidFill>
+        <a:gradFill rotWithShape="1">
+          <a:gsLst>
+            <a:gs pos="0">
+              <a:schemeClr val="phClr">
+                <a:lumMod val="110000"/>
+                <a:satMod val="105000"/>
+                <a:tint val="67000"/>
+              </a:schemeClr>
+            </a:gs>
+            <a:gs pos="50000">
+              <a:schemeClr val="phClr">
+                <a:lumMod val="105000"/>
+                <a:satMod val="103000"/>
+                <a:tint val="73000"/>
+              </a:schemeClr>
+            </a:gs>
+            <a:gs pos="100000">
+              <a:schemeClr val="phClr">
+                <a:lumMod val="105000"/>
+                <a:satMod val="109000"/>
+                <a:tint val="81000"/>
+              </a:schemeClr>
+            </a:gs>
+          </a:gsLst>
+          <a:lin ang="5400000" scaled="0"/>
+        </a:gradFill>
+        <a:gradFill rotWithShape="1">
+          <a:gsLst>
+            <a:gs pos="0">
+              <a:schemeClr val="phClr">
+                <a:satMod val="103000"/>
+                <a:lumMod val="102000"/>
+                <a:tint val="94000"/>
+              </a:schemeClr>
+            </a:gs>
+            <a:gs pos="50000">
+              <a:schemeClr val="phClr">
+                <a:satMod val="110000"/>
+                <a:lumMod val="100000"/>
+                <a:shade val="100000"/>
+              </a:schemeClr>
+            </a:gs>
+            <a:gs pos="100000">
+              <a:schemeClr val="phClr">
+                <a:lumMod val="99000"/>
+                <a:satMod val="120000"/>
+                <a:shade val="78000"/>
+              </a:schemeClr>
+            </a:gs>
+          </a:gsLst>
+          <a:lin ang="5400000" scaled="0"/>
+        </a:gradFill>
+      </a:fillStyleLst>
+      <a:lnStyleLst>
+        <a:ln w="12700" cap="flat" cmpd="sng" algn="ctr">
+          <a:solidFill>
+            <a:schemeClr val="phClr"/>
+          </a:solidFill>
+          <a:prstDash val="solid"/>
+          <a:miter lim="800000"/>
+        </a:ln>
+        <a:ln w="19050" cap="flat" cmpd="sng" algn="ctr">
+          <a:solidFill>
+            <a:schemeClr val="phClr"/>
+          </a:solidFill>
+          <a:prstDash val="solid"/>
+          <a:miter lim="800000"/>
+        </a:ln>
+        <a:ln w="25400" cap="flat" cmpd="sng" algn="ctr">
+          <a:solidFill>
+            <a:schemeClr val="phClr"/>
+          </a:solidFill>
+          <a:prstDash val="solid"/>
+          <a:miter lim="800000"/>
+        </a:ln>
+      </a:lnStyleLst>
+      <a:effectStyleLst>
+        <a:effectStyle>
+          <a:effectLst/>
+        </a:effectStyle>
+        <a:effectStyle>
+          <a:effectLst/>
+        </a:effectStyle>
+        <a:effectStyle>
+          <a:effectLst>
+            <a:outerShdw blurRad="57150" dist="19050" dir="5400000" algn="ctr" rotWithShape="0">
+              <a:srgbClr val="000000">
+                <a:alpha val="63000"/>
+              </a:srgbClr>
+            </a:outerShdw>
+          </a:effectLst>
+        </a:effectStyle>
+      </a:effectStyleLst>
+      <a:bgFillStyleLst>
+        <a:solidFill>
+          <a:schemeClr val="phClr"/>
+        </a:solidFill>
+        <a:solidFill>
+          <a:schemeClr val="phClr">
+            <a:tint val="95000"/>
+            <a:satMod val="170000"/>
+          </a:schemeClr>
+        </a:solidFill>
+        <a:gradFill rotWithShape="1">
+          <a:gsLst>
+            <a:gs pos="0">
+              <a:schemeClr val="phClr">
+                <a:tint val="93000"/>
+                <a:satMod val="150000"/>
+                <a:shade val="98000"/>
+                <a:lumMod val="102000"/>
+              </a:schemeClr>
+            </a:gs>
+            <a:gs pos="50000">
+              <a:schemeClr val="phClr">
+                <a:tint val="98000"/>
+                <a:satMod val="130000"/>
+                <a:shade val="90000"/>
+                <a:lumMod val="103000"/>
+              </a:schemeClr>
+            </a:gs>
+            <a:gs pos="100000">
+              <a:schemeClr val="phClr">
+                <a:shade val="63000"/>
+                <a:satMod val="120000"/>
+              </a:schemeClr>
+            </a:gs>
+          </a:gsLst>
+          <a:lin ang="5400000" scaled="0"/>
+        </a:gradFill>
+      </a:bgFillStyleLst>
+    </a:fmtScheme>
+  </a:themeElements>
+  <a:objectDefaults>
+    <a:lnDef>
+      <a:spPr/>
+      <a:bodyPr/>
+      <a:lstStyle/>
+      <a:style>
+        <a:lnRef idx="2">
+          <a:schemeClr val="accent1"/>
+        </a:lnRef>
+        <a:fillRef idx="0">
+          <a:schemeClr val="accent1"/>
+        </a:fillRef>
+        <a:effectRef idx="1">
+          <a:schemeClr val="accent1"/>
+        </a:effectRef>
+        <a:fontRef idx="minor">
+          <a:schemeClr val="tx1"/>
+        </a:fontRef>
+      </a:style>
+    </a:lnDef>
+  </a:objectDefaults>
+  <a:extraClrSchemeLst/>
+  <a:extLst>
+    <a:ext uri="{05A4C25C-085E-4340-85A3-A5531E510DB2}">
+      <thm15:themeFamily xmlns:thm15="http://schemas.microsoft.com/office/thememl/2012/main" name="Office Theme" id="{2E142A2C-CD16-42D6-873A-C26D2A0506FA}" vid="{1BDDFF52-6CD6-40A5-AB3C-68EB2F1E4D0A}"/>
+    </a:ext>
+  </a:extLst>
+</a:theme>
 </file>